--- a/livrables/Presentation_Soutenance_CongesFlow.pptx
+++ b/livrables/Presentation_Soutenance_CongesFlow.pptx
@@ -19,9 +19,14 @@
     <p:sldId id="267" r:id="rId13"/>
     <p:sldId id="268" r:id="rId14"/>
     <p:sldId id="269" r:id="rId15"/>
+    <p:sldId id="270" r:id="rId16"/>
+    <p:sldId id="271" r:id="rId17"/>
+    <p:sldId id="272" r:id="rId18"/>
+    <p:sldId id="273" r:id="rId19"/>
+    <p:sldId id="274" r:id="rId20"/>
   </p:sldIdLst>
   <p:notesMasterIdLst>
-    <p:notesMasterId r:id="rId16"/>
+    <p:notesMasterId r:id="rId21"/>
   </p:notesMasterIdLst>
   <p:sldSz cx="12191695" cy="6858000"/>
   <p:notesSz cx="6858000" cy="12191695"/>
@@ -979,6 +984,446 @@
             <a:fld id="{F7021451-1387-4CA6-816F-3879F97B5CBC}" type="slidenum">
               <a:rPr lang="en-US"/>
               <a:t>14</a:t>
+            </a:fld>
+            <a:endParaRPr lang="en-US"/>
+          </a:p>
+        </p:txBody>
+      </p:sp>
+    </p:spTree>
+    <p:extLst>
+      <p:ext uri="{BB962C8B-B14F-4D97-AF65-F5344CB8AC3E}">
+        <p14:creationId xmlns:p14="http://schemas.microsoft.com/office/powerpoint/2010/main" val="1024086991"/>
+      </p:ext>
+    </p:extLst>
+  </p:cSld>
+  <p:clrMapOvr>
+    <a:masterClrMapping/>
+  </p:clrMapOvr>
+</p:notes>
+</file>
+
+<file path=ppt/notesSlides/notesSlide15.xml><?xml version="1.0" encoding="utf-8"?>
+<p:notes xmlns:a="http://schemas.openxmlformats.org/drawingml/2006/main" xmlns:r="http://schemas.openxmlformats.org/officeDocument/2006/relationships" xmlns:p="http://schemas.openxmlformats.org/presentationml/2006/main">
+  <p:cSld>
+    <p:spTree>
+      <p:nvGrpSpPr>
+        <p:cNvPr id="1" name=""/>
+        <p:cNvGrpSpPr/>
+        <p:nvPr/>
+      </p:nvGrpSpPr>
+      <p:grpSpPr>
+        <a:xfrm>
+          <a:off x="0" y="0"/>
+          <a:ext cx="0" cy="0"/>
+          <a:chOff x="0" y="0"/>
+          <a:chExt cx="0" cy="0"/>
+        </a:xfrm>
+      </p:grpSpPr>
+      <p:sp>
+        <p:nvSpPr>
+          <p:cNvPr id="2" name="Slide Image Placeholder 1"/>
+          <p:cNvSpPr>
+            <a:spLocks noGrp="1" noRot="1" noChangeAspect="1"/>
+          </p:cNvSpPr>
+          <p:nvPr>
+            <p:ph type="sldImg"/>
+          </p:nvPr>
+        </p:nvSpPr>
+        <p:spPr/>
+      </p:sp>
+      <p:sp>
+        <p:nvSpPr>
+          <p:cNvPr id="3" name="Notes Placeholder 2"/>
+          <p:cNvSpPr>
+            <a:spLocks noGrp="1"/>
+          </p:cNvSpPr>
+          <p:nvPr>
+            <p:ph type="body" idx="1"/>
+          </p:nvPr>
+        </p:nvSpPr>
+        <p:spPr/>
+        <p:txBody>
+          <a:bodyPr/>
+          <a:lstStyle/>
+          <a:p>
+            <a:r>
+              <a:rPr lang="en-US" dirty="0"/>
+              <a:t/>
+            </a:r>
+            <a:endParaRPr lang="en-US" dirty="0"/>
+          </a:p>
+        </p:txBody>
+      </p:sp>
+      <p:sp>
+        <p:nvSpPr>
+          <p:cNvPr id="4" name="Slide Number Placeholder 3"/>
+          <p:cNvSpPr>
+            <a:spLocks noGrp="1"/>
+          </p:cNvSpPr>
+          <p:nvPr>
+            <p:ph type="sldNum" sz="quarter" idx="10"/>
+          </p:nvPr>
+        </p:nvSpPr>
+        <p:spPr/>
+        <p:txBody>
+          <a:bodyPr/>
+          <a:lstStyle/>
+          <a:p>
+            <a:fld id="{F7021451-1387-4CA6-816F-3879F97B5CBC}" type="slidenum">
+              <a:rPr lang="en-US"/>
+              <a:t>15</a:t>
+            </a:fld>
+            <a:endParaRPr lang="en-US"/>
+          </a:p>
+        </p:txBody>
+      </p:sp>
+    </p:spTree>
+    <p:extLst>
+      <p:ext uri="{BB962C8B-B14F-4D97-AF65-F5344CB8AC3E}">
+        <p14:creationId xmlns:p14="http://schemas.microsoft.com/office/powerpoint/2010/main" val="1024086991"/>
+      </p:ext>
+    </p:extLst>
+  </p:cSld>
+  <p:clrMapOvr>
+    <a:masterClrMapping/>
+  </p:clrMapOvr>
+</p:notes>
+</file>
+
+<file path=ppt/notesSlides/notesSlide16.xml><?xml version="1.0" encoding="utf-8"?>
+<p:notes xmlns:a="http://schemas.openxmlformats.org/drawingml/2006/main" xmlns:r="http://schemas.openxmlformats.org/officeDocument/2006/relationships" xmlns:p="http://schemas.openxmlformats.org/presentationml/2006/main">
+  <p:cSld>
+    <p:spTree>
+      <p:nvGrpSpPr>
+        <p:cNvPr id="1" name=""/>
+        <p:cNvGrpSpPr/>
+        <p:nvPr/>
+      </p:nvGrpSpPr>
+      <p:grpSpPr>
+        <a:xfrm>
+          <a:off x="0" y="0"/>
+          <a:ext cx="0" cy="0"/>
+          <a:chOff x="0" y="0"/>
+          <a:chExt cx="0" cy="0"/>
+        </a:xfrm>
+      </p:grpSpPr>
+      <p:sp>
+        <p:nvSpPr>
+          <p:cNvPr id="2" name="Slide Image Placeholder 1"/>
+          <p:cNvSpPr>
+            <a:spLocks noGrp="1" noRot="1" noChangeAspect="1"/>
+          </p:cNvSpPr>
+          <p:nvPr>
+            <p:ph type="sldImg"/>
+          </p:nvPr>
+        </p:nvSpPr>
+        <p:spPr/>
+      </p:sp>
+      <p:sp>
+        <p:nvSpPr>
+          <p:cNvPr id="3" name="Notes Placeholder 2"/>
+          <p:cNvSpPr>
+            <a:spLocks noGrp="1"/>
+          </p:cNvSpPr>
+          <p:nvPr>
+            <p:ph type="body" idx="1"/>
+          </p:nvPr>
+        </p:nvSpPr>
+        <p:spPr/>
+        <p:txBody>
+          <a:bodyPr/>
+          <a:lstStyle/>
+          <a:p>
+            <a:r>
+              <a:rPr lang="en-US" dirty="0"/>
+              <a:t/>
+            </a:r>
+            <a:endParaRPr lang="en-US" dirty="0"/>
+          </a:p>
+        </p:txBody>
+      </p:sp>
+      <p:sp>
+        <p:nvSpPr>
+          <p:cNvPr id="4" name="Slide Number Placeholder 3"/>
+          <p:cNvSpPr>
+            <a:spLocks noGrp="1"/>
+          </p:cNvSpPr>
+          <p:nvPr>
+            <p:ph type="sldNum" sz="quarter" idx="10"/>
+          </p:nvPr>
+        </p:nvSpPr>
+        <p:spPr/>
+        <p:txBody>
+          <a:bodyPr/>
+          <a:lstStyle/>
+          <a:p>
+            <a:fld id="{F7021451-1387-4CA6-816F-3879F97B5CBC}" type="slidenum">
+              <a:rPr lang="en-US"/>
+              <a:t>16</a:t>
+            </a:fld>
+            <a:endParaRPr lang="en-US"/>
+          </a:p>
+        </p:txBody>
+      </p:sp>
+    </p:spTree>
+    <p:extLst>
+      <p:ext uri="{BB962C8B-B14F-4D97-AF65-F5344CB8AC3E}">
+        <p14:creationId xmlns:p14="http://schemas.microsoft.com/office/powerpoint/2010/main" val="1024086991"/>
+      </p:ext>
+    </p:extLst>
+  </p:cSld>
+  <p:clrMapOvr>
+    <a:masterClrMapping/>
+  </p:clrMapOvr>
+</p:notes>
+</file>
+
+<file path=ppt/notesSlides/notesSlide17.xml><?xml version="1.0" encoding="utf-8"?>
+<p:notes xmlns:a="http://schemas.openxmlformats.org/drawingml/2006/main" xmlns:r="http://schemas.openxmlformats.org/officeDocument/2006/relationships" xmlns:p="http://schemas.openxmlformats.org/presentationml/2006/main">
+  <p:cSld>
+    <p:spTree>
+      <p:nvGrpSpPr>
+        <p:cNvPr id="1" name=""/>
+        <p:cNvGrpSpPr/>
+        <p:nvPr/>
+      </p:nvGrpSpPr>
+      <p:grpSpPr>
+        <a:xfrm>
+          <a:off x="0" y="0"/>
+          <a:ext cx="0" cy="0"/>
+          <a:chOff x="0" y="0"/>
+          <a:chExt cx="0" cy="0"/>
+        </a:xfrm>
+      </p:grpSpPr>
+      <p:sp>
+        <p:nvSpPr>
+          <p:cNvPr id="2" name="Slide Image Placeholder 1"/>
+          <p:cNvSpPr>
+            <a:spLocks noGrp="1" noRot="1" noChangeAspect="1"/>
+          </p:cNvSpPr>
+          <p:nvPr>
+            <p:ph type="sldImg"/>
+          </p:nvPr>
+        </p:nvSpPr>
+        <p:spPr/>
+      </p:sp>
+      <p:sp>
+        <p:nvSpPr>
+          <p:cNvPr id="3" name="Notes Placeholder 2"/>
+          <p:cNvSpPr>
+            <a:spLocks noGrp="1"/>
+          </p:cNvSpPr>
+          <p:nvPr>
+            <p:ph type="body" idx="1"/>
+          </p:nvPr>
+        </p:nvSpPr>
+        <p:spPr/>
+        <p:txBody>
+          <a:bodyPr/>
+          <a:lstStyle/>
+          <a:p>
+            <a:r>
+              <a:rPr lang="en-US" dirty="0"/>
+              <a:t/>
+            </a:r>
+            <a:endParaRPr lang="en-US" dirty="0"/>
+          </a:p>
+        </p:txBody>
+      </p:sp>
+      <p:sp>
+        <p:nvSpPr>
+          <p:cNvPr id="4" name="Slide Number Placeholder 3"/>
+          <p:cNvSpPr>
+            <a:spLocks noGrp="1"/>
+          </p:cNvSpPr>
+          <p:nvPr>
+            <p:ph type="sldNum" sz="quarter" idx="10"/>
+          </p:nvPr>
+        </p:nvSpPr>
+        <p:spPr/>
+        <p:txBody>
+          <a:bodyPr/>
+          <a:lstStyle/>
+          <a:p>
+            <a:fld id="{F7021451-1387-4CA6-816F-3879F97B5CBC}" type="slidenum">
+              <a:rPr lang="en-US"/>
+              <a:t>17</a:t>
+            </a:fld>
+            <a:endParaRPr lang="en-US"/>
+          </a:p>
+        </p:txBody>
+      </p:sp>
+    </p:spTree>
+    <p:extLst>
+      <p:ext uri="{BB962C8B-B14F-4D97-AF65-F5344CB8AC3E}">
+        <p14:creationId xmlns:p14="http://schemas.microsoft.com/office/powerpoint/2010/main" val="1024086991"/>
+      </p:ext>
+    </p:extLst>
+  </p:cSld>
+  <p:clrMapOvr>
+    <a:masterClrMapping/>
+  </p:clrMapOvr>
+</p:notes>
+</file>
+
+<file path=ppt/notesSlides/notesSlide18.xml><?xml version="1.0" encoding="utf-8"?>
+<p:notes xmlns:a="http://schemas.openxmlformats.org/drawingml/2006/main" xmlns:r="http://schemas.openxmlformats.org/officeDocument/2006/relationships" xmlns:p="http://schemas.openxmlformats.org/presentationml/2006/main">
+  <p:cSld>
+    <p:spTree>
+      <p:nvGrpSpPr>
+        <p:cNvPr id="1" name=""/>
+        <p:cNvGrpSpPr/>
+        <p:nvPr/>
+      </p:nvGrpSpPr>
+      <p:grpSpPr>
+        <a:xfrm>
+          <a:off x="0" y="0"/>
+          <a:ext cx="0" cy="0"/>
+          <a:chOff x="0" y="0"/>
+          <a:chExt cx="0" cy="0"/>
+        </a:xfrm>
+      </p:grpSpPr>
+      <p:sp>
+        <p:nvSpPr>
+          <p:cNvPr id="2" name="Slide Image Placeholder 1"/>
+          <p:cNvSpPr>
+            <a:spLocks noGrp="1" noRot="1" noChangeAspect="1"/>
+          </p:cNvSpPr>
+          <p:nvPr>
+            <p:ph type="sldImg"/>
+          </p:nvPr>
+        </p:nvSpPr>
+        <p:spPr/>
+      </p:sp>
+      <p:sp>
+        <p:nvSpPr>
+          <p:cNvPr id="3" name="Notes Placeholder 2"/>
+          <p:cNvSpPr>
+            <a:spLocks noGrp="1"/>
+          </p:cNvSpPr>
+          <p:nvPr>
+            <p:ph type="body" idx="1"/>
+          </p:nvPr>
+        </p:nvSpPr>
+        <p:spPr/>
+        <p:txBody>
+          <a:bodyPr/>
+          <a:lstStyle/>
+          <a:p>
+            <a:r>
+              <a:rPr lang="en-US" dirty="0"/>
+              <a:t/>
+            </a:r>
+            <a:endParaRPr lang="en-US" dirty="0"/>
+          </a:p>
+        </p:txBody>
+      </p:sp>
+      <p:sp>
+        <p:nvSpPr>
+          <p:cNvPr id="4" name="Slide Number Placeholder 3"/>
+          <p:cNvSpPr>
+            <a:spLocks noGrp="1"/>
+          </p:cNvSpPr>
+          <p:nvPr>
+            <p:ph type="sldNum" sz="quarter" idx="10"/>
+          </p:nvPr>
+        </p:nvSpPr>
+        <p:spPr/>
+        <p:txBody>
+          <a:bodyPr/>
+          <a:lstStyle/>
+          <a:p>
+            <a:fld id="{F7021451-1387-4CA6-816F-3879F97B5CBC}" type="slidenum">
+              <a:rPr lang="en-US"/>
+              <a:t>18</a:t>
+            </a:fld>
+            <a:endParaRPr lang="en-US"/>
+          </a:p>
+        </p:txBody>
+      </p:sp>
+    </p:spTree>
+    <p:extLst>
+      <p:ext uri="{BB962C8B-B14F-4D97-AF65-F5344CB8AC3E}">
+        <p14:creationId xmlns:p14="http://schemas.microsoft.com/office/powerpoint/2010/main" val="1024086991"/>
+      </p:ext>
+    </p:extLst>
+  </p:cSld>
+  <p:clrMapOvr>
+    <a:masterClrMapping/>
+  </p:clrMapOvr>
+</p:notes>
+</file>
+
+<file path=ppt/notesSlides/notesSlide19.xml><?xml version="1.0" encoding="utf-8"?>
+<p:notes xmlns:a="http://schemas.openxmlformats.org/drawingml/2006/main" xmlns:r="http://schemas.openxmlformats.org/officeDocument/2006/relationships" xmlns:p="http://schemas.openxmlformats.org/presentationml/2006/main">
+  <p:cSld>
+    <p:spTree>
+      <p:nvGrpSpPr>
+        <p:cNvPr id="1" name=""/>
+        <p:cNvGrpSpPr/>
+        <p:nvPr/>
+      </p:nvGrpSpPr>
+      <p:grpSpPr>
+        <a:xfrm>
+          <a:off x="0" y="0"/>
+          <a:ext cx="0" cy="0"/>
+          <a:chOff x="0" y="0"/>
+          <a:chExt cx="0" cy="0"/>
+        </a:xfrm>
+      </p:grpSpPr>
+      <p:sp>
+        <p:nvSpPr>
+          <p:cNvPr id="2" name="Slide Image Placeholder 1"/>
+          <p:cNvSpPr>
+            <a:spLocks noGrp="1" noRot="1" noChangeAspect="1"/>
+          </p:cNvSpPr>
+          <p:nvPr>
+            <p:ph type="sldImg"/>
+          </p:nvPr>
+        </p:nvSpPr>
+        <p:spPr/>
+      </p:sp>
+      <p:sp>
+        <p:nvSpPr>
+          <p:cNvPr id="3" name="Notes Placeholder 2"/>
+          <p:cNvSpPr>
+            <a:spLocks noGrp="1"/>
+          </p:cNvSpPr>
+          <p:nvPr>
+            <p:ph type="body" idx="1"/>
+          </p:nvPr>
+        </p:nvSpPr>
+        <p:spPr/>
+        <p:txBody>
+          <a:bodyPr/>
+          <a:lstStyle/>
+          <a:p>
+            <a:r>
+              <a:rPr lang="en-US" dirty="0"/>
+              <a:t/>
+            </a:r>
+            <a:endParaRPr lang="en-US" dirty="0"/>
+          </a:p>
+        </p:txBody>
+      </p:sp>
+      <p:sp>
+        <p:nvSpPr>
+          <p:cNvPr id="4" name="Slide Number Placeholder 3"/>
+          <p:cNvSpPr>
+            <a:spLocks noGrp="1"/>
+          </p:cNvSpPr>
+          <p:nvPr>
+            <p:ph type="sldNum" sz="quarter" idx="10"/>
+          </p:nvPr>
+        </p:nvSpPr>
+        <p:spPr/>
+        <p:txBody>
+          <a:bodyPr/>
+          <a:lstStyle/>
+          <a:p>
+            <a:fld id="{F7021451-1387-4CA6-816F-3879F97B5CBC}" type="slidenum">
+              <a:rPr lang="en-US"/>
+              <a:t>19</a:t>
             </a:fld>
             <a:endParaRPr lang="en-US"/>
           </a:p>
@@ -2311,7 +2756,7 @@
                 <a:ea typeface="Calibri" pitchFamily="34" charset="-122"/>
                 <a:cs typeface="Calibri" pitchFamily="34" charset="-120"/>
               </a:rPr>
-              <a:t>08 · DÉMONSTRATION</a:t>
+              <a:t>05 · CONCEPTION</a:t>
             </a:r>
             <a:endParaRPr lang="en-US" sz="1200" dirty="0"/>
           </a:p>
@@ -2350,336 +2795,36 @@
                 <a:ea typeface="Cambria" pitchFamily="34" charset="-122"/>
                 <a:cs typeface="Cambria" pitchFamily="34" charset="-120"/>
               </a:rPr>
-              <a:t>L'application en fonctionnement</a:t>
+              <a:t>Diagramme de classes</a:t>
             </a:r>
             <a:endParaRPr lang="en-US" sz="3000" dirty="0"/>
           </a:p>
         </p:txBody>
       </p:sp>
-      <p:sp>
-        <p:nvSpPr>
-          <p:cNvPr id="4" name="Shape 2"/>
-          <p:cNvSpPr/>
-          <p:nvPr/>
-        </p:nvSpPr>
-        <p:spPr>
-          <a:xfrm>
-            <a:off x="640080" y="1600200"/>
-            <a:ext cx="5394960" cy="2103120"/>
-          </a:xfrm>
-          <a:prstGeom prst="roundRect">
-            <a:avLst>
-              <a:gd name="adj" fmla="val 2609"/>
-            </a:avLst>
-          </a:prstGeom>
-          <a:solidFill>
-            <a:srgbClr val="F4F8FB"/>
-          </a:solidFill>
-          <a:ln w="19050">
-            <a:solidFill>
-              <a:srgbClr val="0B5394"/>
-            </a:solidFill>
-            <a:prstDash val="dash"/>
-          </a:ln>
-        </p:spPr>
-      </p:sp>
-      <p:sp>
-        <p:nvSpPr>
-          <p:cNvPr id="5" name="Text 3"/>
-          <p:cNvSpPr/>
-          <p:nvPr/>
-        </p:nvSpPr>
-        <p:spPr>
-          <a:xfrm>
-            <a:off x="822960" y="1600200"/>
-            <a:ext cx="5029200" cy="2103120"/>
-          </a:xfrm>
-          <a:prstGeom prst="rect">
-            <a:avLst/>
-          </a:prstGeom>
-          <a:noFill/>
-          <a:ln/>
-        </p:spPr>
-        <p:txBody>
-          <a:bodyPr wrap="square" rtlCol="0" anchor="ctr"/>
-          <a:lstStyle/>
-          <a:p>
-            <a:pPr algn="ctr" indent="0" marL="0">
-              <a:buNone/>
-            </a:pPr>
-            <a:r>
-              <a:rPr lang="en-US" sz="1400" b="1" dirty="0">
-                <a:solidFill>
-                  <a:srgbClr val="0B5394"/>
-                </a:solidFill>
-                <a:latin typeface="Calibri" pitchFamily="34" charset="0"/>
-                <a:ea typeface="Calibri" pitchFamily="34" charset="-122"/>
-                <a:cs typeface="Calibri" pitchFamily="34" charset="-120"/>
-              </a:rPr>
-              <a:t>📷 CAPTURE D'ÉCRAN À INSÉRER
-</a:t>
-            </a:r>
-            <a:pPr algn="ctr" indent="0" marL="0">
-              <a:buNone/>
-            </a:pPr>
-            <a:r>
-              <a:rPr lang="en-US" sz="1100" i="1" dirty="0">
-                <a:solidFill>
-                  <a:srgbClr val="5B6B7B"/>
-                </a:solidFill>
-                <a:latin typeface="Calibri" pitchFamily="34" charset="0"/>
-                <a:ea typeface="Calibri" pitchFamily="34" charset="-122"/>
-                <a:cs typeface="Calibri" pitchFamily="34" charset="-120"/>
-              </a:rPr>
-              <a:t>Écran de connexion</a:t>
-            </a:r>
-            <a:endParaRPr lang="en-US" sz="1400" dirty="0"/>
-          </a:p>
-        </p:txBody>
-      </p:sp>
-      <p:sp>
-        <p:nvSpPr>
-          <p:cNvPr id="6" name="Shape 4"/>
-          <p:cNvSpPr/>
-          <p:nvPr/>
-        </p:nvSpPr>
-        <p:spPr>
-          <a:xfrm>
-            <a:off x="6126480" y="1600200"/>
-            <a:ext cx="5394960" cy="2103120"/>
-          </a:xfrm>
-          <a:prstGeom prst="roundRect">
-            <a:avLst>
-              <a:gd name="adj" fmla="val 2609"/>
-            </a:avLst>
-          </a:prstGeom>
-          <a:solidFill>
-            <a:srgbClr val="F4F8FB"/>
-          </a:solidFill>
-          <a:ln w="19050">
-            <a:solidFill>
-              <a:srgbClr val="0B5394"/>
-            </a:solidFill>
-            <a:prstDash val="dash"/>
-          </a:ln>
-        </p:spPr>
-      </p:sp>
-      <p:sp>
-        <p:nvSpPr>
-          <p:cNvPr id="7" name="Text 5"/>
-          <p:cNvSpPr/>
-          <p:nvPr/>
-        </p:nvSpPr>
-        <p:spPr>
-          <a:xfrm>
-            <a:off x="6309360" y="1600200"/>
-            <a:ext cx="5029200" cy="2103120"/>
-          </a:xfrm>
-          <a:prstGeom prst="rect">
-            <a:avLst/>
-          </a:prstGeom>
-          <a:noFill/>
-          <a:ln/>
-        </p:spPr>
-        <p:txBody>
-          <a:bodyPr wrap="square" rtlCol="0" anchor="ctr"/>
-          <a:lstStyle/>
-          <a:p>
-            <a:pPr algn="ctr" indent="0" marL="0">
-              <a:buNone/>
-            </a:pPr>
-            <a:r>
-              <a:rPr lang="en-US" sz="1400" b="1" dirty="0">
-                <a:solidFill>
-                  <a:srgbClr val="0B5394"/>
-                </a:solidFill>
-                <a:latin typeface="Calibri" pitchFamily="34" charset="0"/>
-                <a:ea typeface="Calibri" pitchFamily="34" charset="-122"/>
-                <a:cs typeface="Calibri" pitchFamily="34" charset="-120"/>
-              </a:rPr>
-              <a:t>📷 CAPTURE D'ÉCRAN À INSÉRER
-</a:t>
-            </a:r>
-            <a:pPr algn="ctr" indent="0" marL="0">
-              <a:buNone/>
-            </a:pPr>
-            <a:r>
-              <a:rPr lang="en-US" sz="1100" i="1" dirty="0">
-                <a:solidFill>
-                  <a:srgbClr val="5B6B7B"/>
-                </a:solidFill>
-                <a:latin typeface="Calibri" pitchFamily="34" charset="0"/>
-                <a:ea typeface="Calibri" pitchFamily="34" charset="-122"/>
-                <a:cs typeface="Calibri" pitchFamily="34" charset="-120"/>
-              </a:rPr>
-              <a:t>Tableau de bord salarié (soldes + demande)</a:t>
-            </a:r>
-            <a:endParaRPr lang="en-US" sz="1400" dirty="0"/>
-          </a:p>
-        </p:txBody>
-      </p:sp>
-      <p:sp>
-        <p:nvSpPr>
-          <p:cNvPr id="8" name="Shape 6"/>
-          <p:cNvSpPr/>
-          <p:nvPr/>
-        </p:nvSpPr>
-        <p:spPr>
-          <a:xfrm>
-            <a:off x="640080" y="3886200"/>
-            <a:ext cx="5394960" cy="2103120"/>
-          </a:xfrm>
-          <a:prstGeom prst="roundRect">
-            <a:avLst>
-              <a:gd name="adj" fmla="val 2609"/>
-            </a:avLst>
-          </a:prstGeom>
-          <a:solidFill>
-            <a:srgbClr val="F4F8FB"/>
-          </a:solidFill>
-          <a:ln w="19050">
-            <a:solidFill>
-              <a:srgbClr val="0B5394"/>
-            </a:solidFill>
-            <a:prstDash val="dash"/>
-          </a:ln>
-        </p:spPr>
-      </p:sp>
-      <p:sp>
-        <p:nvSpPr>
-          <p:cNvPr id="9" name="Text 7"/>
-          <p:cNvSpPr/>
-          <p:nvPr/>
-        </p:nvSpPr>
-        <p:spPr>
-          <a:xfrm>
-            <a:off x="822960" y="3886200"/>
-            <a:ext cx="5029200" cy="2103120"/>
-          </a:xfrm>
-          <a:prstGeom prst="rect">
-            <a:avLst/>
-          </a:prstGeom>
-          <a:noFill/>
-          <a:ln/>
-        </p:spPr>
-        <p:txBody>
-          <a:bodyPr wrap="square" rtlCol="0" anchor="ctr"/>
-          <a:lstStyle/>
-          <a:p>
-            <a:pPr algn="ctr" indent="0" marL="0">
-              <a:buNone/>
-            </a:pPr>
-            <a:r>
-              <a:rPr lang="en-US" sz="1400" b="1" dirty="0">
-                <a:solidFill>
-                  <a:srgbClr val="0B5394"/>
-                </a:solidFill>
-                <a:latin typeface="Calibri" pitchFamily="34" charset="0"/>
-                <a:ea typeface="Calibri" pitchFamily="34" charset="-122"/>
-                <a:cs typeface="Calibri" pitchFamily="34" charset="-120"/>
-              </a:rPr>
-              <a:t>📷 CAPTURE D'ÉCRAN À INSÉRER
-</a:t>
-            </a:r>
-            <a:pPr algn="ctr" indent="0" marL="0">
-              <a:buNone/>
-            </a:pPr>
-            <a:r>
-              <a:rPr lang="en-US" sz="1100" i="1" dirty="0">
-                <a:solidFill>
-                  <a:srgbClr val="5B6B7B"/>
-                </a:solidFill>
-                <a:latin typeface="Calibri" pitchFamily="34" charset="0"/>
-                <a:ea typeface="Calibri" pitchFamily="34" charset="-122"/>
-                <a:cs typeface="Calibri" pitchFamily="34" charset="-120"/>
-              </a:rPr>
-              <a:t>Espace de validation manager</a:t>
-            </a:r>
-            <a:endParaRPr lang="en-US" sz="1400" dirty="0"/>
-          </a:p>
-        </p:txBody>
-      </p:sp>
-      <p:sp>
-        <p:nvSpPr>
-          <p:cNvPr id="10" name="Shape 8"/>
-          <p:cNvSpPr/>
-          <p:nvPr/>
-        </p:nvSpPr>
-        <p:spPr>
-          <a:xfrm>
-            <a:off x="6126480" y="3886200"/>
-            <a:ext cx="5394960" cy="2103120"/>
-          </a:xfrm>
-          <a:prstGeom prst="roundRect">
-            <a:avLst>
-              <a:gd name="adj" fmla="val 2609"/>
-            </a:avLst>
-          </a:prstGeom>
-          <a:solidFill>
-            <a:srgbClr val="F4F8FB"/>
-          </a:solidFill>
-          <a:ln w="19050">
-            <a:solidFill>
-              <a:srgbClr val="0B5394"/>
-            </a:solidFill>
-            <a:prstDash val="dash"/>
-          </a:ln>
-        </p:spPr>
-      </p:sp>
-      <p:sp>
-        <p:nvSpPr>
-          <p:cNvPr id="11" name="Text 9"/>
-          <p:cNvSpPr/>
-          <p:nvPr/>
-        </p:nvSpPr>
-        <p:spPr>
-          <a:xfrm>
-            <a:off x="6309360" y="3886200"/>
-            <a:ext cx="5029200" cy="2103120"/>
-          </a:xfrm>
-          <a:prstGeom prst="rect">
-            <a:avLst/>
-          </a:prstGeom>
-          <a:noFill/>
-          <a:ln/>
-        </p:spPr>
-        <p:txBody>
-          <a:bodyPr wrap="square" rtlCol="0" anchor="ctr"/>
-          <a:lstStyle/>
-          <a:p>
-            <a:pPr algn="ctr" indent="0" marL="0">
-              <a:buNone/>
-            </a:pPr>
-            <a:r>
-              <a:rPr lang="en-US" sz="1400" b="1" dirty="0">
-                <a:solidFill>
-                  <a:srgbClr val="0B5394"/>
-                </a:solidFill>
-                <a:latin typeface="Calibri" pitchFamily="34" charset="0"/>
-                <a:ea typeface="Calibri" pitchFamily="34" charset="-122"/>
-                <a:cs typeface="Calibri" pitchFamily="34" charset="-120"/>
-              </a:rPr>
-              <a:t>📷 CAPTURE D'ÉCRAN À INSÉRER
-</a:t>
-            </a:r>
-            <a:pPr algn="ctr" indent="0" marL="0">
-              <a:buNone/>
-            </a:pPr>
-            <a:r>
-              <a:rPr lang="en-US" sz="1100" i="1" dirty="0">
-                <a:solidFill>
-                  <a:srgbClr val="5B6B7B"/>
-                </a:solidFill>
-                <a:latin typeface="Calibri" pitchFamily="34" charset="0"/>
-                <a:ea typeface="Calibri" pitchFamily="34" charset="-122"/>
-                <a:cs typeface="Calibri" pitchFamily="34" charset="-120"/>
-              </a:rPr>
-              <a:t>Documentation Swagger de l'API</a:t>
-            </a:r>
-            <a:endParaRPr lang="en-US" sz="1400" dirty="0"/>
-          </a:p>
-        </p:txBody>
-      </p:sp>
+      <p:pic>
+        <p:nvPicPr>
+          <p:cNvPr id="4" name="Image 0" descr="/Users/boungoumbimigloirebryan/Desktop/ProjetCda/docs/diagrammes/images/06-classes.png">    </p:cNvPr>
+          <p:cNvPicPr>
+            <a:picLocks noChangeAspect="1"/>
+          </p:cNvPicPr>
+          <p:nvPr/>
+        </p:nvPicPr>
+        <p:blipFill>
+          <a:blip r:embed="rId1"/>
+          <a:stretch>
+            <a:fillRect/>
+          </a:stretch>
+        </p:blipFill>
+        <p:spPr>
+          <a:xfrm>
+            <a:off x="4060334" y="1463040"/>
+            <a:ext cx="4040853" cy="5029200"/>
+          </a:xfrm>
+          <a:prstGeom prst="rect">
+            <a:avLst/>
+          </a:prstGeom>
+        </p:spPr>
+      </p:pic>
     </p:spTree>
   </p:cSld>
   <p:clrMapOvr>
@@ -2745,7 +2890,7 @@
                 <a:ea typeface="Calibri" pitchFamily="34" charset="-122"/>
                 <a:cs typeface="Calibri" pitchFamily="34" charset="-120"/>
               </a:rPr>
-              <a:t>09 · QUALITÉ</a:t>
+              <a:t>05 · CONCEPTION</a:t>
             </a:r>
             <a:endParaRPr lang="en-US" sz="1200" dirty="0"/>
           </a:p>
@@ -2784,550 +2929,36 @@
                 <a:ea typeface="Cambria" pitchFamily="34" charset="-122"/>
                 <a:cs typeface="Cambria" pitchFamily="34" charset="-120"/>
               </a:rPr>
-              <a:t>Tests &amp; industrialisation</a:t>
+              <a:t>Cycle de vie d'une demande (état-transition)</a:t>
             </a:r>
             <a:endParaRPr lang="en-US" sz="3000" dirty="0"/>
           </a:p>
         </p:txBody>
       </p:sp>
-      <p:sp>
-        <p:nvSpPr>
-          <p:cNvPr id="4" name="Shape 2"/>
-          <p:cNvSpPr/>
-          <p:nvPr/>
-        </p:nvSpPr>
-        <p:spPr>
-          <a:xfrm>
-            <a:off x="640080" y="1645920"/>
-            <a:ext cx="3429000" cy="1828800"/>
-          </a:xfrm>
-          <a:prstGeom prst="roundRect">
-            <a:avLst>
-              <a:gd name="adj" fmla="val 4000"/>
-            </a:avLst>
-          </a:prstGeom>
-          <a:solidFill>
-            <a:srgbClr val="0A1A2F"/>
-          </a:solidFill>
-          <a:ln w="12700">
-            <a:solidFill>
-              <a:srgbClr val="DCE6EE"/>
-            </a:solidFill>
-            <a:prstDash val="solid"/>
-          </a:ln>
-          <a:effectLst>
-            <a:outerShdw sx="100000" sy="100000" kx="0" ky="0" algn="bl" rotWithShape="0" blurRad="76200" dist="25400" dir="5400000">
-              <a:srgbClr val="B9C6D2">
-                <a:alpha val="30000"/>
-              </a:srgbClr>
-            </a:outerShdw>
-          </a:effectLst>
-        </p:spPr>
-      </p:sp>
-      <p:sp>
-        <p:nvSpPr>
-          <p:cNvPr id="5" name="Text 3"/>
-          <p:cNvSpPr/>
-          <p:nvPr/>
-        </p:nvSpPr>
-        <p:spPr>
-          <a:xfrm>
-            <a:off x="640080" y="1828800"/>
-            <a:ext cx="3429000" cy="914400"/>
-          </a:xfrm>
-          <a:prstGeom prst="rect">
-            <a:avLst/>
-          </a:prstGeom>
-          <a:noFill/>
-          <a:ln/>
-        </p:spPr>
-        <p:txBody>
-          <a:bodyPr wrap="square" rtlCol="0" anchor="ctr"/>
-          <a:lstStyle/>
-          <a:p>
-            <a:pPr algn="ctr" indent="0" marL="0">
-              <a:buNone/>
-            </a:pPr>
-            <a:r>
-              <a:rPr lang="en-US" sz="4400" b="1" dirty="0">
-                <a:solidFill>
-                  <a:srgbClr val="13A89E"/>
-                </a:solidFill>
-                <a:latin typeface="Cambria" pitchFamily="34" charset="0"/>
-                <a:ea typeface="Cambria" pitchFamily="34" charset="-122"/>
-                <a:cs typeface="Cambria" pitchFamily="34" charset="-120"/>
-              </a:rPr>
-              <a:t>21/21</a:t>
-            </a:r>
-            <a:endParaRPr lang="en-US" sz="4400" dirty="0"/>
-          </a:p>
-        </p:txBody>
-      </p:sp>
-      <p:sp>
-        <p:nvSpPr>
-          <p:cNvPr id="6" name="Text 4"/>
-          <p:cNvSpPr/>
-          <p:nvPr/>
-        </p:nvSpPr>
-        <p:spPr>
-          <a:xfrm>
-            <a:off x="640080" y="2743200"/>
-            <a:ext cx="3429000" cy="457200"/>
-          </a:xfrm>
-          <a:prstGeom prst="rect">
-            <a:avLst/>
-          </a:prstGeom>
-          <a:noFill/>
-          <a:ln/>
-        </p:spPr>
-        <p:txBody>
-          <a:bodyPr wrap="square" rtlCol="0" anchor="ctr"/>
-          <a:lstStyle/>
-          <a:p>
-            <a:pPr algn="ctr" indent="0" marL="0">
-              <a:buNone/>
-            </a:pPr>
-            <a:r>
-              <a:rPr lang="en-US" sz="1400" dirty="0">
-                <a:solidFill>
-                  <a:srgbClr val="FFFFFF"/>
-                </a:solidFill>
-                <a:latin typeface="Calibri" pitchFamily="34" charset="0"/>
-                <a:ea typeface="Calibri" pitchFamily="34" charset="-122"/>
-                <a:cs typeface="Calibri" pitchFamily="34" charset="-120"/>
-              </a:rPr>
-              <a:t>tests au vert</a:t>
-            </a:r>
-            <a:endParaRPr lang="en-US" sz="1400" dirty="0"/>
-          </a:p>
-        </p:txBody>
-      </p:sp>
-      <p:sp>
-        <p:nvSpPr>
-          <p:cNvPr id="7" name="Shape 5"/>
-          <p:cNvSpPr/>
-          <p:nvPr/>
-        </p:nvSpPr>
-        <p:spPr>
-          <a:xfrm>
-            <a:off x="4343400" y="1645920"/>
-            <a:ext cx="3429000" cy="1828800"/>
-          </a:xfrm>
-          <a:prstGeom prst="roundRect">
-            <a:avLst>
-              <a:gd name="adj" fmla="val 4000"/>
-            </a:avLst>
-          </a:prstGeom>
-          <a:solidFill>
-            <a:srgbClr val="0A1A2F"/>
-          </a:solidFill>
-          <a:ln w="12700">
-            <a:solidFill>
-              <a:srgbClr val="DCE6EE"/>
-            </a:solidFill>
-            <a:prstDash val="solid"/>
-          </a:ln>
-          <a:effectLst>
-            <a:outerShdw sx="100000" sy="100000" kx="0" ky="0" algn="bl" rotWithShape="0" blurRad="76200" dist="25400" dir="5400000">
-              <a:srgbClr val="B9C6D2">
-                <a:alpha val="30000"/>
-              </a:srgbClr>
-            </a:outerShdw>
-          </a:effectLst>
-        </p:spPr>
-      </p:sp>
-      <p:sp>
-        <p:nvSpPr>
-          <p:cNvPr id="8" name="Text 6"/>
-          <p:cNvSpPr/>
-          <p:nvPr/>
-        </p:nvSpPr>
-        <p:spPr>
-          <a:xfrm>
-            <a:off x="4343400" y="1828800"/>
-            <a:ext cx="3429000" cy="914400"/>
-          </a:xfrm>
-          <a:prstGeom prst="rect">
-            <a:avLst/>
-          </a:prstGeom>
-          <a:noFill/>
-          <a:ln/>
-        </p:spPr>
-        <p:txBody>
-          <a:bodyPr wrap="square" rtlCol="0" anchor="ctr"/>
-          <a:lstStyle/>
-          <a:p>
-            <a:pPr algn="ctr" indent="0" marL="0">
-              <a:buNone/>
-            </a:pPr>
-            <a:r>
-              <a:rPr lang="en-US" sz="4400" b="1" dirty="0">
-                <a:solidFill>
-                  <a:srgbClr val="13A89E"/>
-                </a:solidFill>
-                <a:latin typeface="Cambria" pitchFamily="34" charset="0"/>
-                <a:ea typeface="Cambria" pitchFamily="34" charset="-122"/>
-                <a:cs typeface="Cambria" pitchFamily="34" charset="-120"/>
-              </a:rPr>
-              <a:t>100%</a:t>
-            </a:r>
-            <a:endParaRPr lang="en-US" sz="4400" dirty="0"/>
-          </a:p>
-        </p:txBody>
-      </p:sp>
-      <p:sp>
-        <p:nvSpPr>
-          <p:cNvPr id="9" name="Text 7"/>
-          <p:cNvSpPr/>
-          <p:nvPr/>
-        </p:nvSpPr>
-        <p:spPr>
-          <a:xfrm>
-            <a:off x="4343400" y="2743200"/>
-            <a:ext cx="3429000" cy="457200"/>
-          </a:xfrm>
-          <a:prstGeom prst="rect">
-            <a:avLst/>
-          </a:prstGeom>
-          <a:noFill/>
-          <a:ln/>
-        </p:spPr>
-        <p:txBody>
-          <a:bodyPr wrap="square" rtlCol="0" anchor="ctr"/>
-          <a:lstStyle/>
-          <a:p>
-            <a:pPr algn="ctr" indent="0" marL="0">
-              <a:buNone/>
-            </a:pPr>
-            <a:r>
-              <a:rPr lang="en-US" sz="1400" dirty="0">
-                <a:solidFill>
-                  <a:srgbClr val="FFFFFF"/>
-                </a:solidFill>
-                <a:latin typeface="Calibri" pitchFamily="34" charset="0"/>
-                <a:ea typeface="Calibri" pitchFamily="34" charset="-122"/>
-                <a:cs typeface="Calibri" pitchFamily="34" charset="-120"/>
-              </a:rPr>
-              <a:t>réussite</a:t>
-            </a:r>
-            <a:endParaRPr lang="en-US" sz="1400" dirty="0"/>
-          </a:p>
-        </p:txBody>
-      </p:sp>
-      <p:sp>
-        <p:nvSpPr>
-          <p:cNvPr id="10" name="Shape 8"/>
-          <p:cNvSpPr/>
-          <p:nvPr/>
-        </p:nvSpPr>
-        <p:spPr>
-          <a:xfrm>
-            <a:off x="8046720" y="1645920"/>
-            <a:ext cx="3429000" cy="1828800"/>
-          </a:xfrm>
-          <a:prstGeom prst="roundRect">
-            <a:avLst>
-              <a:gd name="adj" fmla="val 4000"/>
-            </a:avLst>
-          </a:prstGeom>
-          <a:solidFill>
-            <a:srgbClr val="0A1A2F"/>
-          </a:solidFill>
-          <a:ln w="12700">
-            <a:solidFill>
-              <a:srgbClr val="DCE6EE"/>
-            </a:solidFill>
-            <a:prstDash val="solid"/>
-          </a:ln>
-          <a:effectLst>
-            <a:outerShdw sx="100000" sy="100000" kx="0" ky="0" algn="bl" rotWithShape="0" blurRad="76200" dist="25400" dir="5400000">
-              <a:srgbClr val="B9C6D2">
-                <a:alpha val="30000"/>
-              </a:srgbClr>
-            </a:outerShdw>
-          </a:effectLst>
-        </p:spPr>
-      </p:sp>
-      <p:sp>
-        <p:nvSpPr>
-          <p:cNvPr id="11" name="Text 9"/>
-          <p:cNvSpPr/>
-          <p:nvPr/>
-        </p:nvSpPr>
-        <p:spPr>
-          <a:xfrm>
-            <a:off x="8046720" y="1828800"/>
-            <a:ext cx="3429000" cy="914400"/>
-          </a:xfrm>
-          <a:prstGeom prst="rect">
-            <a:avLst/>
-          </a:prstGeom>
-          <a:noFill/>
-          <a:ln/>
-        </p:spPr>
-        <p:txBody>
-          <a:bodyPr wrap="square" rtlCol="0" anchor="ctr"/>
-          <a:lstStyle/>
-          <a:p>
-            <a:pPr algn="ctr" indent="0" marL="0">
-              <a:buNone/>
-            </a:pPr>
-            <a:r>
-              <a:rPr lang="en-US" sz="4400" b="1" dirty="0">
-                <a:solidFill>
-                  <a:srgbClr val="13A89E"/>
-                </a:solidFill>
-                <a:latin typeface="Cambria" pitchFamily="34" charset="0"/>
-                <a:ea typeface="Cambria" pitchFamily="34" charset="-122"/>
-                <a:cs typeface="Cambria" pitchFamily="34" charset="-120"/>
-              </a:rPr>
-              <a:t>3</a:t>
-            </a:r>
-            <a:endParaRPr lang="en-US" sz="4400" dirty="0"/>
-          </a:p>
-        </p:txBody>
-      </p:sp>
-      <p:sp>
-        <p:nvSpPr>
-          <p:cNvPr id="12" name="Text 10"/>
-          <p:cNvSpPr/>
-          <p:nvPr/>
-        </p:nvSpPr>
-        <p:spPr>
-          <a:xfrm>
-            <a:off x="8046720" y="2743200"/>
-            <a:ext cx="3429000" cy="457200"/>
-          </a:xfrm>
-          <a:prstGeom prst="rect">
-            <a:avLst/>
-          </a:prstGeom>
-          <a:noFill/>
-          <a:ln/>
-        </p:spPr>
-        <p:txBody>
-          <a:bodyPr wrap="square" rtlCol="0" anchor="ctr"/>
-          <a:lstStyle/>
-          <a:p>
-            <a:pPr algn="ctr" indent="0" marL="0">
-              <a:buNone/>
-            </a:pPr>
-            <a:r>
-              <a:rPr lang="en-US" sz="1400" dirty="0">
-                <a:solidFill>
-                  <a:srgbClr val="FFFFFF"/>
-                </a:solidFill>
-                <a:latin typeface="Calibri" pitchFamily="34" charset="0"/>
-                <a:ea typeface="Calibri" pitchFamily="34" charset="-122"/>
-                <a:cs typeface="Calibri" pitchFamily="34" charset="-120"/>
-              </a:rPr>
-              <a:t>couches testées</a:t>
-            </a:r>
-            <a:endParaRPr lang="en-US" sz="1400" dirty="0"/>
-          </a:p>
-        </p:txBody>
-      </p:sp>
-      <p:sp>
-        <p:nvSpPr>
-          <p:cNvPr id="13" name="Shape 11"/>
-          <p:cNvSpPr/>
-          <p:nvPr/>
-        </p:nvSpPr>
-        <p:spPr>
-          <a:xfrm>
-            <a:off x="640080" y="3749040"/>
-            <a:ext cx="10881360" cy="2103120"/>
-          </a:xfrm>
-          <a:prstGeom prst="roundRect">
-            <a:avLst>
-              <a:gd name="adj" fmla="val 3478"/>
-            </a:avLst>
-          </a:prstGeom>
-          <a:solidFill>
-            <a:srgbClr val="EAF1F6"/>
-          </a:solidFill>
-          <a:ln w="12700">
-            <a:solidFill>
-              <a:srgbClr val="DCE6EE"/>
-            </a:solidFill>
-            <a:prstDash val="solid"/>
-          </a:ln>
-          <a:effectLst>
-            <a:outerShdw sx="100000" sy="100000" kx="0" ky="0" algn="bl" rotWithShape="0" blurRad="76200" dist="25400" dir="5400000">
-              <a:srgbClr val="B9C6D2">
-                <a:alpha val="30000"/>
-              </a:srgbClr>
-            </a:outerShdw>
-          </a:effectLst>
-        </p:spPr>
-      </p:sp>
-      <p:sp>
-        <p:nvSpPr>
-          <p:cNvPr id="14" name="Text 12"/>
-          <p:cNvSpPr/>
-          <p:nvPr/>
-        </p:nvSpPr>
-        <p:spPr>
-          <a:xfrm>
-            <a:off x="914400" y="3931920"/>
-            <a:ext cx="10332720" cy="365760"/>
-          </a:xfrm>
-          <a:prstGeom prst="rect">
-            <a:avLst/>
-          </a:prstGeom>
-          <a:noFill/>
-          <a:ln/>
-        </p:spPr>
-        <p:txBody>
-          <a:bodyPr wrap="square" rtlCol="0" anchor="ctr"/>
-          <a:lstStyle/>
-          <a:p>
-            <a:pPr indent="0" marL="0">
-              <a:buNone/>
-            </a:pPr>
-            <a:r>
-              <a:rPr lang="en-US" sz="1600" b="1" dirty="0">
-                <a:solidFill>
-                  <a:srgbClr val="0B5394"/>
-                </a:solidFill>
-                <a:latin typeface="Cambria" pitchFamily="34" charset="0"/>
-                <a:ea typeface="Cambria" pitchFamily="34" charset="-122"/>
-                <a:cs typeface="Cambria" pitchFamily="34" charset="-120"/>
-              </a:rPr>
-              <a:t>Stratégie de test</a:t>
-            </a:r>
-            <a:endParaRPr lang="en-US" sz="1600" dirty="0"/>
-          </a:p>
-        </p:txBody>
-      </p:sp>
-      <p:sp>
-        <p:nvSpPr>
-          <p:cNvPr id="15" name="Text 13"/>
-          <p:cNvSpPr/>
-          <p:nvPr/>
-        </p:nvSpPr>
-        <p:spPr>
-          <a:xfrm>
-            <a:off x="914400" y="4343400"/>
-            <a:ext cx="10332720" cy="1371600"/>
-          </a:xfrm>
-          <a:prstGeom prst="rect">
-            <a:avLst/>
-          </a:prstGeom>
-          <a:noFill/>
-          <a:ln/>
-        </p:spPr>
-        <p:txBody>
-          <a:bodyPr wrap="square" rtlCol="0" anchor="t"/>
-          <a:lstStyle/>
-          <a:p>
-            <a:pPr indent="0" marL="0">
-              <a:lnSpc>
-                <a:spcPct val="125000"/>
-              </a:lnSpc>
-              <a:buNone/>
-            </a:pPr>
-            <a:r>
-              <a:rPr lang="en-US" sz="1400" b="1" dirty="0">
-                <a:solidFill>
-                  <a:srgbClr val="1C7293"/>
-                </a:solidFill>
-                <a:latin typeface="Calibri" pitchFamily="34" charset="0"/>
-                <a:ea typeface="Calibri" pitchFamily="34" charset="-122"/>
-                <a:cs typeface="Calibri" pitchFamily="34" charset="-120"/>
-              </a:rPr>
-              <a:t>Unitaires  </a:t>
-            </a:r>
-            <a:pPr indent="0" marL="0">
-              <a:lnSpc>
-                <a:spcPct val="125000"/>
-              </a:lnSpc>
-              <a:buNone/>
-            </a:pPr>
-            <a:r>
-              <a:rPr lang="en-US" sz="1400" dirty="0">
-                <a:solidFill>
-                  <a:srgbClr val="1B2A3A"/>
-                </a:solidFill>
-                <a:latin typeface="Calibri" pitchFamily="34" charset="0"/>
-                <a:ea typeface="Calibri" pitchFamily="34" charset="-122"/>
-                <a:cs typeface="Calibri" pitchFamily="34" charset="-120"/>
-              </a:rPr>
-              <a:t>logique métier (jours ouvrés, soldes, machine à états) — pytest
-</a:t>
-            </a:r>
-            <a:pPr indent="0" marL="0">
-              <a:lnSpc>
-                <a:spcPct val="125000"/>
-              </a:lnSpc>
-              <a:buNone/>
-            </a:pPr>
-            <a:r>
-              <a:rPr lang="en-US" sz="1400" b="1" dirty="0">
-                <a:solidFill>
-                  <a:srgbClr val="1C7293"/>
-                </a:solidFill>
-                <a:latin typeface="Calibri" pitchFamily="34" charset="0"/>
-                <a:ea typeface="Calibri" pitchFamily="34" charset="-122"/>
-                <a:cs typeface="Calibri" pitchFamily="34" charset="-120"/>
-              </a:rPr>
-              <a:t>Intégration  </a:t>
-            </a:r>
-            <a:pPr indent="0" marL="0">
-              <a:lnSpc>
-                <a:spcPct val="125000"/>
-              </a:lnSpc>
-              <a:buNone/>
-            </a:pPr>
-            <a:r>
-              <a:rPr lang="en-US" sz="1400" dirty="0">
-                <a:solidFill>
-                  <a:srgbClr val="1B2A3A"/>
-                </a:solidFill>
-                <a:latin typeface="Calibri" pitchFamily="34" charset="0"/>
-                <a:ea typeface="Calibri" pitchFamily="34" charset="-122"/>
-                <a:cs typeface="Calibri" pitchFamily="34" charset="-120"/>
-              </a:rPr>
-              <a:t>parcours API complets : login, création, RBAC, transitions interdites — httpx
-</a:t>
-            </a:r>
-            <a:pPr indent="0" marL="0">
-              <a:lnSpc>
-                <a:spcPct val="125000"/>
-              </a:lnSpc>
-              <a:buNone/>
-            </a:pPr>
-            <a:r>
-              <a:rPr lang="en-US" sz="1400" b="1" dirty="0">
-                <a:solidFill>
-                  <a:srgbClr val="1C7293"/>
-                </a:solidFill>
-                <a:latin typeface="Calibri" pitchFamily="34" charset="0"/>
-                <a:ea typeface="Calibri" pitchFamily="34" charset="-122"/>
-                <a:cs typeface="Calibri" pitchFamily="34" charset="-120"/>
-              </a:rPr>
-              <a:t>Front  </a:t>
-            </a:r>
-            <a:pPr indent="0" marL="0">
-              <a:lnSpc>
-                <a:spcPct val="125000"/>
-              </a:lnSpc>
-              <a:buNone/>
-            </a:pPr>
-            <a:r>
-              <a:rPr lang="en-US" sz="1400" dirty="0">
-                <a:solidFill>
-                  <a:srgbClr val="1B2A3A"/>
-                </a:solidFill>
-                <a:latin typeface="Calibri" pitchFamily="34" charset="0"/>
-                <a:ea typeface="Calibri" pitchFamily="34" charset="-122"/>
-                <a:cs typeface="Calibri" pitchFamily="34" charset="-120"/>
-              </a:rPr>
-              <a:t>fonctions d'affichage — Vitest    ·    CI GitHub Actions à chaque push</a:t>
-            </a:r>
-            <a:endParaRPr lang="en-US" sz="1400" dirty="0"/>
-          </a:p>
-        </p:txBody>
-      </p:sp>
+      <p:pic>
+        <p:nvPicPr>
+          <p:cNvPr id="4" name="Image 0" descr="/Users/boungoumbimigloirebryan/Desktop/ProjetCda/docs/diagrammes/images/05-etat-demande.png">    </p:cNvPr>
+          <p:cNvPicPr>
+            <a:picLocks noChangeAspect="1"/>
+          </p:cNvPicPr>
+          <p:nvPr/>
+        </p:nvPicPr>
+        <p:blipFill>
+          <a:blip r:embed="rId1"/>
+          <a:stretch>
+            <a:fillRect/>
+          </a:stretch>
+        </p:blipFill>
+        <p:spPr>
+          <a:xfrm>
+            <a:off x="3013121" y="1463040"/>
+            <a:ext cx="6135278" cy="5029200"/>
+          </a:xfrm>
+          <a:prstGeom prst="rect">
+            <a:avLst/>
+          </a:prstGeom>
+        </p:spPr>
+      </p:pic>
     </p:spTree>
   </p:cSld>
   <p:clrMapOvr>
@@ -3393,7 +3024,7 @@
                 <a:ea typeface="Calibri" pitchFamily="34" charset="-122"/>
                 <a:cs typeface="Calibri" pitchFamily="34" charset="-120"/>
               </a:rPr>
-              <a:t>10 · RÉFÉRENTIEL</a:t>
+              <a:t>04 · ARCHITECTURE</a:t>
             </a:r>
             <a:endParaRPr lang="en-US" sz="1200" dirty="0"/>
           </a:p>
@@ -3432,540 +3063,36 @@
                 <a:ea typeface="Cambria" pitchFamily="34" charset="-122"/>
                 <a:cs typeface="Cambria" pitchFamily="34" charset="-120"/>
               </a:rPr>
-              <a:t>Couverture des 3 blocs de compétences</a:t>
+              <a:t>Diagramme de déploiement</a:t>
             </a:r>
             <a:endParaRPr lang="en-US" sz="3000" dirty="0"/>
           </a:p>
         </p:txBody>
       </p:sp>
-      <p:sp>
-        <p:nvSpPr>
-          <p:cNvPr id="4" name="Shape 2"/>
-          <p:cNvSpPr/>
-          <p:nvPr/>
-        </p:nvSpPr>
-        <p:spPr>
-          <a:xfrm>
-            <a:off x="640080" y="1645920"/>
-            <a:ext cx="3429000" cy="4023360"/>
-          </a:xfrm>
-          <a:prstGeom prst="roundRect">
-            <a:avLst>
-              <a:gd name="adj" fmla="val 2133"/>
-            </a:avLst>
-          </a:prstGeom>
-          <a:solidFill>
-            <a:srgbClr val="EAF1F6"/>
-          </a:solidFill>
-          <a:ln w="12700">
-            <a:solidFill>
-              <a:srgbClr val="DCE6EE"/>
-            </a:solidFill>
-            <a:prstDash val="solid"/>
-          </a:ln>
-          <a:effectLst>
-            <a:outerShdw sx="100000" sy="100000" kx="0" ky="0" algn="bl" rotWithShape="0" blurRad="76200" dist="25400" dir="5400000">
-              <a:srgbClr val="B9C6D2">
-                <a:alpha val="30000"/>
-              </a:srgbClr>
-            </a:outerShdw>
-          </a:effectLst>
-        </p:spPr>
-      </p:sp>
-      <p:sp>
-        <p:nvSpPr>
-          <p:cNvPr id="5" name="Shape 3"/>
-          <p:cNvSpPr/>
-          <p:nvPr/>
-        </p:nvSpPr>
-        <p:spPr>
-          <a:xfrm>
-            <a:off x="640080" y="1645920"/>
-            <a:ext cx="3429000" cy="822960"/>
-          </a:xfrm>
-          <a:prstGeom prst="roundRect">
-            <a:avLst>
-              <a:gd name="adj" fmla="val 6667"/>
-            </a:avLst>
-          </a:prstGeom>
-          <a:solidFill>
-            <a:srgbClr val="0B5394"/>
-          </a:solidFill>
-          <a:ln/>
-        </p:spPr>
-      </p:sp>
-      <p:sp>
-        <p:nvSpPr>
-          <p:cNvPr id="6" name="Text 4"/>
-          <p:cNvSpPr/>
-          <p:nvPr/>
-        </p:nvSpPr>
-        <p:spPr>
-          <a:xfrm>
-            <a:off x="640080" y="1737360"/>
-            <a:ext cx="3429000" cy="640080"/>
-          </a:xfrm>
-          <a:prstGeom prst="rect">
-            <a:avLst/>
-          </a:prstGeom>
-          <a:noFill/>
-          <a:ln/>
-        </p:spPr>
-        <p:txBody>
-          <a:bodyPr wrap="square" rtlCol="0" anchor="ctr"/>
-          <a:lstStyle/>
-          <a:p>
-            <a:pPr algn="ctr" indent="0" marL="0">
-              <a:buNone/>
-            </a:pPr>
-            <a:r>
-              <a:rPr lang="en-US" sz="2200" b="1" dirty="0">
-                <a:solidFill>
-                  <a:srgbClr val="FFFFFF"/>
-                </a:solidFill>
-                <a:latin typeface="Cambria" pitchFamily="34" charset="0"/>
-                <a:ea typeface="Cambria" pitchFamily="34" charset="-122"/>
-                <a:cs typeface="Cambria" pitchFamily="34" charset="-120"/>
-              </a:rPr>
-              <a:t>Bloc 1</a:t>
-            </a:r>
-            <a:endParaRPr lang="en-US" sz="2200" dirty="0"/>
-          </a:p>
-        </p:txBody>
-      </p:sp>
-      <p:sp>
-        <p:nvSpPr>
-          <p:cNvPr id="7" name="Text 5"/>
-          <p:cNvSpPr/>
-          <p:nvPr/>
-        </p:nvSpPr>
-        <p:spPr>
-          <a:xfrm>
-            <a:off x="822960" y="2697480"/>
-            <a:ext cx="3063240" cy="640080"/>
-          </a:xfrm>
-          <a:prstGeom prst="rect">
-            <a:avLst/>
-          </a:prstGeom>
-          <a:noFill/>
-          <a:ln/>
-        </p:spPr>
-        <p:txBody>
-          <a:bodyPr wrap="square" rtlCol="0" anchor="ctr"/>
-          <a:lstStyle/>
-          <a:p>
-            <a:pPr algn="ctr" indent="0" marL="0">
-              <a:buNone/>
-            </a:pPr>
-            <a:r>
-              <a:rPr lang="en-US" sz="1500" b="1" dirty="0">
-                <a:solidFill>
-                  <a:srgbClr val="0A1A2F"/>
-                </a:solidFill>
-                <a:latin typeface="Calibri" pitchFamily="34" charset="0"/>
-                <a:ea typeface="Calibri" pitchFamily="34" charset="-122"/>
-                <a:cs typeface="Calibri" pitchFamily="34" charset="-120"/>
-              </a:rPr>
-              <a:t>Front-end sécurisé</a:t>
-            </a:r>
-            <a:endParaRPr lang="en-US" sz="1500" dirty="0"/>
-          </a:p>
-        </p:txBody>
-      </p:sp>
-      <p:sp>
-        <p:nvSpPr>
-          <p:cNvPr id="8" name="Text 6"/>
-          <p:cNvSpPr/>
-          <p:nvPr/>
-        </p:nvSpPr>
-        <p:spPr>
-          <a:xfrm>
-            <a:off x="868680" y="3383280"/>
-            <a:ext cx="2971800" cy="2103120"/>
-          </a:xfrm>
-          <a:prstGeom prst="rect">
-            <a:avLst/>
-          </a:prstGeom>
-          <a:noFill/>
-          <a:ln/>
-        </p:spPr>
-        <p:txBody>
-          <a:bodyPr wrap="square" rtlCol="0" anchor="t"/>
-          <a:lstStyle/>
-          <a:p>
-            <a:pPr indent="0" marL="0">
-              <a:lnSpc>
-                <a:spcPct val="120000"/>
-              </a:lnSpc>
-              <a:buNone/>
-            </a:pPr>
-            <a:r>
-              <a:rPr lang="en-US" sz="1300" dirty="0">
-                <a:solidFill>
-                  <a:srgbClr val="1B2A3A"/>
-                </a:solidFill>
-                <a:latin typeface="Calibri" pitchFamily="34" charset="0"/>
-                <a:ea typeface="Calibri" pitchFamily="34" charset="-122"/>
-                <a:cs typeface="Calibri" pitchFamily="34" charset="-120"/>
-              </a:rPr>
-              <a:t>React/TS · maquettes Figma · routes par rôle · consommation API</a:t>
-            </a:r>
-            <a:endParaRPr lang="en-US" sz="1300" dirty="0"/>
-          </a:p>
-        </p:txBody>
-      </p:sp>
-      <p:sp>
-        <p:nvSpPr>
-          <p:cNvPr id="9" name="Shape 7"/>
-          <p:cNvSpPr/>
-          <p:nvPr/>
-        </p:nvSpPr>
-        <p:spPr>
-          <a:xfrm>
-            <a:off x="4343400" y="1645920"/>
-            <a:ext cx="3429000" cy="4023360"/>
-          </a:xfrm>
-          <a:prstGeom prst="roundRect">
-            <a:avLst>
-              <a:gd name="adj" fmla="val 2133"/>
-            </a:avLst>
-          </a:prstGeom>
-          <a:solidFill>
-            <a:srgbClr val="EAF1F6"/>
-          </a:solidFill>
-          <a:ln w="12700">
-            <a:solidFill>
-              <a:srgbClr val="DCE6EE"/>
-            </a:solidFill>
-            <a:prstDash val="solid"/>
-          </a:ln>
-          <a:effectLst>
-            <a:outerShdw sx="100000" sy="100000" kx="0" ky="0" algn="bl" rotWithShape="0" blurRad="76200" dist="25400" dir="5400000">
-              <a:srgbClr val="B9C6D2">
-                <a:alpha val="30000"/>
-              </a:srgbClr>
-            </a:outerShdw>
-          </a:effectLst>
-        </p:spPr>
-      </p:sp>
-      <p:sp>
-        <p:nvSpPr>
-          <p:cNvPr id="10" name="Shape 8"/>
-          <p:cNvSpPr/>
-          <p:nvPr/>
-        </p:nvSpPr>
-        <p:spPr>
-          <a:xfrm>
-            <a:off x="4343400" y="1645920"/>
-            <a:ext cx="3429000" cy="822960"/>
-          </a:xfrm>
-          <a:prstGeom prst="roundRect">
-            <a:avLst>
-              <a:gd name="adj" fmla="val 6667"/>
-            </a:avLst>
-          </a:prstGeom>
-          <a:solidFill>
-            <a:srgbClr val="1C7293"/>
-          </a:solidFill>
-          <a:ln/>
-        </p:spPr>
-      </p:sp>
-      <p:sp>
-        <p:nvSpPr>
-          <p:cNvPr id="11" name="Text 9"/>
-          <p:cNvSpPr/>
-          <p:nvPr/>
-        </p:nvSpPr>
-        <p:spPr>
-          <a:xfrm>
-            <a:off x="4343400" y="1737360"/>
-            <a:ext cx="3429000" cy="640080"/>
-          </a:xfrm>
-          <a:prstGeom prst="rect">
-            <a:avLst/>
-          </a:prstGeom>
-          <a:noFill/>
-          <a:ln/>
-        </p:spPr>
-        <p:txBody>
-          <a:bodyPr wrap="square" rtlCol="0" anchor="ctr"/>
-          <a:lstStyle/>
-          <a:p>
-            <a:pPr algn="ctr" indent="0" marL="0">
-              <a:buNone/>
-            </a:pPr>
-            <a:r>
-              <a:rPr lang="en-US" sz="2200" b="1" dirty="0">
-                <a:solidFill>
-                  <a:srgbClr val="FFFFFF"/>
-                </a:solidFill>
-                <a:latin typeface="Cambria" pitchFamily="34" charset="0"/>
-                <a:ea typeface="Cambria" pitchFamily="34" charset="-122"/>
-                <a:cs typeface="Cambria" pitchFamily="34" charset="-120"/>
-              </a:rPr>
-              <a:t>Bloc 2</a:t>
-            </a:r>
-            <a:endParaRPr lang="en-US" sz="2200" dirty="0"/>
-          </a:p>
-        </p:txBody>
-      </p:sp>
-      <p:sp>
-        <p:nvSpPr>
-          <p:cNvPr id="12" name="Text 10"/>
-          <p:cNvSpPr/>
-          <p:nvPr/>
-        </p:nvSpPr>
-        <p:spPr>
-          <a:xfrm>
-            <a:off x="4526280" y="2697480"/>
-            <a:ext cx="3063240" cy="640080"/>
-          </a:xfrm>
-          <a:prstGeom prst="rect">
-            <a:avLst/>
-          </a:prstGeom>
-          <a:noFill/>
-          <a:ln/>
-        </p:spPr>
-        <p:txBody>
-          <a:bodyPr wrap="square" rtlCol="0" anchor="ctr"/>
-          <a:lstStyle/>
-          <a:p>
-            <a:pPr algn="ctr" indent="0" marL="0">
-              <a:buNone/>
-            </a:pPr>
-            <a:r>
-              <a:rPr lang="en-US" sz="1500" b="1" dirty="0">
-                <a:solidFill>
-                  <a:srgbClr val="0A1A2F"/>
-                </a:solidFill>
-                <a:latin typeface="Calibri" pitchFamily="34" charset="0"/>
-                <a:ea typeface="Calibri" pitchFamily="34" charset="-122"/>
-                <a:cs typeface="Calibri" pitchFamily="34" charset="-120"/>
-              </a:rPr>
-              <a:t>Back-end sécurisé</a:t>
-            </a:r>
-            <a:endParaRPr lang="en-US" sz="1500" dirty="0"/>
-          </a:p>
-        </p:txBody>
-      </p:sp>
-      <p:sp>
-        <p:nvSpPr>
-          <p:cNvPr id="13" name="Text 11"/>
-          <p:cNvSpPr/>
-          <p:nvPr/>
-        </p:nvSpPr>
-        <p:spPr>
-          <a:xfrm>
-            <a:off x="4572000" y="3383280"/>
-            <a:ext cx="2971800" cy="2103120"/>
-          </a:xfrm>
-          <a:prstGeom prst="rect">
-            <a:avLst/>
-          </a:prstGeom>
-          <a:noFill/>
-          <a:ln/>
-        </p:spPr>
-        <p:txBody>
-          <a:bodyPr wrap="square" rtlCol="0" anchor="t"/>
-          <a:lstStyle/>
-          <a:p>
-            <a:pPr indent="0" marL="0">
-              <a:lnSpc>
-                <a:spcPct val="120000"/>
-              </a:lnSpc>
-              <a:buNone/>
-            </a:pPr>
-            <a:r>
-              <a:rPr lang="en-US" sz="1300" dirty="0">
-                <a:solidFill>
-                  <a:srgbClr val="1B2A3A"/>
-                </a:solidFill>
-                <a:latin typeface="Calibri" pitchFamily="34" charset="0"/>
-                <a:ea typeface="Calibri" pitchFamily="34" charset="-122"/>
-                <a:cs typeface="Calibri" pitchFamily="34" charset="-120"/>
-              </a:rPr>
-              <a:t>API FastAPI · PostgreSQL · JWT/RBAC · bcrypt · OWASP</a:t>
-            </a:r>
-            <a:endParaRPr lang="en-US" sz="1300" dirty="0"/>
-          </a:p>
-        </p:txBody>
-      </p:sp>
-      <p:sp>
-        <p:nvSpPr>
-          <p:cNvPr id="14" name="Shape 12"/>
-          <p:cNvSpPr/>
-          <p:nvPr/>
-        </p:nvSpPr>
-        <p:spPr>
-          <a:xfrm>
-            <a:off x="8046720" y="1645920"/>
-            <a:ext cx="3429000" cy="4023360"/>
-          </a:xfrm>
-          <a:prstGeom prst="roundRect">
-            <a:avLst>
-              <a:gd name="adj" fmla="val 2133"/>
-            </a:avLst>
-          </a:prstGeom>
-          <a:solidFill>
-            <a:srgbClr val="EAF1F6"/>
-          </a:solidFill>
-          <a:ln w="12700">
-            <a:solidFill>
-              <a:srgbClr val="DCE6EE"/>
-            </a:solidFill>
-            <a:prstDash val="solid"/>
-          </a:ln>
-          <a:effectLst>
-            <a:outerShdw sx="100000" sy="100000" kx="0" ky="0" algn="bl" rotWithShape="0" blurRad="76200" dist="25400" dir="5400000">
-              <a:srgbClr val="B9C6D2">
-                <a:alpha val="30000"/>
-              </a:srgbClr>
-            </a:outerShdw>
-          </a:effectLst>
-        </p:spPr>
-      </p:sp>
-      <p:sp>
-        <p:nvSpPr>
-          <p:cNvPr id="15" name="Shape 13"/>
-          <p:cNvSpPr/>
-          <p:nvPr/>
-        </p:nvSpPr>
-        <p:spPr>
-          <a:xfrm>
-            <a:off x="8046720" y="1645920"/>
-            <a:ext cx="3429000" cy="822960"/>
-          </a:xfrm>
-          <a:prstGeom prst="roundRect">
-            <a:avLst>
-              <a:gd name="adj" fmla="val 6667"/>
-            </a:avLst>
-          </a:prstGeom>
-          <a:solidFill>
-            <a:srgbClr val="13A89E"/>
-          </a:solidFill>
-          <a:ln/>
-        </p:spPr>
-      </p:sp>
-      <p:sp>
-        <p:nvSpPr>
-          <p:cNvPr id="16" name="Text 14"/>
-          <p:cNvSpPr/>
-          <p:nvPr/>
-        </p:nvSpPr>
-        <p:spPr>
-          <a:xfrm>
-            <a:off x="8046720" y="1737360"/>
-            <a:ext cx="3429000" cy="640080"/>
-          </a:xfrm>
-          <a:prstGeom prst="rect">
-            <a:avLst/>
-          </a:prstGeom>
-          <a:noFill/>
-          <a:ln/>
-        </p:spPr>
-        <p:txBody>
-          <a:bodyPr wrap="square" rtlCol="0" anchor="ctr"/>
-          <a:lstStyle/>
-          <a:p>
-            <a:pPr algn="ctr" indent="0" marL="0">
-              <a:buNone/>
-            </a:pPr>
-            <a:r>
-              <a:rPr lang="en-US" sz="2200" b="1" dirty="0">
-                <a:solidFill>
-                  <a:srgbClr val="FFFFFF"/>
-                </a:solidFill>
-                <a:latin typeface="Cambria" pitchFamily="34" charset="0"/>
-                <a:ea typeface="Cambria" pitchFamily="34" charset="-122"/>
-                <a:cs typeface="Cambria" pitchFamily="34" charset="-120"/>
-              </a:rPr>
-              <a:t>Bloc 3</a:t>
-            </a:r>
-            <a:endParaRPr lang="en-US" sz="2200" dirty="0"/>
-          </a:p>
-        </p:txBody>
-      </p:sp>
-      <p:sp>
-        <p:nvSpPr>
-          <p:cNvPr id="17" name="Text 15"/>
-          <p:cNvSpPr/>
-          <p:nvPr/>
-        </p:nvSpPr>
-        <p:spPr>
-          <a:xfrm>
-            <a:off x="8229600" y="2697480"/>
-            <a:ext cx="3063240" cy="640080"/>
-          </a:xfrm>
-          <a:prstGeom prst="rect">
-            <a:avLst/>
-          </a:prstGeom>
-          <a:noFill/>
-          <a:ln/>
-        </p:spPr>
-        <p:txBody>
-          <a:bodyPr wrap="square" rtlCol="0" anchor="ctr"/>
-          <a:lstStyle/>
-          <a:p>
-            <a:pPr algn="ctr" indent="0" marL="0">
-              <a:buNone/>
-            </a:pPr>
-            <a:r>
-              <a:rPr lang="en-US" sz="1500" b="1" dirty="0">
-                <a:solidFill>
-                  <a:srgbClr val="0A1A2F"/>
-                </a:solidFill>
-                <a:latin typeface="Calibri" pitchFamily="34" charset="0"/>
-                <a:ea typeface="Calibri" pitchFamily="34" charset="-122"/>
-                <a:cs typeface="Calibri" pitchFamily="34" charset="-120"/>
-              </a:rPr>
-              <a:t>Conception &amp; organisation</a:t>
-            </a:r>
-            <a:endParaRPr lang="en-US" sz="1500" dirty="0"/>
-          </a:p>
-        </p:txBody>
-      </p:sp>
-      <p:sp>
-        <p:nvSpPr>
-          <p:cNvPr id="18" name="Text 16"/>
-          <p:cNvSpPr/>
-          <p:nvPr/>
-        </p:nvSpPr>
-        <p:spPr>
-          <a:xfrm>
-            <a:off x="8275320" y="3383280"/>
-            <a:ext cx="2971800" cy="2103120"/>
-          </a:xfrm>
-          <a:prstGeom prst="rect">
-            <a:avLst/>
-          </a:prstGeom>
-          <a:noFill/>
-          <a:ln/>
-        </p:spPr>
-        <p:txBody>
-          <a:bodyPr wrap="square" rtlCol="0" anchor="t"/>
-          <a:lstStyle/>
-          <a:p>
-            <a:pPr indent="0" marL="0">
-              <a:lnSpc>
-                <a:spcPct val="120000"/>
-              </a:lnSpc>
-              <a:buNone/>
-            </a:pPr>
-            <a:r>
-              <a:rPr lang="en-US" sz="1300" dirty="0">
-                <a:solidFill>
-                  <a:srgbClr val="1B2A3A"/>
-                </a:solidFill>
-                <a:latin typeface="Calibri" pitchFamily="34" charset="0"/>
-                <a:ea typeface="Calibri" pitchFamily="34" charset="-122"/>
-                <a:cs typeface="Calibri" pitchFamily="34" charset="-120"/>
-              </a:rPr>
-              <a:t>UML · agile/MoSCoW · tests · Docker · CI/CD · Git</a:t>
-            </a:r>
-            <a:endParaRPr lang="en-US" sz="1300" dirty="0"/>
-          </a:p>
-        </p:txBody>
-      </p:sp>
+      <p:pic>
+        <p:nvPicPr>
+          <p:cNvPr id="4" name="Image 0" descr="/Users/boungoumbimigloirebryan/Desktop/ProjetCda/docs/diagrammes/images/10-deploiement.png">    </p:cNvPr>
+          <p:cNvPicPr>
+            <a:picLocks noChangeAspect="1"/>
+          </p:cNvPicPr>
+          <p:nvPr/>
+        </p:nvPicPr>
+        <p:blipFill>
+          <a:blip r:embed="rId1"/>
+          <a:stretch>
+            <a:fillRect/>
+          </a:stretch>
+        </p:blipFill>
+        <p:spPr>
+          <a:xfrm>
+            <a:off x="5131444" y="1463040"/>
+            <a:ext cx="1898632" cy="5029200"/>
+          </a:xfrm>
+          <a:prstGeom prst="rect">
+            <a:avLst/>
+          </a:prstGeom>
+        </p:spPr>
+      </p:pic>
     </p:spTree>
   </p:cSld>
   <p:clrMapOvr>
@@ -4031,7 +3158,7 @@
                 <a:ea typeface="Calibri" pitchFamily="34" charset="-122"/>
                 <a:cs typeface="Calibri" pitchFamily="34" charset="-120"/>
               </a:rPr>
-              <a:t>BILAN</a:t>
+              <a:t>06 · CŒUR MÉTIER</a:t>
             </a:r>
             <a:endParaRPr lang="en-US" sz="1200" dirty="0"/>
           </a:p>
@@ -4070,7 +3197,7 @@
                 <a:ea typeface="Cambria" pitchFamily="34" charset="-122"/>
                 <a:cs typeface="Cambria" pitchFamily="34" charset="-120"/>
               </a:rPr>
-              <a:t>Conclusion &amp; perspectives</a:t>
+              <a:t>Règles métier &amp; machine à états</a:t>
             </a:r>
             <a:endParaRPr lang="en-US" sz="3000" dirty="0"/>
           </a:p>
@@ -4084,12 +3211,12 @@
         </p:nvSpPr>
         <p:spPr>
           <a:xfrm>
-            <a:off x="640080" y="1600200"/>
-            <a:ext cx="3520440" cy="4114800"/>
+            <a:off x="640080" y="1554480"/>
+            <a:ext cx="5394960" cy="4297680"/>
           </a:xfrm>
           <a:prstGeom prst="roundRect">
             <a:avLst>
-              <a:gd name="adj" fmla="val 2078"/>
+              <a:gd name="adj" fmla="val 1702"/>
             </a:avLst>
           </a:prstGeom>
           <a:solidFill>
@@ -4118,8 +3245,8 @@
         </p:nvSpPr>
         <p:spPr>
           <a:xfrm>
-            <a:off x="868680" y="1783080"/>
-            <a:ext cx="3108960" cy="365760"/>
+            <a:off x="914400" y="1783080"/>
+            <a:ext cx="4846320" cy="365760"/>
           </a:xfrm>
           <a:prstGeom prst="rect">
             <a:avLst/>
@@ -4137,13 +3264,13 @@
             <a:r>
               <a:rPr lang="en-US" sz="1600" b="1" dirty="0">
                 <a:solidFill>
-                  <a:srgbClr val="1E7E4F"/>
+                  <a:srgbClr val="0B5394"/>
                 </a:solidFill>
                 <a:latin typeface="Cambria" pitchFamily="34" charset="0"/>
                 <a:ea typeface="Cambria" pitchFamily="34" charset="-122"/>
                 <a:cs typeface="Cambria" pitchFamily="34" charset="-120"/>
               </a:rPr>
-              <a:t>Acquis</a:t>
+              <a:t>Machine à états d'une demande</a:t>
             </a:r>
             <a:endParaRPr lang="en-US" sz="1600" dirty="0"/>
           </a:p>
@@ -4151,120 +3278,344 @@
       </p:sp>
       <p:sp>
         <p:nvSpPr>
-          <p:cNvPr id="6" name="Text 4"/>
-          <p:cNvSpPr/>
-          <p:nvPr/>
-        </p:nvSpPr>
-        <p:spPr>
-          <a:xfrm>
-            <a:off x="868680" y="2240280"/>
-            <a:ext cx="3108960" cy="3291840"/>
-          </a:xfrm>
-          <a:prstGeom prst="rect">
-            <a:avLst/>
-          </a:prstGeom>
-          <a:noFill/>
-          <a:ln/>
-        </p:spPr>
-        <p:txBody>
-          <a:bodyPr wrap="square" rtlCol="0" anchor="t"/>
-          <a:lstStyle/>
-          <a:p>
-            <a:pPr indent="0" marL="0">
-              <a:lnSpc>
-                <a:spcPct val="140000"/>
-              </a:lnSpc>
-              <a:buNone/>
-            </a:pPr>
-            <a:r>
-              <a:rPr lang="en-US" sz="1300" dirty="0">
-                <a:solidFill>
-                  <a:srgbClr val="1B2A3A"/>
-                </a:solidFill>
-                <a:latin typeface="Calibri" pitchFamily="34" charset="0"/>
-                <a:ea typeface="Calibri" pitchFamily="34" charset="-122"/>
-                <a:cs typeface="Calibri" pitchFamily="34" charset="-120"/>
-              </a:rPr>
-              <a:t>• Application full-stack fonctionnelle</a:t>
-            </a:r>
-            <a:endParaRPr lang="en-US" sz="1300" dirty="0"/>
-          </a:p>
-          <a:p>
-            <a:pPr indent="0" marL="0">
-              <a:lnSpc>
-                <a:spcPct val="140000"/>
-              </a:lnSpc>
-              <a:buNone/>
-            </a:pPr>
-            <a:r>
-              <a:rPr lang="en-US" sz="1300" dirty="0">
-                <a:solidFill>
-                  <a:srgbClr val="1B2A3A"/>
-                </a:solidFill>
-                <a:latin typeface="Calibri" pitchFamily="34" charset="0"/>
-                <a:ea typeface="Calibri" pitchFamily="34" charset="-122"/>
-                <a:cs typeface="Calibri" pitchFamily="34" charset="-120"/>
-              </a:rPr>
-              <a:t>• Sécurité conforme aux standards</a:t>
-            </a:r>
-            <a:endParaRPr lang="en-US" sz="1300" dirty="0"/>
-          </a:p>
-          <a:p>
-            <a:pPr indent="0" marL="0">
-              <a:lnSpc>
-                <a:spcPct val="140000"/>
-              </a:lnSpc>
-              <a:buNone/>
-            </a:pPr>
-            <a:r>
-              <a:rPr lang="en-US" sz="1300" dirty="0">
-                <a:solidFill>
-                  <a:srgbClr val="1B2A3A"/>
-                </a:solidFill>
-                <a:latin typeface="Calibri" pitchFamily="34" charset="0"/>
-                <a:ea typeface="Calibri" pitchFamily="34" charset="-122"/>
-                <a:cs typeface="Calibri" pitchFamily="34" charset="-120"/>
-              </a:rPr>
-              <a:t>• Démarche de conception complète</a:t>
-            </a:r>
-            <a:endParaRPr lang="en-US" sz="1300" dirty="0"/>
-          </a:p>
-          <a:p>
-            <a:pPr indent="0" marL="0">
-              <a:lnSpc>
-                <a:spcPct val="140000"/>
-              </a:lnSpc>
-              <a:buNone/>
-            </a:pPr>
-            <a:r>
-              <a:rPr lang="en-US" sz="1300" dirty="0">
-                <a:solidFill>
-                  <a:srgbClr val="1B2A3A"/>
-                </a:solidFill>
-                <a:latin typeface="Calibri" pitchFamily="34" charset="0"/>
-                <a:ea typeface="Calibri" pitchFamily="34" charset="-122"/>
-                <a:cs typeface="Calibri" pitchFamily="34" charset="-120"/>
-              </a:rPr>
-              <a:t>• Chaîne DevOps en place</a:t>
-            </a:r>
-            <a:endParaRPr lang="en-US" sz="1300" dirty="0"/>
-          </a:p>
-        </p:txBody>
-      </p:sp>
-      <p:sp>
-        <p:nvSpPr>
-          <p:cNvPr id="7" name="Shape 5"/>
-          <p:cNvSpPr/>
-          <p:nvPr/>
-        </p:nvSpPr>
-        <p:spPr>
-          <a:xfrm>
-            <a:off x="4343400" y="1600200"/>
-            <a:ext cx="3520440" cy="4114800"/>
+          <p:cNvPr id="6" name="Shape 4"/>
+          <p:cNvSpPr/>
+          <p:nvPr/>
+        </p:nvSpPr>
+        <p:spPr>
+          <a:xfrm>
+            <a:off x="1005840" y="2286000"/>
+            <a:ext cx="2194560" cy="548640"/>
           </a:xfrm>
           <a:prstGeom prst="roundRect">
             <a:avLst>
-              <a:gd name="adj" fmla="val 2078"/>
+              <a:gd name="adj" fmla="val 50000"/>
+            </a:avLst>
+          </a:prstGeom>
+          <a:solidFill>
+            <a:srgbClr val="13A89E"/>
+          </a:solidFill>
+          <a:ln/>
+        </p:spPr>
+      </p:sp>
+      <p:sp>
+        <p:nvSpPr>
+          <p:cNvPr id="7" name="Text 5"/>
+          <p:cNvSpPr/>
+          <p:nvPr/>
+        </p:nvSpPr>
+        <p:spPr>
+          <a:xfrm>
+            <a:off x="1005840" y="2286000"/>
+            <a:ext cx="2194560" cy="548640"/>
+          </a:xfrm>
+          <a:prstGeom prst="rect">
+            <a:avLst/>
+          </a:prstGeom>
+          <a:noFill/>
+          <a:ln/>
+        </p:spPr>
+        <p:txBody>
+          <a:bodyPr wrap="square" rtlCol="0" anchor="ctr"/>
+          <a:lstStyle/>
+          <a:p>
+            <a:pPr algn="ctr" indent="0" marL="0">
+              <a:buNone/>
+            </a:pPr>
+            <a:r>
+              <a:rPr lang="en-US" sz="1400" b="1" dirty="0">
+                <a:solidFill>
+                  <a:srgbClr val="FFFFFF"/>
+                </a:solidFill>
+                <a:latin typeface="Calibri" pitchFamily="34" charset="0"/>
+                <a:ea typeface="Calibri" pitchFamily="34" charset="-122"/>
+                <a:cs typeface="Calibri" pitchFamily="34" charset="-120"/>
+              </a:rPr>
+              <a:t>SOUMISE</a:t>
+            </a:r>
+            <a:endParaRPr lang="en-US" sz="1400" dirty="0"/>
+          </a:p>
+        </p:txBody>
+      </p:sp>
+      <p:sp>
+        <p:nvSpPr>
+          <p:cNvPr id="8" name="Shape 6"/>
+          <p:cNvSpPr/>
+          <p:nvPr/>
+        </p:nvSpPr>
+        <p:spPr>
+          <a:xfrm>
+            <a:off x="1005840" y="3127248"/>
+            <a:ext cx="2194560" cy="548640"/>
+          </a:xfrm>
+          <a:prstGeom prst="roundRect">
+            <a:avLst>
+              <a:gd name="adj" fmla="val 50000"/>
+            </a:avLst>
+          </a:prstGeom>
+          <a:solidFill>
+            <a:srgbClr val="1E7E4F"/>
+          </a:solidFill>
+          <a:ln/>
+        </p:spPr>
+      </p:sp>
+      <p:sp>
+        <p:nvSpPr>
+          <p:cNvPr id="9" name="Text 7"/>
+          <p:cNvSpPr/>
+          <p:nvPr/>
+        </p:nvSpPr>
+        <p:spPr>
+          <a:xfrm>
+            <a:off x="1005840" y="3127248"/>
+            <a:ext cx="2194560" cy="548640"/>
+          </a:xfrm>
+          <a:prstGeom prst="rect">
+            <a:avLst/>
+          </a:prstGeom>
+          <a:noFill/>
+          <a:ln/>
+        </p:spPr>
+        <p:txBody>
+          <a:bodyPr wrap="square" rtlCol="0" anchor="ctr"/>
+          <a:lstStyle/>
+          <a:p>
+            <a:pPr algn="ctr" indent="0" marL="0">
+              <a:buNone/>
+            </a:pPr>
+            <a:r>
+              <a:rPr lang="en-US" sz="1400" b="1" dirty="0">
+                <a:solidFill>
+                  <a:srgbClr val="FFFFFF"/>
+                </a:solidFill>
+                <a:latin typeface="Calibri" pitchFamily="34" charset="0"/>
+                <a:ea typeface="Calibri" pitchFamily="34" charset="-122"/>
+                <a:cs typeface="Calibri" pitchFamily="34" charset="-120"/>
+              </a:rPr>
+              <a:t>VALIDÉE</a:t>
+            </a:r>
+            <a:endParaRPr lang="en-US" sz="1400" dirty="0"/>
+          </a:p>
+        </p:txBody>
+      </p:sp>
+      <p:sp>
+        <p:nvSpPr>
+          <p:cNvPr id="10" name="Shape 8"/>
+          <p:cNvSpPr/>
+          <p:nvPr/>
+        </p:nvSpPr>
+        <p:spPr>
+          <a:xfrm>
+            <a:off x="1005840" y="3968496"/>
+            <a:ext cx="2194560" cy="548640"/>
+          </a:xfrm>
+          <a:prstGeom prst="roundRect">
+            <a:avLst>
+              <a:gd name="adj" fmla="val 50000"/>
+            </a:avLst>
+          </a:prstGeom>
+          <a:solidFill>
+            <a:srgbClr val="B23A48"/>
+          </a:solidFill>
+          <a:ln/>
+        </p:spPr>
+      </p:sp>
+      <p:sp>
+        <p:nvSpPr>
+          <p:cNvPr id="11" name="Text 9"/>
+          <p:cNvSpPr/>
+          <p:nvPr/>
+        </p:nvSpPr>
+        <p:spPr>
+          <a:xfrm>
+            <a:off x="1005840" y="3968496"/>
+            <a:ext cx="2194560" cy="548640"/>
+          </a:xfrm>
+          <a:prstGeom prst="rect">
+            <a:avLst/>
+          </a:prstGeom>
+          <a:noFill/>
+          <a:ln/>
+        </p:spPr>
+        <p:txBody>
+          <a:bodyPr wrap="square" rtlCol="0" anchor="ctr"/>
+          <a:lstStyle/>
+          <a:p>
+            <a:pPr algn="ctr" indent="0" marL="0">
+              <a:buNone/>
+            </a:pPr>
+            <a:r>
+              <a:rPr lang="en-US" sz="1400" b="1" dirty="0">
+                <a:solidFill>
+                  <a:srgbClr val="FFFFFF"/>
+                </a:solidFill>
+                <a:latin typeface="Calibri" pitchFamily="34" charset="0"/>
+                <a:ea typeface="Calibri" pitchFamily="34" charset="-122"/>
+                <a:cs typeface="Calibri" pitchFamily="34" charset="-120"/>
+              </a:rPr>
+              <a:t>REFUSÉE</a:t>
+            </a:r>
+            <a:endParaRPr lang="en-US" sz="1400" dirty="0"/>
+          </a:p>
+        </p:txBody>
+      </p:sp>
+      <p:sp>
+        <p:nvSpPr>
+          <p:cNvPr id="12" name="Shape 10"/>
+          <p:cNvSpPr/>
+          <p:nvPr/>
+        </p:nvSpPr>
+        <p:spPr>
+          <a:xfrm>
+            <a:off x="1005840" y="4809744"/>
+            <a:ext cx="2194560" cy="548640"/>
+          </a:xfrm>
+          <a:prstGeom prst="roundRect">
+            <a:avLst>
+              <a:gd name="adj" fmla="val 50000"/>
+            </a:avLst>
+          </a:prstGeom>
+          <a:solidFill>
+            <a:srgbClr val="5B6B7B"/>
+          </a:solidFill>
+          <a:ln/>
+        </p:spPr>
+      </p:sp>
+      <p:sp>
+        <p:nvSpPr>
+          <p:cNvPr id="13" name="Text 11"/>
+          <p:cNvSpPr/>
+          <p:nvPr/>
+        </p:nvSpPr>
+        <p:spPr>
+          <a:xfrm>
+            <a:off x="1005840" y="4809744"/>
+            <a:ext cx="2194560" cy="548640"/>
+          </a:xfrm>
+          <a:prstGeom prst="rect">
+            <a:avLst/>
+          </a:prstGeom>
+          <a:noFill/>
+          <a:ln/>
+        </p:spPr>
+        <p:txBody>
+          <a:bodyPr wrap="square" rtlCol="0" anchor="ctr"/>
+          <a:lstStyle/>
+          <a:p>
+            <a:pPr algn="ctr" indent="0" marL="0">
+              <a:buNone/>
+            </a:pPr>
+            <a:r>
+              <a:rPr lang="en-US" sz="1400" b="1" dirty="0">
+                <a:solidFill>
+                  <a:srgbClr val="FFFFFF"/>
+                </a:solidFill>
+                <a:latin typeface="Calibri" pitchFamily="34" charset="0"/>
+                <a:ea typeface="Calibri" pitchFamily="34" charset="-122"/>
+                <a:cs typeface="Calibri" pitchFamily="34" charset="-120"/>
+              </a:rPr>
+              <a:t>ANNULÉE</a:t>
+            </a:r>
+            <a:endParaRPr lang="en-US" sz="1400" dirty="0"/>
+          </a:p>
+        </p:txBody>
+      </p:sp>
+      <p:sp>
+        <p:nvSpPr>
+          <p:cNvPr id="14" name="Text 12"/>
+          <p:cNvSpPr/>
+          <p:nvPr/>
+        </p:nvSpPr>
+        <p:spPr>
+          <a:xfrm>
+            <a:off x="3383280" y="2331720"/>
+            <a:ext cx="2468880" cy="3017520"/>
+          </a:xfrm>
+          <a:prstGeom prst="rect">
+            <a:avLst/>
+          </a:prstGeom>
+          <a:noFill/>
+          <a:ln/>
+        </p:spPr>
+        <p:txBody>
+          <a:bodyPr wrap="square" rtlCol="0" anchor="t"/>
+          <a:lstStyle/>
+          <a:p>
+            <a:pPr indent="0" marL="0">
+              <a:lnSpc>
+                <a:spcPct val="220000"/>
+              </a:lnSpc>
+              <a:buNone/>
+            </a:pPr>
+            <a:r>
+              <a:rPr lang="en-US" sz="1200" dirty="0">
+                <a:solidFill>
+                  <a:srgbClr val="1B2A3A"/>
+                </a:solidFill>
+                <a:latin typeface="Calibri" pitchFamily="34" charset="0"/>
+                <a:ea typeface="Calibri" pitchFamily="34" charset="-122"/>
+                <a:cs typeface="Calibri" pitchFamily="34" charset="-120"/>
+              </a:rPr>
+              <a:t>→ valide / −solde</a:t>
+            </a:r>
+            <a:endParaRPr lang="en-US" sz="1200" dirty="0"/>
+          </a:p>
+          <a:p>
+            <a:pPr indent="0" marL="0">
+              <a:lnSpc>
+                <a:spcPct val="220000"/>
+              </a:lnSpc>
+              <a:buNone/>
+            </a:pPr>
+            <a:r>
+              <a:rPr lang="en-US" sz="1200" dirty="0">
+                <a:solidFill>
+                  <a:srgbClr val="1B2A3A"/>
+                </a:solidFill>
+                <a:latin typeface="Calibri" pitchFamily="34" charset="0"/>
+                <a:ea typeface="Calibri" pitchFamily="34" charset="-122"/>
+                <a:cs typeface="Calibri" pitchFamily="34" charset="-120"/>
+              </a:rPr>
+              <a:t>→ refuse</a:t>
+            </a:r>
+            <a:endParaRPr lang="en-US" sz="1200" dirty="0"/>
+          </a:p>
+          <a:p>
+            <a:pPr indent="0" marL="0">
+              <a:lnSpc>
+                <a:spcPct val="220000"/>
+              </a:lnSpc>
+              <a:buNone/>
+            </a:pPr>
+            <a:r>
+              <a:rPr lang="en-US" sz="1200" dirty="0">
+                <a:solidFill>
+                  <a:srgbClr val="1B2A3A"/>
+                </a:solidFill>
+                <a:latin typeface="Calibri" pitchFamily="34" charset="0"/>
+                <a:ea typeface="Calibri" pitchFamily="34" charset="-122"/>
+                <a:cs typeface="Calibri" pitchFamily="34" charset="-120"/>
+              </a:rPr>
+              <a:t>→ annule / +solde</a:t>
+            </a:r>
+            <a:endParaRPr lang="en-US" sz="1200" dirty="0"/>
+          </a:p>
+        </p:txBody>
+      </p:sp>
+      <p:sp>
+        <p:nvSpPr>
+          <p:cNvPr id="15" name="Shape 13"/>
+          <p:cNvSpPr/>
+          <p:nvPr/>
+        </p:nvSpPr>
+        <p:spPr>
+          <a:xfrm>
+            <a:off x="6309360" y="1554480"/>
+            <a:ext cx="5212080" cy="4297680"/>
+          </a:xfrm>
+          <a:prstGeom prst="roundRect">
+            <a:avLst>
+              <a:gd name="adj" fmla="val 1702"/>
             </a:avLst>
           </a:prstGeom>
           <a:solidFill>
@@ -4287,14 +3638,14 @@
       </p:sp>
       <p:sp>
         <p:nvSpPr>
-          <p:cNvPr id="8" name="Text 6"/>
-          <p:cNvSpPr/>
-          <p:nvPr/>
-        </p:nvSpPr>
-        <p:spPr>
-          <a:xfrm>
-            <a:off x="4572000" y="1783080"/>
-            <a:ext cx="3108960" cy="365760"/>
+          <p:cNvPr id="16" name="Text 14"/>
+          <p:cNvSpPr/>
+          <p:nvPr/>
+        </p:nvSpPr>
+        <p:spPr>
+          <a:xfrm>
+            <a:off x="6583680" y="1783080"/>
+            <a:ext cx="4663440" cy="365760"/>
           </a:xfrm>
           <a:prstGeom prst="rect">
             <a:avLst/>
@@ -4312,13 +3663,13 @@
             <a:r>
               <a:rPr lang="en-US" sz="1600" b="1" dirty="0">
                 <a:solidFill>
-                  <a:srgbClr val="B23A48"/>
+                  <a:srgbClr val="0B5394"/>
                 </a:solidFill>
                 <a:latin typeface="Cambria" pitchFamily="34" charset="0"/>
                 <a:ea typeface="Cambria" pitchFamily="34" charset="-122"/>
                 <a:cs typeface="Cambria" pitchFamily="34" charset="-120"/>
               </a:rPr>
-              <a:t>Limites</a:t>
+              <a:t>Logique testable &amp; isolée</a:t>
             </a:r>
             <a:endParaRPr lang="en-US" sz="1600" dirty="0"/>
           </a:p>
@@ -4326,14 +3677,14 @@
       </p:sp>
       <p:sp>
         <p:nvSpPr>
-          <p:cNvPr id="9" name="Text 7"/>
-          <p:cNvSpPr/>
-          <p:nvPr/>
-        </p:nvSpPr>
-        <p:spPr>
-          <a:xfrm>
-            <a:off x="4572000" y="2240280"/>
-            <a:ext cx="3108960" cy="3291840"/>
+          <p:cNvPr id="17" name="Text 15"/>
+          <p:cNvSpPr/>
+          <p:nvPr/>
+        </p:nvSpPr>
+        <p:spPr>
+          <a:xfrm>
+            <a:off x="6583680" y="2286000"/>
+            <a:ext cx="4663440" cy="3383280"/>
           </a:xfrm>
           <a:prstGeom prst="rect">
             <a:avLst/>
@@ -4347,12 +3698,29 @@
           <a:p>
             <a:pPr indent="0" marL="0">
               <a:lnSpc>
-                <a:spcPct val="140000"/>
+                <a:spcPct val="110000"/>
               </a:lnSpc>
               <a:buNone/>
             </a:pPr>
             <a:r>
-              <a:rPr lang="en-US" sz="1300" dirty="0">
+              <a:rPr lang="en-US" sz="1400" b="1" dirty="0">
+                <a:solidFill>
+                  <a:srgbClr val="0A1A2F"/>
+                </a:solidFill>
+                <a:latin typeface="Courier New" pitchFamily="34" charset="0"/>
+                <a:ea typeface="Courier New" pitchFamily="34" charset="-122"/>
+                <a:cs typeface="Courier New" pitchFamily="34" charset="-120"/>
+              </a:rPr>
+              <a:t>compter_jours_ouvres()</a:t>
+            </a:r>
+            <a:pPr indent="0" marL="0">
+              <a:lnSpc>
+                <a:spcPct val="110000"/>
+              </a:lnSpc>
+              <a:buNone/>
+            </a:pPr>
+            <a:r>
+              <a:rPr lang="en-US" sz="1400" dirty="0">
                 <a:solidFill>
                   <a:srgbClr val="1B2A3A"/>
                 </a:solidFill>
@@ -4360,19 +3728,34 @@
                 <a:ea typeface="Calibri" pitchFamily="34" charset="-122"/>
                 <a:cs typeface="Calibri" pitchFamily="34" charset="-120"/>
               </a:rPr>
-              <a:t>• Pas de jours fériés</a:t>
-            </a:r>
-            <a:endParaRPr lang="en-US" sz="1300" dirty="0"/>
-          </a:p>
-          <a:p>
+              <a:t>  exclut samedis et dimanches
+</a:t>
+            </a:r>
             <a:pPr indent="0" marL="0">
               <a:lnSpc>
-                <a:spcPct val="140000"/>
+                <a:spcPct val="110000"/>
               </a:lnSpc>
               <a:buNone/>
             </a:pPr>
             <a:r>
-              <a:rPr lang="en-US" sz="1300" dirty="0">
+              <a:rPr lang="en-US" sz="1400" b="1" dirty="0">
+                <a:solidFill>
+                  <a:srgbClr val="0A1A2F"/>
+                </a:solidFill>
+                <a:latin typeface="Courier New" pitchFamily="34" charset="0"/>
+                <a:ea typeface="Courier New" pitchFamily="34" charset="-122"/>
+                <a:cs typeface="Courier New" pitchFamily="34" charset="-120"/>
+              </a:rPr>
+              <a:t>solde_suffisant()</a:t>
+            </a:r>
+            <a:pPr indent="0" marL="0">
+              <a:lnSpc>
+                <a:spcPct val="110000"/>
+              </a:lnSpc>
+              <a:buNone/>
+            </a:pPr>
+            <a:r>
+              <a:rPr lang="en-US" sz="1400" dirty="0">
                 <a:solidFill>
                   <a:srgbClr val="1B2A3A"/>
                 </a:solidFill>
@@ -4380,19 +3763,34 @@
                 <a:ea typeface="Calibri" pitchFamily="34" charset="-122"/>
                 <a:cs typeface="Calibri" pitchFamily="34" charset="-120"/>
               </a:rPr>
-              <a:t>• Notifications e-mail non faites</a:t>
-            </a:r>
-            <a:endParaRPr lang="en-US" sz="1300" dirty="0"/>
-          </a:p>
-          <a:p>
+              <a:t>  refuse si dépassement
+</a:t>
+            </a:r>
             <a:pPr indent="0" marL="0">
               <a:lnSpc>
-                <a:spcPct val="140000"/>
+                <a:spcPct val="110000"/>
               </a:lnSpc>
               <a:buNone/>
             </a:pPr>
             <a:r>
-              <a:rPr lang="en-US" sz="1300" dirty="0">
+              <a:rPr lang="en-US" sz="1400" b="1" dirty="0">
+                <a:solidFill>
+                  <a:srgbClr val="0A1A2F"/>
+                </a:solidFill>
+                <a:latin typeface="Courier New" pitchFamily="34" charset="0"/>
+                <a:ea typeface="Courier New" pitchFamily="34" charset="-122"/>
+                <a:cs typeface="Courier New" pitchFamily="34" charset="-120"/>
+              </a:rPr>
+              <a:t>transition_possible()</a:t>
+            </a:r>
+            <a:pPr indent="0" marL="0">
+              <a:lnSpc>
+                <a:spcPct val="110000"/>
+              </a:lnSpc>
+              <a:buNone/>
+            </a:pPr>
+            <a:r>
+              <a:rPr lang="en-US" sz="1400" dirty="0">
                 <a:solidFill>
                   <a:srgbClr val="1B2A3A"/>
                 </a:solidFill>
@@ -4400,26 +3798,1724 @@
                 <a:ea typeface="Calibri" pitchFamily="34" charset="-122"/>
                 <a:cs typeface="Calibri" pitchFamily="34" charset="-120"/>
               </a:rPr>
-              <a:t>• Validation à un seul niveau</a:t>
-            </a:r>
-            <a:endParaRPr lang="en-US" sz="1300" dirty="0"/>
-          </a:p>
-        </p:txBody>
-      </p:sp>
-      <p:sp>
-        <p:nvSpPr>
-          <p:cNvPr id="10" name="Shape 8"/>
-          <p:cNvSpPr/>
-          <p:nvPr/>
-        </p:nvSpPr>
-        <p:spPr>
-          <a:xfrm>
-            <a:off x="8046720" y="1600200"/>
-            <a:ext cx="3474720" cy="4114800"/>
+              <a:t>  bloque les transitions incohérentes
+</a:t>
+            </a:r>
+            <a:pPr indent="0" marL="0">
+              <a:lnSpc>
+                <a:spcPct val="110000"/>
+              </a:lnSpc>
+              <a:buNone/>
+            </a:pPr>
+            <a:r>
+              <a:rPr lang="en-US" sz="1400" i="1" dirty="0">
+                <a:solidFill>
+                  <a:srgbClr val="1C7293"/>
+                </a:solidFill>
+                <a:latin typeface="Calibri" pitchFamily="34" charset="0"/>
+                <a:ea typeface="Calibri" pitchFamily="34" charset="-122"/>
+                <a:cs typeface="Calibri" pitchFamily="34" charset="-120"/>
+              </a:rPr>
+              <a:t>Fonctions pures → couvertes par des tests unitaires.</a:t>
+            </a:r>
+            <a:endParaRPr lang="en-US" sz="1400" dirty="0"/>
+          </a:p>
+        </p:txBody>
+      </p:sp>
+    </p:spTree>
+  </p:cSld>
+  <p:clrMapOvr>
+    <a:masterClrMapping/>
+  </p:clrMapOvr>
+</p:sld>
+</file>
+
+<file path=ppt/slides/slide14.xml><?xml version="1.0" encoding="utf-8"?>
+<p:sld xmlns:a="http://schemas.openxmlformats.org/drawingml/2006/main" xmlns:r="http://schemas.openxmlformats.org/officeDocument/2006/relationships" xmlns:p="http://schemas.openxmlformats.org/presentationml/2006/main">
+  <p:cSld name="Slide 14">
+    <p:bg>
+      <p:bgPr>
+        <a:solidFill>
+          <a:srgbClr val="FFFFFF"/>
+        </a:solidFill>
+      </p:bgPr>
+    </p:bg>
+    <p:spTree>
+      <p:nvGrpSpPr>
+        <p:cNvPr id="1" name=""/>
+        <p:cNvGrpSpPr/>
+        <p:nvPr/>
+      </p:nvGrpSpPr>
+      <p:grpSpPr>
+        <a:xfrm>
+          <a:off x="0" y="0"/>
+          <a:ext cx="0" cy="0"/>
+          <a:chOff x="0" y="0"/>
+          <a:chExt cx="0" cy="0"/>
+        </a:xfrm>
+      </p:grpSpPr>
+      <p:sp>
+        <p:nvSpPr>
+          <p:cNvPr id="2" name="Text 0"/>
+          <p:cNvSpPr/>
+          <p:nvPr/>
+        </p:nvSpPr>
+        <p:spPr>
+          <a:xfrm>
+            <a:off x="640080" y="411480"/>
+            <a:ext cx="10972800" cy="274320"/>
+          </a:xfrm>
+          <a:prstGeom prst="rect">
+            <a:avLst/>
+          </a:prstGeom>
+          <a:noFill/>
+          <a:ln/>
+        </p:spPr>
+        <p:txBody>
+          <a:bodyPr wrap="square" rtlCol="0" anchor="ctr"/>
+          <a:lstStyle/>
+          <a:p>
+            <a:pPr indent="0" marL="0">
+              <a:buNone/>
+            </a:pPr>
+            <a:r>
+              <a:rPr lang="en-US" sz="1200" b="1" spc="200" kern="0" dirty="0">
+                <a:solidFill>
+                  <a:srgbClr val="13A89E"/>
+                </a:solidFill>
+                <a:latin typeface="Calibri" pitchFamily="34" charset="0"/>
+                <a:ea typeface="Calibri" pitchFamily="34" charset="-122"/>
+                <a:cs typeface="Calibri" pitchFamily="34" charset="-120"/>
+              </a:rPr>
+              <a:t>07 · SÉCURITÉ</a:t>
+            </a:r>
+            <a:endParaRPr lang="en-US" sz="1200" dirty="0"/>
+          </a:p>
+        </p:txBody>
+      </p:sp>
+      <p:sp>
+        <p:nvSpPr>
+          <p:cNvPr id="3" name="Text 1"/>
+          <p:cNvSpPr/>
+          <p:nvPr/>
+        </p:nvSpPr>
+        <p:spPr>
+          <a:xfrm>
+            <a:off x="640080" y="658368"/>
+            <a:ext cx="10972800" cy="640080"/>
+          </a:xfrm>
+          <a:prstGeom prst="rect">
+            <a:avLst/>
+          </a:prstGeom>
+          <a:noFill/>
+          <a:ln/>
+        </p:spPr>
+        <p:txBody>
+          <a:bodyPr wrap="square" rtlCol="0" anchor="ctr"/>
+          <a:lstStyle/>
+          <a:p>
+            <a:pPr indent="0" marL="0">
+              <a:buNone/>
+            </a:pPr>
+            <a:r>
+              <a:rPr lang="en-US" sz="3000" b="1" dirty="0">
+                <a:solidFill>
+                  <a:srgbClr val="0A1A2F"/>
+                </a:solidFill>
+                <a:latin typeface="Cambria" pitchFamily="34" charset="0"/>
+                <a:ea typeface="Cambria" pitchFamily="34" charset="-122"/>
+                <a:cs typeface="Cambria" pitchFamily="34" charset="-120"/>
+              </a:rPr>
+              <a:t>Une application sécurisée (Bloc 2)</a:t>
+            </a:r>
+            <a:endParaRPr lang="en-US" sz="3000" dirty="0"/>
+          </a:p>
+        </p:txBody>
+      </p:sp>
+      <p:sp>
+        <p:nvSpPr>
+          <p:cNvPr id="4" name="Shape 2"/>
+          <p:cNvSpPr/>
+          <p:nvPr/>
+        </p:nvSpPr>
+        <p:spPr>
+          <a:xfrm>
+            <a:off x="640080" y="1600200"/>
+            <a:ext cx="5303520" cy="1234440"/>
           </a:xfrm>
           <a:prstGeom prst="roundRect">
             <a:avLst>
-              <a:gd name="adj" fmla="val 2105"/>
+              <a:gd name="adj" fmla="val 5926"/>
+            </a:avLst>
+          </a:prstGeom>
+          <a:solidFill>
+            <a:srgbClr val="EAF1F6"/>
+          </a:solidFill>
+          <a:ln w="12700">
+            <a:solidFill>
+              <a:srgbClr val="DCE6EE"/>
+            </a:solidFill>
+            <a:prstDash val="solid"/>
+          </a:ln>
+          <a:effectLst>
+            <a:outerShdw sx="100000" sy="100000" kx="0" ky="0" algn="bl" rotWithShape="0" blurRad="76200" dist="25400" dir="5400000">
+              <a:srgbClr val="B9C6D2">
+                <a:alpha val="30000"/>
+              </a:srgbClr>
+            </a:outerShdw>
+          </a:effectLst>
+        </p:spPr>
+      </p:sp>
+      <p:sp>
+        <p:nvSpPr>
+          <p:cNvPr id="5" name="Shape 3"/>
+          <p:cNvSpPr/>
+          <p:nvPr/>
+        </p:nvSpPr>
+        <p:spPr>
+          <a:xfrm>
+            <a:off x="914400" y="1984248"/>
+            <a:ext cx="457200" cy="457200"/>
+          </a:xfrm>
+          <a:prstGeom prst="ellipse">
+            <a:avLst/>
+          </a:prstGeom>
+          <a:solidFill>
+            <a:srgbClr val="0B5394"/>
+          </a:solidFill>
+          <a:ln/>
+        </p:spPr>
+      </p:sp>
+      <p:sp>
+        <p:nvSpPr>
+          <p:cNvPr id="6" name="Text 4"/>
+          <p:cNvSpPr/>
+          <p:nvPr/>
+        </p:nvSpPr>
+        <p:spPr>
+          <a:xfrm>
+            <a:off x="914400" y="1984248"/>
+            <a:ext cx="457200" cy="457200"/>
+          </a:xfrm>
+          <a:prstGeom prst="rect">
+            <a:avLst/>
+          </a:prstGeom>
+          <a:noFill/>
+          <a:ln/>
+        </p:spPr>
+        <p:txBody>
+          <a:bodyPr wrap="square" rtlCol="0" anchor="ctr"/>
+          <a:lstStyle/>
+          <a:p>
+            <a:pPr algn="ctr" indent="0" marL="0">
+              <a:buNone/>
+            </a:pPr>
+            <a:r>
+              <a:rPr lang="en-US" sz="1600" b="1" dirty="0">
+                <a:solidFill>
+                  <a:srgbClr val="FFFFFF"/>
+                </a:solidFill>
+                <a:latin typeface="Calibri" pitchFamily="34" charset="0"/>
+                <a:ea typeface="Calibri" pitchFamily="34" charset="-122"/>
+                <a:cs typeface="Calibri" pitchFamily="34" charset="-120"/>
+              </a:rPr>
+              <a:t>🔒</a:t>
+            </a:r>
+            <a:endParaRPr lang="en-US" sz="1600" dirty="0"/>
+          </a:p>
+        </p:txBody>
+      </p:sp>
+      <p:sp>
+        <p:nvSpPr>
+          <p:cNvPr id="7" name="Text 5"/>
+          <p:cNvSpPr/>
+          <p:nvPr/>
+        </p:nvSpPr>
+        <p:spPr>
+          <a:xfrm>
+            <a:off x="1554480" y="1737360"/>
+            <a:ext cx="4206240" cy="365760"/>
+          </a:xfrm>
+          <a:prstGeom prst="rect">
+            <a:avLst/>
+          </a:prstGeom>
+          <a:noFill/>
+          <a:ln/>
+        </p:spPr>
+        <p:txBody>
+          <a:bodyPr wrap="square" rtlCol="0" anchor="ctr"/>
+          <a:lstStyle/>
+          <a:p>
+            <a:pPr indent="0" marL="0">
+              <a:buNone/>
+            </a:pPr>
+            <a:r>
+              <a:rPr lang="en-US" sz="1500" b="1" dirty="0">
+                <a:solidFill>
+                  <a:srgbClr val="0A1A2F"/>
+                </a:solidFill>
+                <a:latin typeface="Calibri" pitchFamily="34" charset="0"/>
+                <a:ea typeface="Calibri" pitchFamily="34" charset="-122"/>
+                <a:cs typeface="Calibri" pitchFamily="34" charset="-120"/>
+              </a:rPr>
+              <a:t>JWT</a:t>
+            </a:r>
+            <a:endParaRPr lang="en-US" sz="1500" dirty="0"/>
+          </a:p>
+        </p:txBody>
+      </p:sp>
+      <p:sp>
+        <p:nvSpPr>
+          <p:cNvPr id="8" name="Text 6"/>
+          <p:cNvSpPr/>
+          <p:nvPr/>
+        </p:nvSpPr>
+        <p:spPr>
+          <a:xfrm>
+            <a:off x="1554480" y="2130552"/>
+            <a:ext cx="4206240" cy="548640"/>
+          </a:xfrm>
+          <a:prstGeom prst="rect">
+            <a:avLst/>
+          </a:prstGeom>
+          <a:noFill/>
+          <a:ln/>
+        </p:spPr>
+        <p:txBody>
+          <a:bodyPr wrap="square" rtlCol="0" anchor="ctr"/>
+          <a:lstStyle/>
+          <a:p>
+            <a:pPr indent="0" marL="0">
+              <a:buNone/>
+            </a:pPr>
+            <a:r>
+              <a:rPr lang="en-US" sz="1200" dirty="0">
+                <a:solidFill>
+                  <a:srgbClr val="5B6B7B"/>
+                </a:solidFill>
+                <a:latin typeface="Calibri" pitchFamily="34" charset="0"/>
+                <a:ea typeface="Calibri" pitchFamily="34" charset="-122"/>
+                <a:cs typeface="Calibri" pitchFamily="34" charset="-120"/>
+              </a:rPr>
+              <a:t>Authentification par jeton signé, serveur sans état</a:t>
+            </a:r>
+            <a:endParaRPr lang="en-US" sz="1200" dirty="0"/>
+          </a:p>
+        </p:txBody>
+      </p:sp>
+      <p:sp>
+        <p:nvSpPr>
+          <p:cNvPr id="9" name="Shape 7"/>
+          <p:cNvSpPr/>
+          <p:nvPr/>
+        </p:nvSpPr>
+        <p:spPr>
+          <a:xfrm>
+            <a:off x="6217920" y="1600200"/>
+            <a:ext cx="5303520" cy="1234440"/>
+          </a:xfrm>
+          <a:prstGeom prst="roundRect">
+            <a:avLst>
+              <a:gd name="adj" fmla="val 5926"/>
+            </a:avLst>
+          </a:prstGeom>
+          <a:solidFill>
+            <a:srgbClr val="EAF1F6"/>
+          </a:solidFill>
+          <a:ln w="12700">
+            <a:solidFill>
+              <a:srgbClr val="DCE6EE"/>
+            </a:solidFill>
+            <a:prstDash val="solid"/>
+          </a:ln>
+          <a:effectLst>
+            <a:outerShdw sx="100000" sy="100000" kx="0" ky="0" algn="bl" rotWithShape="0" blurRad="76200" dist="25400" dir="5400000">
+              <a:srgbClr val="B9C6D2">
+                <a:alpha val="30000"/>
+              </a:srgbClr>
+            </a:outerShdw>
+          </a:effectLst>
+        </p:spPr>
+      </p:sp>
+      <p:sp>
+        <p:nvSpPr>
+          <p:cNvPr id="10" name="Shape 8"/>
+          <p:cNvSpPr/>
+          <p:nvPr/>
+        </p:nvSpPr>
+        <p:spPr>
+          <a:xfrm>
+            <a:off x="6492240" y="1984248"/>
+            <a:ext cx="457200" cy="457200"/>
+          </a:xfrm>
+          <a:prstGeom prst="ellipse">
+            <a:avLst/>
+          </a:prstGeom>
+          <a:solidFill>
+            <a:srgbClr val="0B5394"/>
+          </a:solidFill>
+          <a:ln/>
+        </p:spPr>
+      </p:sp>
+      <p:sp>
+        <p:nvSpPr>
+          <p:cNvPr id="11" name="Text 9"/>
+          <p:cNvSpPr/>
+          <p:nvPr/>
+        </p:nvSpPr>
+        <p:spPr>
+          <a:xfrm>
+            <a:off x="6492240" y="1984248"/>
+            <a:ext cx="457200" cy="457200"/>
+          </a:xfrm>
+          <a:prstGeom prst="rect">
+            <a:avLst/>
+          </a:prstGeom>
+          <a:noFill/>
+          <a:ln/>
+        </p:spPr>
+        <p:txBody>
+          <a:bodyPr wrap="square" rtlCol="0" anchor="ctr"/>
+          <a:lstStyle/>
+          <a:p>
+            <a:pPr algn="ctr" indent="0" marL="0">
+              <a:buNone/>
+            </a:pPr>
+            <a:r>
+              <a:rPr lang="en-US" sz="1600" b="1" dirty="0">
+                <a:solidFill>
+                  <a:srgbClr val="FFFFFF"/>
+                </a:solidFill>
+                <a:latin typeface="Calibri" pitchFamily="34" charset="0"/>
+                <a:ea typeface="Calibri" pitchFamily="34" charset="-122"/>
+                <a:cs typeface="Calibri" pitchFamily="34" charset="-120"/>
+              </a:rPr>
+              <a:t>🔒</a:t>
+            </a:r>
+            <a:endParaRPr lang="en-US" sz="1600" dirty="0"/>
+          </a:p>
+        </p:txBody>
+      </p:sp>
+      <p:sp>
+        <p:nvSpPr>
+          <p:cNvPr id="12" name="Text 10"/>
+          <p:cNvSpPr/>
+          <p:nvPr/>
+        </p:nvSpPr>
+        <p:spPr>
+          <a:xfrm>
+            <a:off x="7132320" y="1737360"/>
+            <a:ext cx="4206240" cy="365760"/>
+          </a:xfrm>
+          <a:prstGeom prst="rect">
+            <a:avLst/>
+          </a:prstGeom>
+          <a:noFill/>
+          <a:ln/>
+        </p:spPr>
+        <p:txBody>
+          <a:bodyPr wrap="square" rtlCol="0" anchor="ctr"/>
+          <a:lstStyle/>
+          <a:p>
+            <a:pPr indent="0" marL="0">
+              <a:buNone/>
+            </a:pPr>
+            <a:r>
+              <a:rPr lang="en-US" sz="1500" b="1" dirty="0">
+                <a:solidFill>
+                  <a:srgbClr val="0A1A2F"/>
+                </a:solidFill>
+                <a:latin typeface="Calibri" pitchFamily="34" charset="0"/>
+                <a:ea typeface="Calibri" pitchFamily="34" charset="-122"/>
+                <a:cs typeface="Calibri" pitchFamily="34" charset="-120"/>
+              </a:rPr>
+              <a:t>bcrypt</a:t>
+            </a:r>
+            <a:endParaRPr lang="en-US" sz="1500" dirty="0"/>
+          </a:p>
+        </p:txBody>
+      </p:sp>
+      <p:sp>
+        <p:nvSpPr>
+          <p:cNvPr id="13" name="Text 11"/>
+          <p:cNvSpPr/>
+          <p:nvPr/>
+        </p:nvSpPr>
+        <p:spPr>
+          <a:xfrm>
+            <a:off x="7132320" y="2130552"/>
+            <a:ext cx="4206240" cy="548640"/>
+          </a:xfrm>
+          <a:prstGeom prst="rect">
+            <a:avLst/>
+          </a:prstGeom>
+          <a:noFill/>
+          <a:ln/>
+        </p:spPr>
+        <p:txBody>
+          <a:bodyPr wrap="square" rtlCol="0" anchor="ctr"/>
+          <a:lstStyle/>
+          <a:p>
+            <a:pPr indent="0" marL="0">
+              <a:buNone/>
+            </a:pPr>
+            <a:r>
+              <a:rPr lang="en-US" sz="1200" dirty="0">
+                <a:solidFill>
+                  <a:srgbClr val="5B6B7B"/>
+                </a:solidFill>
+                <a:latin typeface="Calibri" pitchFamily="34" charset="0"/>
+                <a:ea typeface="Calibri" pitchFamily="34" charset="-122"/>
+                <a:cs typeface="Calibri" pitchFamily="34" charset="-120"/>
+              </a:rPr>
+              <a:t>Mots de passe hachés, jamais stockés en clair</a:t>
+            </a:r>
+            <a:endParaRPr lang="en-US" sz="1200" dirty="0"/>
+          </a:p>
+        </p:txBody>
+      </p:sp>
+      <p:sp>
+        <p:nvSpPr>
+          <p:cNvPr id="14" name="Shape 12"/>
+          <p:cNvSpPr/>
+          <p:nvPr/>
+        </p:nvSpPr>
+        <p:spPr>
+          <a:xfrm>
+            <a:off x="640080" y="3017520"/>
+            <a:ext cx="5303520" cy="1234440"/>
+          </a:xfrm>
+          <a:prstGeom prst="roundRect">
+            <a:avLst>
+              <a:gd name="adj" fmla="val 5926"/>
+            </a:avLst>
+          </a:prstGeom>
+          <a:solidFill>
+            <a:srgbClr val="EAF1F6"/>
+          </a:solidFill>
+          <a:ln w="12700">
+            <a:solidFill>
+              <a:srgbClr val="DCE6EE"/>
+            </a:solidFill>
+            <a:prstDash val="solid"/>
+          </a:ln>
+          <a:effectLst>
+            <a:outerShdw sx="100000" sy="100000" kx="0" ky="0" algn="bl" rotWithShape="0" blurRad="76200" dist="25400" dir="5400000">
+              <a:srgbClr val="B9C6D2">
+                <a:alpha val="30000"/>
+              </a:srgbClr>
+            </a:outerShdw>
+          </a:effectLst>
+        </p:spPr>
+      </p:sp>
+      <p:sp>
+        <p:nvSpPr>
+          <p:cNvPr id="15" name="Shape 13"/>
+          <p:cNvSpPr/>
+          <p:nvPr/>
+        </p:nvSpPr>
+        <p:spPr>
+          <a:xfrm>
+            <a:off x="914400" y="3401568"/>
+            <a:ext cx="457200" cy="457200"/>
+          </a:xfrm>
+          <a:prstGeom prst="ellipse">
+            <a:avLst/>
+          </a:prstGeom>
+          <a:solidFill>
+            <a:srgbClr val="0B5394"/>
+          </a:solidFill>
+          <a:ln/>
+        </p:spPr>
+      </p:sp>
+      <p:sp>
+        <p:nvSpPr>
+          <p:cNvPr id="16" name="Text 14"/>
+          <p:cNvSpPr/>
+          <p:nvPr/>
+        </p:nvSpPr>
+        <p:spPr>
+          <a:xfrm>
+            <a:off x="914400" y="3401568"/>
+            <a:ext cx="457200" cy="457200"/>
+          </a:xfrm>
+          <a:prstGeom prst="rect">
+            <a:avLst/>
+          </a:prstGeom>
+          <a:noFill/>
+          <a:ln/>
+        </p:spPr>
+        <p:txBody>
+          <a:bodyPr wrap="square" rtlCol="0" anchor="ctr"/>
+          <a:lstStyle/>
+          <a:p>
+            <a:pPr algn="ctr" indent="0" marL="0">
+              <a:buNone/>
+            </a:pPr>
+            <a:r>
+              <a:rPr lang="en-US" sz="1600" b="1" dirty="0">
+                <a:solidFill>
+                  <a:srgbClr val="FFFFFF"/>
+                </a:solidFill>
+                <a:latin typeface="Calibri" pitchFamily="34" charset="0"/>
+                <a:ea typeface="Calibri" pitchFamily="34" charset="-122"/>
+                <a:cs typeface="Calibri" pitchFamily="34" charset="-120"/>
+              </a:rPr>
+              <a:t>🔒</a:t>
+            </a:r>
+            <a:endParaRPr lang="en-US" sz="1600" dirty="0"/>
+          </a:p>
+        </p:txBody>
+      </p:sp>
+      <p:sp>
+        <p:nvSpPr>
+          <p:cNvPr id="17" name="Text 15"/>
+          <p:cNvSpPr/>
+          <p:nvPr/>
+        </p:nvSpPr>
+        <p:spPr>
+          <a:xfrm>
+            <a:off x="1554480" y="3154680"/>
+            <a:ext cx="4206240" cy="365760"/>
+          </a:xfrm>
+          <a:prstGeom prst="rect">
+            <a:avLst/>
+          </a:prstGeom>
+          <a:noFill/>
+          <a:ln/>
+        </p:spPr>
+        <p:txBody>
+          <a:bodyPr wrap="square" rtlCol="0" anchor="ctr"/>
+          <a:lstStyle/>
+          <a:p>
+            <a:pPr indent="0" marL="0">
+              <a:buNone/>
+            </a:pPr>
+            <a:r>
+              <a:rPr lang="en-US" sz="1500" b="1" dirty="0">
+                <a:solidFill>
+                  <a:srgbClr val="0A1A2F"/>
+                </a:solidFill>
+                <a:latin typeface="Calibri" pitchFamily="34" charset="0"/>
+                <a:ea typeface="Calibri" pitchFamily="34" charset="-122"/>
+                <a:cs typeface="Calibri" pitchFamily="34" charset="-120"/>
+              </a:rPr>
+              <a:t>RBAC</a:t>
+            </a:r>
+            <a:endParaRPr lang="en-US" sz="1500" dirty="0"/>
+          </a:p>
+        </p:txBody>
+      </p:sp>
+      <p:sp>
+        <p:nvSpPr>
+          <p:cNvPr id="18" name="Text 16"/>
+          <p:cNvSpPr/>
+          <p:nvPr/>
+        </p:nvSpPr>
+        <p:spPr>
+          <a:xfrm>
+            <a:off x="1554480" y="3547872"/>
+            <a:ext cx="4206240" cy="548640"/>
+          </a:xfrm>
+          <a:prstGeom prst="rect">
+            <a:avLst/>
+          </a:prstGeom>
+          <a:noFill/>
+          <a:ln/>
+        </p:spPr>
+        <p:txBody>
+          <a:bodyPr wrap="square" rtlCol="0" anchor="ctr"/>
+          <a:lstStyle/>
+          <a:p>
+            <a:pPr indent="0" marL="0">
+              <a:buNone/>
+            </a:pPr>
+            <a:r>
+              <a:rPr lang="en-US" sz="1200" dirty="0">
+                <a:solidFill>
+                  <a:srgbClr val="5B6B7B"/>
+                </a:solidFill>
+                <a:latin typeface="Calibri" pitchFamily="34" charset="0"/>
+                <a:ea typeface="Calibri" pitchFamily="34" charset="-122"/>
+                <a:cs typeface="Calibri" pitchFamily="34" charset="-120"/>
+              </a:rPr>
+              <a:t>3 rôles, autorisations vérifiées côté serveur</a:t>
+            </a:r>
+            <a:endParaRPr lang="en-US" sz="1200" dirty="0"/>
+          </a:p>
+        </p:txBody>
+      </p:sp>
+      <p:sp>
+        <p:nvSpPr>
+          <p:cNvPr id="19" name="Shape 17"/>
+          <p:cNvSpPr/>
+          <p:nvPr/>
+        </p:nvSpPr>
+        <p:spPr>
+          <a:xfrm>
+            <a:off x="6217920" y="3017520"/>
+            <a:ext cx="5303520" cy="1234440"/>
+          </a:xfrm>
+          <a:prstGeom prst="roundRect">
+            <a:avLst>
+              <a:gd name="adj" fmla="val 5926"/>
+            </a:avLst>
+          </a:prstGeom>
+          <a:solidFill>
+            <a:srgbClr val="EAF1F6"/>
+          </a:solidFill>
+          <a:ln w="12700">
+            <a:solidFill>
+              <a:srgbClr val="DCE6EE"/>
+            </a:solidFill>
+            <a:prstDash val="solid"/>
+          </a:ln>
+          <a:effectLst>
+            <a:outerShdw sx="100000" sy="100000" kx="0" ky="0" algn="bl" rotWithShape="0" blurRad="76200" dist="25400" dir="5400000">
+              <a:srgbClr val="B9C6D2">
+                <a:alpha val="30000"/>
+              </a:srgbClr>
+            </a:outerShdw>
+          </a:effectLst>
+        </p:spPr>
+      </p:sp>
+      <p:sp>
+        <p:nvSpPr>
+          <p:cNvPr id="20" name="Shape 18"/>
+          <p:cNvSpPr/>
+          <p:nvPr/>
+        </p:nvSpPr>
+        <p:spPr>
+          <a:xfrm>
+            <a:off x="6492240" y="3401568"/>
+            <a:ext cx="457200" cy="457200"/>
+          </a:xfrm>
+          <a:prstGeom prst="ellipse">
+            <a:avLst/>
+          </a:prstGeom>
+          <a:solidFill>
+            <a:srgbClr val="0B5394"/>
+          </a:solidFill>
+          <a:ln/>
+        </p:spPr>
+      </p:sp>
+      <p:sp>
+        <p:nvSpPr>
+          <p:cNvPr id="21" name="Text 19"/>
+          <p:cNvSpPr/>
+          <p:nvPr/>
+        </p:nvSpPr>
+        <p:spPr>
+          <a:xfrm>
+            <a:off x="6492240" y="3401568"/>
+            <a:ext cx="457200" cy="457200"/>
+          </a:xfrm>
+          <a:prstGeom prst="rect">
+            <a:avLst/>
+          </a:prstGeom>
+          <a:noFill/>
+          <a:ln/>
+        </p:spPr>
+        <p:txBody>
+          <a:bodyPr wrap="square" rtlCol="0" anchor="ctr"/>
+          <a:lstStyle/>
+          <a:p>
+            <a:pPr algn="ctr" indent="0" marL="0">
+              <a:buNone/>
+            </a:pPr>
+            <a:r>
+              <a:rPr lang="en-US" sz="1600" b="1" dirty="0">
+                <a:solidFill>
+                  <a:srgbClr val="FFFFFF"/>
+                </a:solidFill>
+                <a:latin typeface="Calibri" pitchFamily="34" charset="0"/>
+                <a:ea typeface="Calibri" pitchFamily="34" charset="-122"/>
+                <a:cs typeface="Calibri" pitchFamily="34" charset="-120"/>
+              </a:rPr>
+              <a:t>🔒</a:t>
+            </a:r>
+            <a:endParaRPr lang="en-US" sz="1600" dirty="0"/>
+          </a:p>
+        </p:txBody>
+      </p:sp>
+      <p:sp>
+        <p:nvSpPr>
+          <p:cNvPr id="22" name="Text 20"/>
+          <p:cNvSpPr/>
+          <p:nvPr/>
+        </p:nvSpPr>
+        <p:spPr>
+          <a:xfrm>
+            <a:off x="7132320" y="3154680"/>
+            <a:ext cx="4206240" cy="365760"/>
+          </a:xfrm>
+          <a:prstGeom prst="rect">
+            <a:avLst/>
+          </a:prstGeom>
+          <a:noFill/>
+          <a:ln/>
+        </p:spPr>
+        <p:txBody>
+          <a:bodyPr wrap="square" rtlCol="0" anchor="ctr"/>
+          <a:lstStyle/>
+          <a:p>
+            <a:pPr indent="0" marL="0">
+              <a:buNone/>
+            </a:pPr>
+            <a:r>
+              <a:rPr lang="en-US" sz="1500" b="1" dirty="0">
+                <a:solidFill>
+                  <a:srgbClr val="0A1A2F"/>
+                </a:solidFill>
+                <a:latin typeface="Calibri" pitchFamily="34" charset="0"/>
+                <a:ea typeface="Calibri" pitchFamily="34" charset="-122"/>
+                <a:cs typeface="Calibri" pitchFamily="34" charset="-120"/>
+              </a:rPr>
+              <a:t>ORM</a:t>
+            </a:r>
+            <a:endParaRPr lang="en-US" sz="1500" dirty="0"/>
+          </a:p>
+        </p:txBody>
+      </p:sp>
+      <p:sp>
+        <p:nvSpPr>
+          <p:cNvPr id="23" name="Text 21"/>
+          <p:cNvSpPr/>
+          <p:nvPr/>
+        </p:nvSpPr>
+        <p:spPr>
+          <a:xfrm>
+            <a:off x="7132320" y="3547872"/>
+            <a:ext cx="4206240" cy="548640"/>
+          </a:xfrm>
+          <a:prstGeom prst="rect">
+            <a:avLst/>
+          </a:prstGeom>
+          <a:noFill/>
+          <a:ln/>
+        </p:spPr>
+        <p:txBody>
+          <a:bodyPr wrap="square" rtlCol="0" anchor="ctr"/>
+          <a:lstStyle/>
+          <a:p>
+            <a:pPr indent="0" marL="0">
+              <a:buNone/>
+            </a:pPr>
+            <a:r>
+              <a:rPr lang="en-US" sz="1200" dirty="0">
+                <a:solidFill>
+                  <a:srgbClr val="5B6B7B"/>
+                </a:solidFill>
+                <a:latin typeface="Calibri" pitchFamily="34" charset="0"/>
+                <a:ea typeface="Calibri" pitchFamily="34" charset="-122"/>
+                <a:cs typeface="Calibri" pitchFamily="34" charset="-120"/>
+              </a:rPr>
+              <a:t>Requêtes préparées → anti-injection SQL</a:t>
+            </a:r>
+            <a:endParaRPr lang="en-US" sz="1200" dirty="0"/>
+          </a:p>
+        </p:txBody>
+      </p:sp>
+      <p:sp>
+        <p:nvSpPr>
+          <p:cNvPr id="24" name="Shape 22"/>
+          <p:cNvSpPr/>
+          <p:nvPr/>
+        </p:nvSpPr>
+        <p:spPr>
+          <a:xfrm>
+            <a:off x="640080" y="4434840"/>
+            <a:ext cx="5303520" cy="1234440"/>
+          </a:xfrm>
+          <a:prstGeom prst="roundRect">
+            <a:avLst>
+              <a:gd name="adj" fmla="val 5926"/>
+            </a:avLst>
+          </a:prstGeom>
+          <a:solidFill>
+            <a:srgbClr val="EAF1F6"/>
+          </a:solidFill>
+          <a:ln w="12700">
+            <a:solidFill>
+              <a:srgbClr val="DCE6EE"/>
+            </a:solidFill>
+            <a:prstDash val="solid"/>
+          </a:ln>
+          <a:effectLst>
+            <a:outerShdw sx="100000" sy="100000" kx="0" ky="0" algn="bl" rotWithShape="0" blurRad="76200" dist="25400" dir="5400000">
+              <a:srgbClr val="B9C6D2">
+                <a:alpha val="30000"/>
+              </a:srgbClr>
+            </a:outerShdw>
+          </a:effectLst>
+        </p:spPr>
+      </p:sp>
+      <p:sp>
+        <p:nvSpPr>
+          <p:cNvPr id="25" name="Shape 23"/>
+          <p:cNvSpPr/>
+          <p:nvPr/>
+        </p:nvSpPr>
+        <p:spPr>
+          <a:xfrm>
+            <a:off x="914400" y="4818888"/>
+            <a:ext cx="457200" cy="457200"/>
+          </a:xfrm>
+          <a:prstGeom prst="ellipse">
+            <a:avLst/>
+          </a:prstGeom>
+          <a:solidFill>
+            <a:srgbClr val="0B5394"/>
+          </a:solidFill>
+          <a:ln/>
+        </p:spPr>
+      </p:sp>
+      <p:sp>
+        <p:nvSpPr>
+          <p:cNvPr id="26" name="Text 24"/>
+          <p:cNvSpPr/>
+          <p:nvPr/>
+        </p:nvSpPr>
+        <p:spPr>
+          <a:xfrm>
+            <a:off x="914400" y="4818888"/>
+            <a:ext cx="457200" cy="457200"/>
+          </a:xfrm>
+          <a:prstGeom prst="rect">
+            <a:avLst/>
+          </a:prstGeom>
+          <a:noFill/>
+          <a:ln/>
+        </p:spPr>
+        <p:txBody>
+          <a:bodyPr wrap="square" rtlCol="0" anchor="ctr"/>
+          <a:lstStyle/>
+          <a:p>
+            <a:pPr algn="ctr" indent="0" marL="0">
+              <a:buNone/>
+            </a:pPr>
+            <a:r>
+              <a:rPr lang="en-US" sz="1600" b="1" dirty="0">
+                <a:solidFill>
+                  <a:srgbClr val="FFFFFF"/>
+                </a:solidFill>
+                <a:latin typeface="Calibri" pitchFamily="34" charset="0"/>
+                <a:ea typeface="Calibri" pitchFamily="34" charset="-122"/>
+                <a:cs typeface="Calibri" pitchFamily="34" charset="-120"/>
+              </a:rPr>
+              <a:t>🔒</a:t>
+            </a:r>
+            <a:endParaRPr lang="en-US" sz="1600" dirty="0"/>
+          </a:p>
+        </p:txBody>
+      </p:sp>
+      <p:sp>
+        <p:nvSpPr>
+          <p:cNvPr id="27" name="Text 25"/>
+          <p:cNvSpPr/>
+          <p:nvPr/>
+        </p:nvSpPr>
+        <p:spPr>
+          <a:xfrm>
+            <a:off x="1554480" y="4572000"/>
+            <a:ext cx="4206240" cy="365760"/>
+          </a:xfrm>
+          <a:prstGeom prst="rect">
+            <a:avLst/>
+          </a:prstGeom>
+          <a:noFill/>
+          <a:ln/>
+        </p:spPr>
+        <p:txBody>
+          <a:bodyPr wrap="square" rtlCol="0" anchor="ctr"/>
+          <a:lstStyle/>
+          <a:p>
+            <a:pPr indent="0" marL="0">
+              <a:buNone/>
+            </a:pPr>
+            <a:r>
+              <a:rPr lang="en-US" sz="1500" b="1" dirty="0">
+                <a:solidFill>
+                  <a:srgbClr val="0A1A2F"/>
+                </a:solidFill>
+                <a:latin typeface="Calibri" pitchFamily="34" charset="0"/>
+                <a:ea typeface="Calibri" pitchFamily="34" charset="-122"/>
+                <a:cs typeface="Calibri" pitchFamily="34" charset="-120"/>
+              </a:rPr>
+              <a:t>CORS</a:t>
+            </a:r>
+            <a:endParaRPr lang="en-US" sz="1500" dirty="0"/>
+          </a:p>
+        </p:txBody>
+      </p:sp>
+      <p:sp>
+        <p:nvSpPr>
+          <p:cNvPr id="28" name="Text 26"/>
+          <p:cNvSpPr/>
+          <p:nvPr/>
+        </p:nvSpPr>
+        <p:spPr>
+          <a:xfrm>
+            <a:off x="1554480" y="4965192"/>
+            <a:ext cx="4206240" cy="548640"/>
+          </a:xfrm>
+          <a:prstGeom prst="rect">
+            <a:avLst/>
+          </a:prstGeom>
+          <a:noFill/>
+          <a:ln/>
+        </p:spPr>
+        <p:txBody>
+          <a:bodyPr wrap="square" rtlCol="0" anchor="ctr"/>
+          <a:lstStyle/>
+          <a:p>
+            <a:pPr indent="0" marL="0">
+              <a:buNone/>
+            </a:pPr>
+            <a:r>
+              <a:rPr lang="en-US" sz="1200" dirty="0">
+                <a:solidFill>
+                  <a:srgbClr val="5B6B7B"/>
+                </a:solidFill>
+                <a:latin typeface="Calibri" pitchFamily="34" charset="0"/>
+                <a:ea typeface="Calibri" pitchFamily="34" charset="-122"/>
+                <a:cs typeface="Calibri" pitchFamily="34" charset="-120"/>
+              </a:rPr>
+              <a:t>Origines restreintes au front autorisé</a:t>
+            </a:r>
+            <a:endParaRPr lang="en-US" sz="1200" dirty="0"/>
+          </a:p>
+        </p:txBody>
+      </p:sp>
+      <p:sp>
+        <p:nvSpPr>
+          <p:cNvPr id="29" name="Shape 27"/>
+          <p:cNvSpPr/>
+          <p:nvPr/>
+        </p:nvSpPr>
+        <p:spPr>
+          <a:xfrm>
+            <a:off x="6217920" y="4434840"/>
+            <a:ext cx="5303520" cy="1234440"/>
+          </a:xfrm>
+          <a:prstGeom prst="roundRect">
+            <a:avLst>
+              <a:gd name="adj" fmla="val 5926"/>
+            </a:avLst>
+          </a:prstGeom>
+          <a:solidFill>
+            <a:srgbClr val="EAF1F6"/>
+          </a:solidFill>
+          <a:ln w="12700">
+            <a:solidFill>
+              <a:srgbClr val="DCE6EE"/>
+            </a:solidFill>
+            <a:prstDash val="solid"/>
+          </a:ln>
+          <a:effectLst>
+            <a:outerShdw sx="100000" sy="100000" kx="0" ky="0" algn="bl" rotWithShape="0" blurRad="76200" dist="25400" dir="5400000">
+              <a:srgbClr val="B9C6D2">
+                <a:alpha val="30000"/>
+              </a:srgbClr>
+            </a:outerShdw>
+          </a:effectLst>
+        </p:spPr>
+      </p:sp>
+      <p:sp>
+        <p:nvSpPr>
+          <p:cNvPr id="30" name="Shape 28"/>
+          <p:cNvSpPr/>
+          <p:nvPr/>
+        </p:nvSpPr>
+        <p:spPr>
+          <a:xfrm>
+            <a:off x="6492240" y="4818888"/>
+            <a:ext cx="457200" cy="457200"/>
+          </a:xfrm>
+          <a:prstGeom prst="ellipse">
+            <a:avLst/>
+          </a:prstGeom>
+          <a:solidFill>
+            <a:srgbClr val="0B5394"/>
+          </a:solidFill>
+          <a:ln/>
+        </p:spPr>
+      </p:sp>
+      <p:sp>
+        <p:nvSpPr>
+          <p:cNvPr id="31" name="Text 29"/>
+          <p:cNvSpPr/>
+          <p:nvPr/>
+        </p:nvSpPr>
+        <p:spPr>
+          <a:xfrm>
+            <a:off x="6492240" y="4818888"/>
+            <a:ext cx="457200" cy="457200"/>
+          </a:xfrm>
+          <a:prstGeom prst="rect">
+            <a:avLst/>
+          </a:prstGeom>
+          <a:noFill/>
+          <a:ln/>
+        </p:spPr>
+        <p:txBody>
+          <a:bodyPr wrap="square" rtlCol="0" anchor="ctr"/>
+          <a:lstStyle/>
+          <a:p>
+            <a:pPr algn="ctr" indent="0" marL="0">
+              <a:buNone/>
+            </a:pPr>
+            <a:r>
+              <a:rPr lang="en-US" sz="1600" b="1" dirty="0">
+                <a:solidFill>
+                  <a:srgbClr val="FFFFFF"/>
+                </a:solidFill>
+                <a:latin typeface="Calibri" pitchFamily="34" charset="0"/>
+                <a:ea typeface="Calibri" pitchFamily="34" charset="-122"/>
+                <a:cs typeface="Calibri" pitchFamily="34" charset="-120"/>
+              </a:rPr>
+              <a:t>🔒</a:t>
+            </a:r>
+            <a:endParaRPr lang="en-US" sz="1600" dirty="0"/>
+          </a:p>
+        </p:txBody>
+      </p:sp>
+      <p:sp>
+        <p:nvSpPr>
+          <p:cNvPr id="32" name="Text 30"/>
+          <p:cNvSpPr/>
+          <p:nvPr/>
+        </p:nvSpPr>
+        <p:spPr>
+          <a:xfrm>
+            <a:off x="7132320" y="4572000"/>
+            <a:ext cx="4206240" cy="365760"/>
+          </a:xfrm>
+          <a:prstGeom prst="rect">
+            <a:avLst/>
+          </a:prstGeom>
+          <a:noFill/>
+          <a:ln/>
+        </p:spPr>
+        <p:txBody>
+          <a:bodyPr wrap="square" rtlCol="0" anchor="ctr"/>
+          <a:lstStyle/>
+          <a:p>
+            <a:pPr indent="0" marL="0">
+              <a:buNone/>
+            </a:pPr>
+            <a:r>
+              <a:rPr lang="en-US" sz="1500" b="1" dirty="0">
+                <a:solidFill>
+                  <a:srgbClr val="0A1A2F"/>
+                </a:solidFill>
+                <a:latin typeface="Calibri" pitchFamily="34" charset="0"/>
+                <a:ea typeface="Calibri" pitchFamily="34" charset="-122"/>
+                <a:cs typeface="Calibri" pitchFamily="34" charset="-120"/>
+              </a:rPr>
+              <a:t>Validation</a:t>
+            </a:r>
+            <a:endParaRPr lang="en-US" sz="1500" dirty="0"/>
+          </a:p>
+        </p:txBody>
+      </p:sp>
+      <p:sp>
+        <p:nvSpPr>
+          <p:cNvPr id="33" name="Text 31"/>
+          <p:cNvSpPr/>
+          <p:nvPr/>
+        </p:nvSpPr>
+        <p:spPr>
+          <a:xfrm>
+            <a:off x="7132320" y="4965192"/>
+            <a:ext cx="4206240" cy="548640"/>
+          </a:xfrm>
+          <a:prstGeom prst="rect">
+            <a:avLst/>
+          </a:prstGeom>
+          <a:noFill/>
+          <a:ln/>
+        </p:spPr>
+        <p:txBody>
+          <a:bodyPr wrap="square" rtlCol="0" anchor="ctr"/>
+          <a:lstStyle/>
+          <a:p>
+            <a:pPr indent="0" marL="0">
+              <a:buNone/>
+            </a:pPr>
+            <a:r>
+              <a:rPr lang="en-US" sz="1200" dirty="0">
+                <a:solidFill>
+                  <a:srgbClr val="5B6B7B"/>
+                </a:solidFill>
+                <a:latin typeface="Calibri" pitchFamily="34" charset="0"/>
+                <a:ea typeface="Calibri" pitchFamily="34" charset="-122"/>
+                <a:cs typeface="Calibri" pitchFamily="34" charset="-120"/>
+              </a:rPr>
+              <a:t>Schémas Pydantic sur toutes les entrées</a:t>
+            </a:r>
+            <a:endParaRPr lang="en-US" sz="1200" dirty="0"/>
+          </a:p>
+        </p:txBody>
+      </p:sp>
+    </p:spTree>
+  </p:cSld>
+  <p:clrMapOvr>
+    <a:masterClrMapping/>
+  </p:clrMapOvr>
+</p:sld>
+</file>
+
+<file path=ppt/slides/slide15.xml><?xml version="1.0" encoding="utf-8"?>
+<p:sld xmlns:a="http://schemas.openxmlformats.org/drawingml/2006/main" xmlns:r="http://schemas.openxmlformats.org/officeDocument/2006/relationships" xmlns:p="http://schemas.openxmlformats.org/presentationml/2006/main">
+  <p:cSld name="Slide 15">
+    <p:bg>
+      <p:bgPr>
+        <a:solidFill>
+          <a:srgbClr val="FFFFFF"/>
+        </a:solidFill>
+      </p:bgPr>
+    </p:bg>
+    <p:spTree>
+      <p:nvGrpSpPr>
+        <p:cNvPr id="1" name=""/>
+        <p:cNvGrpSpPr/>
+        <p:nvPr/>
+      </p:nvGrpSpPr>
+      <p:grpSpPr>
+        <a:xfrm>
+          <a:off x="0" y="0"/>
+          <a:ext cx="0" cy="0"/>
+          <a:chOff x="0" y="0"/>
+          <a:chExt cx="0" cy="0"/>
+        </a:xfrm>
+      </p:grpSpPr>
+      <p:sp>
+        <p:nvSpPr>
+          <p:cNvPr id="2" name="Text 0"/>
+          <p:cNvSpPr/>
+          <p:nvPr/>
+        </p:nvSpPr>
+        <p:spPr>
+          <a:xfrm>
+            <a:off x="640080" y="411480"/>
+            <a:ext cx="10972800" cy="274320"/>
+          </a:xfrm>
+          <a:prstGeom prst="rect">
+            <a:avLst/>
+          </a:prstGeom>
+          <a:noFill/>
+          <a:ln/>
+        </p:spPr>
+        <p:txBody>
+          <a:bodyPr wrap="square" rtlCol="0" anchor="ctr"/>
+          <a:lstStyle/>
+          <a:p>
+            <a:pPr indent="0" marL="0">
+              <a:buNone/>
+            </a:pPr>
+            <a:r>
+              <a:rPr lang="en-US" sz="1200" b="1" spc="200" kern="0" dirty="0">
+                <a:solidFill>
+                  <a:srgbClr val="13A89E"/>
+                </a:solidFill>
+                <a:latin typeface="Calibri" pitchFamily="34" charset="0"/>
+                <a:ea typeface="Calibri" pitchFamily="34" charset="-122"/>
+                <a:cs typeface="Calibri" pitchFamily="34" charset="-120"/>
+              </a:rPr>
+              <a:t>08 · DÉMONSTRATION</a:t>
+            </a:r>
+            <a:endParaRPr lang="en-US" sz="1200" dirty="0"/>
+          </a:p>
+        </p:txBody>
+      </p:sp>
+      <p:sp>
+        <p:nvSpPr>
+          <p:cNvPr id="3" name="Text 1"/>
+          <p:cNvSpPr/>
+          <p:nvPr/>
+        </p:nvSpPr>
+        <p:spPr>
+          <a:xfrm>
+            <a:off x="640080" y="658368"/>
+            <a:ext cx="10972800" cy="640080"/>
+          </a:xfrm>
+          <a:prstGeom prst="rect">
+            <a:avLst/>
+          </a:prstGeom>
+          <a:noFill/>
+          <a:ln/>
+        </p:spPr>
+        <p:txBody>
+          <a:bodyPr wrap="square" rtlCol="0" anchor="ctr"/>
+          <a:lstStyle/>
+          <a:p>
+            <a:pPr indent="0" marL="0">
+              <a:buNone/>
+            </a:pPr>
+            <a:r>
+              <a:rPr lang="en-US" sz="3000" b="1" dirty="0">
+                <a:solidFill>
+                  <a:srgbClr val="0A1A2F"/>
+                </a:solidFill>
+                <a:latin typeface="Cambria" pitchFamily="34" charset="0"/>
+                <a:ea typeface="Cambria" pitchFamily="34" charset="-122"/>
+                <a:cs typeface="Cambria" pitchFamily="34" charset="-120"/>
+              </a:rPr>
+              <a:t>L'application en fonctionnement</a:t>
+            </a:r>
+            <a:endParaRPr lang="en-US" sz="3000" dirty="0"/>
+          </a:p>
+        </p:txBody>
+      </p:sp>
+      <p:sp>
+        <p:nvSpPr>
+          <p:cNvPr id="4" name="Shape 2"/>
+          <p:cNvSpPr/>
+          <p:nvPr/>
+        </p:nvSpPr>
+        <p:spPr>
+          <a:xfrm>
+            <a:off x="640080" y="1600200"/>
+            <a:ext cx="5394960" cy="2103120"/>
+          </a:xfrm>
+          <a:prstGeom prst="roundRect">
+            <a:avLst>
+              <a:gd name="adj" fmla="val 2609"/>
+            </a:avLst>
+          </a:prstGeom>
+          <a:solidFill>
+            <a:srgbClr val="F4F8FB"/>
+          </a:solidFill>
+          <a:ln w="19050">
+            <a:solidFill>
+              <a:srgbClr val="0B5394"/>
+            </a:solidFill>
+            <a:prstDash val="dash"/>
+          </a:ln>
+        </p:spPr>
+      </p:sp>
+      <p:sp>
+        <p:nvSpPr>
+          <p:cNvPr id="5" name="Text 3"/>
+          <p:cNvSpPr/>
+          <p:nvPr/>
+        </p:nvSpPr>
+        <p:spPr>
+          <a:xfrm>
+            <a:off x="822960" y="1600200"/>
+            <a:ext cx="5029200" cy="2103120"/>
+          </a:xfrm>
+          <a:prstGeom prst="rect">
+            <a:avLst/>
+          </a:prstGeom>
+          <a:noFill/>
+          <a:ln/>
+        </p:spPr>
+        <p:txBody>
+          <a:bodyPr wrap="square" rtlCol="0" anchor="ctr"/>
+          <a:lstStyle/>
+          <a:p>
+            <a:pPr algn="ctr" indent="0" marL="0">
+              <a:buNone/>
+            </a:pPr>
+            <a:r>
+              <a:rPr lang="en-US" sz="1400" b="1" dirty="0">
+                <a:solidFill>
+                  <a:srgbClr val="0B5394"/>
+                </a:solidFill>
+                <a:latin typeface="Calibri" pitchFamily="34" charset="0"/>
+                <a:ea typeface="Calibri" pitchFamily="34" charset="-122"/>
+                <a:cs typeface="Calibri" pitchFamily="34" charset="-120"/>
+              </a:rPr>
+              <a:t>📷 CAPTURE D'ÉCRAN À INSÉRER
+</a:t>
+            </a:r>
+            <a:pPr algn="ctr" indent="0" marL="0">
+              <a:buNone/>
+            </a:pPr>
+            <a:r>
+              <a:rPr lang="en-US" sz="1100" i="1" dirty="0">
+                <a:solidFill>
+                  <a:srgbClr val="5B6B7B"/>
+                </a:solidFill>
+                <a:latin typeface="Calibri" pitchFamily="34" charset="0"/>
+                <a:ea typeface="Calibri" pitchFamily="34" charset="-122"/>
+                <a:cs typeface="Calibri" pitchFamily="34" charset="-120"/>
+              </a:rPr>
+              <a:t>Écran de connexion</a:t>
+            </a:r>
+            <a:endParaRPr lang="en-US" sz="1400" dirty="0"/>
+          </a:p>
+        </p:txBody>
+      </p:sp>
+      <p:sp>
+        <p:nvSpPr>
+          <p:cNvPr id="6" name="Shape 4"/>
+          <p:cNvSpPr/>
+          <p:nvPr/>
+        </p:nvSpPr>
+        <p:spPr>
+          <a:xfrm>
+            <a:off x="6126480" y="1600200"/>
+            <a:ext cx="5394960" cy="2103120"/>
+          </a:xfrm>
+          <a:prstGeom prst="roundRect">
+            <a:avLst>
+              <a:gd name="adj" fmla="val 2609"/>
+            </a:avLst>
+          </a:prstGeom>
+          <a:solidFill>
+            <a:srgbClr val="F4F8FB"/>
+          </a:solidFill>
+          <a:ln w="19050">
+            <a:solidFill>
+              <a:srgbClr val="0B5394"/>
+            </a:solidFill>
+            <a:prstDash val="dash"/>
+          </a:ln>
+        </p:spPr>
+      </p:sp>
+      <p:sp>
+        <p:nvSpPr>
+          <p:cNvPr id="7" name="Text 5"/>
+          <p:cNvSpPr/>
+          <p:nvPr/>
+        </p:nvSpPr>
+        <p:spPr>
+          <a:xfrm>
+            <a:off x="6309360" y="1600200"/>
+            <a:ext cx="5029200" cy="2103120"/>
+          </a:xfrm>
+          <a:prstGeom prst="rect">
+            <a:avLst/>
+          </a:prstGeom>
+          <a:noFill/>
+          <a:ln/>
+        </p:spPr>
+        <p:txBody>
+          <a:bodyPr wrap="square" rtlCol="0" anchor="ctr"/>
+          <a:lstStyle/>
+          <a:p>
+            <a:pPr algn="ctr" indent="0" marL="0">
+              <a:buNone/>
+            </a:pPr>
+            <a:r>
+              <a:rPr lang="en-US" sz="1400" b="1" dirty="0">
+                <a:solidFill>
+                  <a:srgbClr val="0B5394"/>
+                </a:solidFill>
+                <a:latin typeface="Calibri" pitchFamily="34" charset="0"/>
+                <a:ea typeface="Calibri" pitchFamily="34" charset="-122"/>
+                <a:cs typeface="Calibri" pitchFamily="34" charset="-120"/>
+              </a:rPr>
+              <a:t>📷 CAPTURE D'ÉCRAN À INSÉRER
+</a:t>
+            </a:r>
+            <a:pPr algn="ctr" indent="0" marL="0">
+              <a:buNone/>
+            </a:pPr>
+            <a:r>
+              <a:rPr lang="en-US" sz="1100" i="1" dirty="0">
+                <a:solidFill>
+                  <a:srgbClr val="5B6B7B"/>
+                </a:solidFill>
+                <a:latin typeface="Calibri" pitchFamily="34" charset="0"/>
+                <a:ea typeface="Calibri" pitchFamily="34" charset="-122"/>
+                <a:cs typeface="Calibri" pitchFamily="34" charset="-120"/>
+              </a:rPr>
+              <a:t>Tableau de bord salarié (soldes + demande)</a:t>
+            </a:r>
+            <a:endParaRPr lang="en-US" sz="1400" dirty="0"/>
+          </a:p>
+        </p:txBody>
+      </p:sp>
+      <p:sp>
+        <p:nvSpPr>
+          <p:cNvPr id="8" name="Shape 6"/>
+          <p:cNvSpPr/>
+          <p:nvPr/>
+        </p:nvSpPr>
+        <p:spPr>
+          <a:xfrm>
+            <a:off x="640080" y="3886200"/>
+            <a:ext cx="5394960" cy="2103120"/>
+          </a:xfrm>
+          <a:prstGeom prst="roundRect">
+            <a:avLst>
+              <a:gd name="adj" fmla="val 2609"/>
+            </a:avLst>
+          </a:prstGeom>
+          <a:solidFill>
+            <a:srgbClr val="F4F8FB"/>
+          </a:solidFill>
+          <a:ln w="19050">
+            <a:solidFill>
+              <a:srgbClr val="0B5394"/>
+            </a:solidFill>
+            <a:prstDash val="dash"/>
+          </a:ln>
+        </p:spPr>
+      </p:sp>
+      <p:sp>
+        <p:nvSpPr>
+          <p:cNvPr id="9" name="Text 7"/>
+          <p:cNvSpPr/>
+          <p:nvPr/>
+        </p:nvSpPr>
+        <p:spPr>
+          <a:xfrm>
+            <a:off x="822960" y="3886200"/>
+            <a:ext cx="5029200" cy="2103120"/>
+          </a:xfrm>
+          <a:prstGeom prst="rect">
+            <a:avLst/>
+          </a:prstGeom>
+          <a:noFill/>
+          <a:ln/>
+        </p:spPr>
+        <p:txBody>
+          <a:bodyPr wrap="square" rtlCol="0" anchor="ctr"/>
+          <a:lstStyle/>
+          <a:p>
+            <a:pPr algn="ctr" indent="0" marL="0">
+              <a:buNone/>
+            </a:pPr>
+            <a:r>
+              <a:rPr lang="en-US" sz="1400" b="1" dirty="0">
+                <a:solidFill>
+                  <a:srgbClr val="0B5394"/>
+                </a:solidFill>
+                <a:latin typeface="Calibri" pitchFamily="34" charset="0"/>
+                <a:ea typeface="Calibri" pitchFamily="34" charset="-122"/>
+                <a:cs typeface="Calibri" pitchFamily="34" charset="-120"/>
+              </a:rPr>
+              <a:t>📷 CAPTURE D'ÉCRAN À INSÉRER
+</a:t>
+            </a:r>
+            <a:pPr algn="ctr" indent="0" marL="0">
+              <a:buNone/>
+            </a:pPr>
+            <a:r>
+              <a:rPr lang="en-US" sz="1100" i="1" dirty="0">
+                <a:solidFill>
+                  <a:srgbClr val="5B6B7B"/>
+                </a:solidFill>
+                <a:latin typeface="Calibri" pitchFamily="34" charset="0"/>
+                <a:ea typeface="Calibri" pitchFamily="34" charset="-122"/>
+                <a:cs typeface="Calibri" pitchFamily="34" charset="-120"/>
+              </a:rPr>
+              <a:t>Espace de validation manager</a:t>
+            </a:r>
+            <a:endParaRPr lang="en-US" sz="1400" dirty="0"/>
+          </a:p>
+        </p:txBody>
+      </p:sp>
+      <p:sp>
+        <p:nvSpPr>
+          <p:cNvPr id="10" name="Shape 8"/>
+          <p:cNvSpPr/>
+          <p:nvPr/>
+        </p:nvSpPr>
+        <p:spPr>
+          <a:xfrm>
+            <a:off x="6126480" y="3886200"/>
+            <a:ext cx="5394960" cy="2103120"/>
+          </a:xfrm>
+          <a:prstGeom prst="roundRect">
+            <a:avLst>
+              <a:gd name="adj" fmla="val 2609"/>
+            </a:avLst>
+          </a:prstGeom>
+          <a:solidFill>
+            <a:srgbClr val="F4F8FB"/>
+          </a:solidFill>
+          <a:ln w="19050">
+            <a:solidFill>
+              <a:srgbClr val="0B5394"/>
+            </a:solidFill>
+            <a:prstDash val="dash"/>
+          </a:ln>
+        </p:spPr>
+      </p:sp>
+      <p:sp>
+        <p:nvSpPr>
+          <p:cNvPr id="11" name="Text 9"/>
+          <p:cNvSpPr/>
+          <p:nvPr/>
+        </p:nvSpPr>
+        <p:spPr>
+          <a:xfrm>
+            <a:off x="6309360" y="3886200"/>
+            <a:ext cx="5029200" cy="2103120"/>
+          </a:xfrm>
+          <a:prstGeom prst="rect">
+            <a:avLst/>
+          </a:prstGeom>
+          <a:noFill/>
+          <a:ln/>
+        </p:spPr>
+        <p:txBody>
+          <a:bodyPr wrap="square" rtlCol="0" anchor="ctr"/>
+          <a:lstStyle/>
+          <a:p>
+            <a:pPr algn="ctr" indent="0" marL="0">
+              <a:buNone/>
+            </a:pPr>
+            <a:r>
+              <a:rPr lang="en-US" sz="1400" b="1" dirty="0">
+                <a:solidFill>
+                  <a:srgbClr val="0B5394"/>
+                </a:solidFill>
+                <a:latin typeface="Calibri" pitchFamily="34" charset="0"/>
+                <a:ea typeface="Calibri" pitchFamily="34" charset="-122"/>
+                <a:cs typeface="Calibri" pitchFamily="34" charset="-120"/>
+              </a:rPr>
+              <a:t>📷 CAPTURE D'ÉCRAN À INSÉRER
+</a:t>
+            </a:r>
+            <a:pPr algn="ctr" indent="0" marL="0">
+              <a:buNone/>
+            </a:pPr>
+            <a:r>
+              <a:rPr lang="en-US" sz="1100" i="1" dirty="0">
+                <a:solidFill>
+                  <a:srgbClr val="5B6B7B"/>
+                </a:solidFill>
+                <a:latin typeface="Calibri" pitchFamily="34" charset="0"/>
+                <a:ea typeface="Calibri" pitchFamily="34" charset="-122"/>
+                <a:cs typeface="Calibri" pitchFamily="34" charset="-120"/>
+              </a:rPr>
+              <a:t>Documentation Swagger de l'API</a:t>
+            </a:r>
+            <a:endParaRPr lang="en-US" sz="1400" dirty="0"/>
+          </a:p>
+        </p:txBody>
+      </p:sp>
+    </p:spTree>
+  </p:cSld>
+  <p:clrMapOvr>
+    <a:masterClrMapping/>
+  </p:clrMapOvr>
+</p:sld>
+</file>
+
+<file path=ppt/slides/slide16.xml><?xml version="1.0" encoding="utf-8"?>
+<p:sld xmlns:a="http://schemas.openxmlformats.org/drawingml/2006/main" xmlns:r="http://schemas.openxmlformats.org/officeDocument/2006/relationships" xmlns:p="http://schemas.openxmlformats.org/presentationml/2006/main">
+  <p:cSld name="Slide 16">
+    <p:bg>
+      <p:bgPr>
+        <a:solidFill>
+          <a:srgbClr val="FFFFFF"/>
+        </a:solidFill>
+      </p:bgPr>
+    </p:bg>
+    <p:spTree>
+      <p:nvGrpSpPr>
+        <p:cNvPr id="1" name=""/>
+        <p:cNvGrpSpPr/>
+        <p:nvPr/>
+      </p:nvGrpSpPr>
+      <p:grpSpPr>
+        <a:xfrm>
+          <a:off x="0" y="0"/>
+          <a:ext cx="0" cy="0"/>
+          <a:chOff x="0" y="0"/>
+          <a:chExt cx="0" cy="0"/>
+        </a:xfrm>
+      </p:grpSpPr>
+      <p:sp>
+        <p:nvSpPr>
+          <p:cNvPr id="2" name="Text 0"/>
+          <p:cNvSpPr/>
+          <p:nvPr/>
+        </p:nvSpPr>
+        <p:spPr>
+          <a:xfrm>
+            <a:off x="640080" y="411480"/>
+            <a:ext cx="10972800" cy="274320"/>
+          </a:xfrm>
+          <a:prstGeom prst="rect">
+            <a:avLst/>
+          </a:prstGeom>
+          <a:noFill/>
+          <a:ln/>
+        </p:spPr>
+        <p:txBody>
+          <a:bodyPr wrap="square" rtlCol="0" anchor="ctr"/>
+          <a:lstStyle/>
+          <a:p>
+            <a:pPr indent="0" marL="0">
+              <a:buNone/>
+            </a:pPr>
+            <a:r>
+              <a:rPr lang="en-US" sz="1200" b="1" spc="200" kern="0" dirty="0">
+                <a:solidFill>
+                  <a:srgbClr val="13A89E"/>
+                </a:solidFill>
+                <a:latin typeface="Calibri" pitchFamily="34" charset="0"/>
+                <a:ea typeface="Calibri" pitchFamily="34" charset="-122"/>
+                <a:cs typeface="Calibri" pitchFamily="34" charset="-120"/>
+              </a:rPr>
+              <a:t>09 · QUALITÉ</a:t>
+            </a:r>
+            <a:endParaRPr lang="en-US" sz="1200" dirty="0"/>
+          </a:p>
+        </p:txBody>
+      </p:sp>
+      <p:sp>
+        <p:nvSpPr>
+          <p:cNvPr id="3" name="Text 1"/>
+          <p:cNvSpPr/>
+          <p:nvPr/>
+        </p:nvSpPr>
+        <p:spPr>
+          <a:xfrm>
+            <a:off x="640080" y="658368"/>
+            <a:ext cx="10972800" cy="640080"/>
+          </a:xfrm>
+          <a:prstGeom prst="rect">
+            <a:avLst/>
+          </a:prstGeom>
+          <a:noFill/>
+          <a:ln/>
+        </p:spPr>
+        <p:txBody>
+          <a:bodyPr wrap="square" rtlCol="0" anchor="ctr"/>
+          <a:lstStyle/>
+          <a:p>
+            <a:pPr indent="0" marL="0">
+              <a:buNone/>
+            </a:pPr>
+            <a:r>
+              <a:rPr lang="en-US" sz="3000" b="1" dirty="0">
+                <a:solidFill>
+                  <a:srgbClr val="0A1A2F"/>
+                </a:solidFill>
+                <a:latin typeface="Cambria" pitchFamily="34" charset="0"/>
+                <a:ea typeface="Cambria" pitchFamily="34" charset="-122"/>
+                <a:cs typeface="Cambria" pitchFamily="34" charset="-120"/>
+              </a:rPr>
+              <a:t>Tests &amp; industrialisation</a:t>
+            </a:r>
+            <a:endParaRPr lang="en-US" sz="3000" dirty="0"/>
+          </a:p>
+        </p:txBody>
+      </p:sp>
+      <p:sp>
+        <p:nvSpPr>
+          <p:cNvPr id="4" name="Shape 2"/>
+          <p:cNvSpPr/>
+          <p:nvPr/>
+        </p:nvSpPr>
+        <p:spPr>
+          <a:xfrm>
+            <a:off x="640080" y="1645920"/>
+            <a:ext cx="3429000" cy="1828800"/>
+          </a:xfrm>
+          <a:prstGeom prst="roundRect">
+            <a:avLst>
+              <a:gd name="adj" fmla="val 4000"/>
             </a:avLst>
           </a:prstGeom>
           <a:solidFill>
@@ -4442,30 +5538,30 @@
       </p:sp>
       <p:sp>
         <p:nvSpPr>
-          <p:cNvPr id="11" name="Text 9"/>
-          <p:cNvSpPr/>
-          <p:nvPr/>
-        </p:nvSpPr>
-        <p:spPr>
-          <a:xfrm>
-            <a:off x="8275320" y="1783080"/>
-            <a:ext cx="3017520" cy="365760"/>
-          </a:xfrm>
-          <a:prstGeom prst="rect">
-            <a:avLst/>
-          </a:prstGeom>
-          <a:noFill/>
-          <a:ln/>
-        </p:spPr>
-        <p:txBody>
-          <a:bodyPr wrap="square" rtlCol="0" anchor="ctr"/>
-          <a:lstStyle/>
-          <a:p>
-            <a:pPr indent="0" marL="0">
-              <a:buNone/>
-            </a:pPr>
-            <a:r>
-              <a:rPr lang="en-US" sz="1600" b="1" dirty="0">
+          <p:cNvPr id="5" name="Text 3"/>
+          <p:cNvSpPr/>
+          <p:nvPr/>
+        </p:nvSpPr>
+        <p:spPr>
+          <a:xfrm>
+            <a:off x="640080" y="1828800"/>
+            <a:ext cx="3429000" cy="914400"/>
+          </a:xfrm>
+          <a:prstGeom prst="rect">
+            <a:avLst/>
+          </a:prstGeom>
+          <a:noFill/>
+          <a:ln/>
+        </p:spPr>
+        <p:txBody>
+          <a:bodyPr wrap="square" rtlCol="0" anchor="ctr"/>
+          <a:lstStyle/>
+          <a:p>
+            <a:pPr algn="ctr" indent="0" marL="0">
+              <a:buNone/>
+            </a:pPr>
+            <a:r>
+              <a:rPr lang="en-US" sz="4400" b="1" dirty="0">
                 <a:solidFill>
                   <a:srgbClr val="13A89E"/>
                 </a:solidFill>
@@ -4473,7 +5569,343 @@
                 <a:ea typeface="Cambria" pitchFamily="34" charset="-122"/>
                 <a:cs typeface="Cambria" pitchFamily="34" charset="-120"/>
               </a:rPr>
-              <a:t>Perspectives</a:t>
+              <a:t>21/21</a:t>
+            </a:r>
+            <a:endParaRPr lang="en-US" sz="4400" dirty="0"/>
+          </a:p>
+        </p:txBody>
+      </p:sp>
+      <p:sp>
+        <p:nvSpPr>
+          <p:cNvPr id="6" name="Text 4"/>
+          <p:cNvSpPr/>
+          <p:nvPr/>
+        </p:nvSpPr>
+        <p:spPr>
+          <a:xfrm>
+            <a:off x="640080" y="2743200"/>
+            <a:ext cx="3429000" cy="457200"/>
+          </a:xfrm>
+          <a:prstGeom prst="rect">
+            <a:avLst/>
+          </a:prstGeom>
+          <a:noFill/>
+          <a:ln/>
+        </p:spPr>
+        <p:txBody>
+          <a:bodyPr wrap="square" rtlCol="0" anchor="ctr"/>
+          <a:lstStyle/>
+          <a:p>
+            <a:pPr algn="ctr" indent="0" marL="0">
+              <a:buNone/>
+            </a:pPr>
+            <a:r>
+              <a:rPr lang="en-US" sz="1400" dirty="0">
+                <a:solidFill>
+                  <a:srgbClr val="FFFFFF"/>
+                </a:solidFill>
+                <a:latin typeface="Calibri" pitchFamily="34" charset="0"/>
+                <a:ea typeface="Calibri" pitchFamily="34" charset="-122"/>
+                <a:cs typeface="Calibri" pitchFamily="34" charset="-120"/>
+              </a:rPr>
+              <a:t>tests au vert</a:t>
+            </a:r>
+            <a:endParaRPr lang="en-US" sz="1400" dirty="0"/>
+          </a:p>
+        </p:txBody>
+      </p:sp>
+      <p:sp>
+        <p:nvSpPr>
+          <p:cNvPr id="7" name="Shape 5"/>
+          <p:cNvSpPr/>
+          <p:nvPr/>
+        </p:nvSpPr>
+        <p:spPr>
+          <a:xfrm>
+            <a:off x="4343400" y="1645920"/>
+            <a:ext cx="3429000" cy="1828800"/>
+          </a:xfrm>
+          <a:prstGeom prst="roundRect">
+            <a:avLst>
+              <a:gd name="adj" fmla="val 4000"/>
+            </a:avLst>
+          </a:prstGeom>
+          <a:solidFill>
+            <a:srgbClr val="0A1A2F"/>
+          </a:solidFill>
+          <a:ln w="12700">
+            <a:solidFill>
+              <a:srgbClr val="DCE6EE"/>
+            </a:solidFill>
+            <a:prstDash val="solid"/>
+          </a:ln>
+          <a:effectLst>
+            <a:outerShdw sx="100000" sy="100000" kx="0" ky="0" algn="bl" rotWithShape="0" blurRad="76200" dist="25400" dir="5400000">
+              <a:srgbClr val="B9C6D2">
+                <a:alpha val="30000"/>
+              </a:srgbClr>
+            </a:outerShdw>
+          </a:effectLst>
+        </p:spPr>
+      </p:sp>
+      <p:sp>
+        <p:nvSpPr>
+          <p:cNvPr id="8" name="Text 6"/>
+          <p:cNvSpPr/>
+          <p:nvPr/>
+        </p:nvSpPr>
+        <p:spPr>
+          <a:xfrm>
+            <a:off x="4343400" y="1828800"/>
+            <a:ext cx="3429000" cy="914400"/>
+          </a:xfrm>
+          <a:prstGeom prst="rect">
+            <a:avLst/>
+          </a:prstGeom>
+          <a:noFill/>
+          <a:ln/>
+        </p:spPr>
+        <p:txBody>
+          <a:bodyPr wrap="square" rtlCol="0" anchor="ctr"/>
+          <a:lstStyle/>
+          <a:p>
+            <a:pPr algn="ctr" indent="0" marL="0">
+              <a:buNone/>
+            </a:pPr>
+            <a:r>
+              <a:rPr lang="en-US" sz="4400" b="1" dirty="0">
+                <a:solidFill>
+                  <a:srgbClr val="13A89E"/>
+                </a:solidFill>
+                <a:latin typeface="Cambria" pitchFamily="34" charset="0"/>
+                <a:ea typeface="Cambria" pitchFamily="34" charset="-122"/>
+                <a:cs typeface="Cambria" pitchFamily="34" charset="-120"/>
+              </a:rPr>
+              <a:t>100%</a:t>
+            </a:r>
+            <a:endParaRPr lang="en-US" sz="4400" dirty="0"/>
+          </a:p>
+        </p:txBody>
+      </p:sp>
+      <p:sp>
+        <p:nvSpPr>
+          <p:cNvPr id="9" name="Text 7"/>
+          <p:cNvSpPr/>
+          <p:nvPr/>
+        </p:nvSpPr>
+        <p:spPr>
+          <a:xfrm>
+            <a:off x="4343400" y="2743200"/>
+            <a:ext cx="3429000" cy="457200"/>
+          </a:xfrm>
+          <a:prstGeom prst="rect">
+            <a:avLst/>
+          </a:prstGeom>
+          <a:noFill/>
+          <a:ln/>
+        </p:spPr>
+        <p:txBody>
+          <a:bodyPr wrap="square" rtlCol="0" anchor="ctr"/>
+          <a:lstStyle/>
+          <a:p>
+            <a:pPr algn="ctr" indent="0" marL="0">
+              <a:buNone/>
+            </a:pPr>
+            <a:r>
+              <a:rPr lang="en-US" sz="1400" dirty="0">
+                <a:solidFill>
+                  <a:srgbClr val="FFFFFF"/>
+                </a:solidFill>
+                <a:latin typeface="Calibri" pitchFamily="34" charset="0"/>
+                <a:ea typeface="Calibri" pitchFamily="34" charset="-122"/>
+                <a:cs typeface="Calibri" pitchFamily="34" charset="-120"/>
+              </a:rPr>
+              <a:t>réussite</a:t>
+            </a:r>
+            <a:endParaRPr lang="en-US" sz="1400" dirty="0"/>
+          </a:p>
+        </p:txBody>
+      </p:sp>
+      <p:sp>
+        <p:nvSpPr>
+          <p:cNvPr id="10" name="Shape 8"/>
+          <p:cNvSpPr/>
+          <p:nvPr/>
+        </p:nvSpPr>
+        <p:spPr>
+          <a:xfrm>
+            <a:off x="8046720" y="1645920"/>
+            <a:ext cx="3429000" cy="1828800"/>
+          </a:xfrm>
+          <a:prstGeom prst="roundRect">
+            <a:avLst>
+              <a:gd name="adj" fmla="val 4000"/>
+            </a:avLst>
+          </a:prstGeom>
+          <a:solidFill>
+            <a:srgbClr val="0A1A2F"/>
+          </a:solidFill>
+          <a:ln w="12700">
+            <a:solidFill>
+              <a:srgbClr val="DCE6EE"/>
+            </a:solidFill>
+            <a:prstDash val="solid"/>
+          </a:ln>
+          <a:effectLst>
+            <a:outerShdw sx="100000" sy="100000" kx="0" ky="0" algn="bl" rotWithShape="0" blurRad="76200" dist="25400" dir="5400000">
+              <a:srgbClr val="B9C6D2">
+                <a:alpha val="30000"/>
+              </a:srgbClr>
+            </a:outerShdw>
+          </a:effectLst>
+        </p:spPr>
+      </p:sp>
+      <p:sp>
+        <p:nvSpPr>
+          <p:cNvPr id="11" name="Text 9"/>
+          <p:cNvSpPr/>
+          <p:nvPr/>
+        </p:nvSpPr>
+        <p:spPr>
+          <a:xfrm>
+            <a:off x="8046720" y="1828800"/>
+            <a:ext cx="3429000" cy="914400"/>
+          </a:xfrm>
+          <a:prstGeom prst="rect">
+            <a:avLst/>
+          </a:prstGeom>
+          <a:noFill/>
+          <a:ln/>
+        </p:spPr>
+        <p:txBody>
+          <a:bodyPr wrap="square" rtlCol="0" anchor="ctr"/>
+          <a:lstStyle/>
+          <a:p>
+            <a:pPr algn="ctr" indent="0" marL="0">
+              <a:buNone/>
+            </a:pPr>
+            <a:r>
+              <a:rPr lang="en-US" sz="4400" b="1" dirty="0">
+                <a:solidFill>
+                  <a:srgbClr val="13A89E"/>
+                </a:solidFill>
+                <a:latin typeface="Cambria" pitchFamily="34" charset="0"/>
+                <a:ea typeface="Cambria" pitchFamily="34" charset="-122"/>
+                <a:cs typeface="Cambria" pitchFamily="34" charset="-120"/>
+              </a:rPr>
+              <a:t>3</a:t>
+            </a:r>
+            <a:endParaRPr lang="en-US" sz="4400" dirty="0"/>
+          </a:p>
+        </p:txBody>
+      </p:sp>
+      <p:sp>
+        <p:nvSpPr>
+          <p:cNvPr id="12" name="Text 10"/>
+          <p:cNvSpPr/>
+          <p:nvPr/>
+        </p:nvSpPr>
+        <p:spPr>
+          <a:xfrm>
+            <a:off x="8046720" y="2743200"/>
+            <a:ext cx="3429000" cy="457200"/>
+          </a:xfrm>
+          <a:prstGeom prst="rect">
+            <a:avLst/>
+          </a:prstGeom>
+          <a:noFill/>
+          <a:ln/>
+        </p:spPr>
+        <p:txBody>
+          <a:bodyPr wrap="square" rtlCol="0" anchor="ctr"/>
+          <a:lstStyle/>
+          <a:p>
+            <a:pPr algn="ctr" indent="0" marL="0">
+              <a:buNone/>
+            </a:pPr>
+            <a:r>
+              <a:rPr lang="en-US" sz="1400" dirty="0">
+                <a:solidFill>
+                  <a:srgbClr val="FFFFFF"/>
+                </a:solidFill>
+                <a:latin typeface="Calibri" pitchFamily="34" charset="0"/>
+                <a:ea typeface="Calibri" pitchFamily="34" charset="-122"/>
+                <a:cs typeface="Calibri" pitchFamily="34" charset="-120"/>
+              </a:rPr>
+              <a:t>couches testées</a:t>
+            </a:r>
+            <a:endParaRPr lang="en-US" sz="1400" dirty="0"/>
+          </a:p>
+        </p:txBody>
+      </p:sp>
+      <p:sp>
+        <p:nvSpPr>
+          <p:cNvPr id="13" name="Shape 11"/>
+          <p:cNvSpPr/>
+          <p:nvPr/>
+        </p:nvSpPr>
+        <p:spPr>
+          <a:xfrm>
+            <a:off x="640080" y="3749040"/>
+            <a:ext cx="10881360" cy="2103120"/>
+          </a:xfrm>
+          <a:prstGeom prst="roundRect">
+            <a:avLst>
+              <a:gd name="adj" fmla="val 3478"/>
+            </a:avLst>
+          </a:prstGeom>
+          <a:solidFill>
+            <a:srgbClr val="EAF1F6"/>
+          </a:solidFill>
+          <a:ln w="12700">
+            <a:solidFill>
+              <a:srgbClr val="DCE6EE"/>
+            </a:solidFill>
+            <a:prstDash val="solid"/>
+          </a:ln>
+          <a:effectLst>
+            <a:outerShdw sx="100000" sy="100000" kx="0" ky="0" algn="bl" rotWithShape="0" blurRad="76200" dist="25400" dir="5400000">
+              <a:srgbClr val="B9C6D2">
+                <a:alpha val="30000"/>
+              </a:srgbClr>
+            </a:outerShdw>
+          </a:effectLst>
+        </p:spPr>
+      </p:sp>
+      <p:sp>
+        <p:nvSpPr>
+          <p:cNvPr id="14" name="Text 12"/>
+          <p:cNvSpPr/>
+          <p:nvPr/>
+        </p:nvSpPr>
+        <p:spPr>
+          <a:xfrm>
+            <a:off x="914400" y="3931920"/>
+            <a:ext cx="10332720" cy="365760"/>
+          </a:xfrm>
+          <a:prstGeom prst="rect">
+            <a:avLst/>
+          </a:prstGeom>
+          <a:noFill/>
+          <a:ln/>
+        </p:spPr>
+        <p:txBody>
+          <a:bodyPr wrap="square" rtlCol="0" anchor="ctr"/>
+          <a:lstStyle/>
+          <a:p>
+            <a:pPr indent="0" marL="0">
+              <a:buNone/>
+            </a:pPr>
+            <a:r>
+              <a:rPr lang="en-US" sz="1600" b="1" dirty="0">
+                <a:solidFill>
+                  <a:srgbClr val="0B5394"/>
+                </a:solidFill>
+                <a:latin typeface="Cambria" pitchFamily="34" charset="0"/>
+                <a:ea typeface="Cambria" pitchFamily="34" charset="-122"/>
+                <a:cs typeface="Cambria" pitchFamily="34" charset="-120"/>
+              </a:rPr>
+              <a:t>Stratégie de test</a:t>
             </a:r>
             <a:endParaRPr lang="en-US" sz="1600" dirty="0"/>
           </a:p>
@@ -4481,14 +5913,14 @@
       </p:sp>
       <p:sp>
         <p:nvSpPr>
-          <p:cNvPr id="12" name="Text 10"/>
-          <p:cNvSpPr/>
-          <p:nvPr/>
-        </p:nvSpPr>
-        <p:spPr>
-          <a:xfrm>
-            <a:off x="8275320" y="2240280"/>
-            <a:ext cx="3017520" cy="3291840"/>
+          <p:cNvPr id="15" name="Text 13"/>
+          <p:cNvSpPr/>
+          <p:nvPr/>
+        </p:nvSpPr>
+        <p:spPr>
+          <a:xfrm>
+            <a:off x="914400" y="4343400"/>
+            <a:ext cx="10332720" cy="1371600"/>
           </a:xfrm>
           <a:prstGeom prst="rect">
             <a:avLst/>
@@ -4502,102 +5934,109 @@
           <a:p>
             <a:pPr indent="0" marL="0">
               <a:lnSpc>
-                <a:spcPct val="140000"/>
+                <a:spcPct val="125000"/>
               </a:lnSpc>
               <a:buNone/>
             </a:pPr>
             <a:r>
-              <a:rPr lang="en-US" sz="1300" dirty="0">
-                <a:solidFill>
-                  <a:srgbClr val="FFFFFF"/>
-                </a:solidFill>
-                <a:latin typeface="Calibri" pitchFamily="34" charset="0"/>
-                <a:ea typeface="Calibri" pitchFamily="34" charset="-122"/>
-                <a:cs typeface="Calibri" pitchFamily="34" charset="-120"/>
-              </a:rPr>
-              <a:t>• Notifications e-mail</a:t>
-            </a:r>
-            <a:endParaRPr lang="en-US" sz="1300" dirty="0"/>
-          </a:p>
-          <a:p>
+              <a:rPr lang="en-US" sz="1400" b="1" dirty="0">
+                <a:solidFill>
+                  <a:srgbClr val="1C7293"/>
+                </a:solidFill>
+                <a:latin typeface="Calibri" pitchFamily="34" charset="0"/>
+                <a:ea typeface="Calibri" pitchFamily="34" charset="-122"/>
+                <a:cs typeface="Calibri" pitchFamily="34" charset="-120"/>
+              </a:rPr>
+              <a:t>Unitaires  </a:t>
+            </a:r>
             <a:pPr indent="0" marL="0">
               <a:lnSpc>
-                <a:spcPct val="140000"/>
+                <a:spcPct val="125000"/>
               </a:lnSpc>
               <a:buNone/>
             </a:pPr>
             <a:r>
-              <a:rPr lang="en-US" sz="1300" dirty="0">
-                <a:solidFill>
-                  <a:srgbClr val="FFFFFF"/>
-                </a:solidFill>
-                <a:latin typeface="Calibri" pitchFamily="34" charset="0"/>
-                <a:ea typeface="Calibri" pitchFamily="34" charset="-122"/>
-                <a:cs typeface="Calibri" pitchFamily="34" charset="-120"/>
-              </a:rPr>
-              <a:t>• Calendrier d'équipe</a:t>
-            </a:r>
-            <a:endParaRPr lang="en-US" sz="1300" dirty="0"/>
-          </a:p>
-          <a:p>
+              <a:rPr lang="en-US" sz="1400" dirty="0">
+                <a:solidFill>
+                  <a:srgbClr val="1B2A3A"/>
+                </a:solidFill>
+                <a:latin typeface="Calibri" pitchFamily="34" charset="0"/>
+                <a:ea typeface="Calibri" pitchFamily="34" charset="-122"/>
+                <a:cs typeface="Calibri" pitchFamily="34" charset="-120"/>
+              </a:rPr>
+              <a:t>logique métier (jours ouvrés, soldes, machine à états) — pytest
+</a:t>
+            </a:r>
             <a:pPr indent="0" marL="0">
               <a:lnSpc>
-                <a:spcPct val="140000"/>
+                <a:spcPct val="125000"/>
               </a:lnSpc>
               <a:buNone/>
             </a:pPr>
             <a:r>
-              <a:rPr lang="en-US" sz="1300" dirty="0">
-                <a:solidFill>
-                  <a:srgbClr val="FFFFFF"/>
-                </a:solidFill>
-                <a:latin typeface="Calibri" pitchFamily="34" charset="0"/>
-                <a:ea typeface="Calibri" pitchFamily="34" charset="-122"/>
-                <a:cs typeface="Calibri" pitchFamily="34" charset="-120"/>
-              </a:rPr>
-              <a:t>• Jours fériés</a:t>
-            </a:r>
-            <a:endParaRPr lang="en-US" sz="1300" dirty="0"/>
-          </a:p>
-          <a:p>
+              <a:rPr lang="en-US" sz="1400" b="1" dirty="0">
+                <a:solidFill>
+                  <a:srgbClr val="1C7293"/>
+                </a:solidFill>
+                <a:latin typeface="Calibri" pitchFamily="34" charset="0"/>
+                <a:ea typeface="Calibri" pitchFamily="34" charset="-122"/>
+                <a:cs typeface="Calibri" pitchFamily="34" charset="-120"/>
+              </a:rPr>
+              <a:t>Intégration  </a:t>
+            </a:r>
             <a:pPr indent="0" marL="0">
               <a:lnSpc>
-                <a:spcPct val="140000"/>
+                <a:spcPct val="125000"/>
               </a:lnSpc>
               <a:buNone/>
             </a:pPr>
             <a:r>
-              <a:rPr lang="en-US" sz="1300" dirty="0">
-                <a:solidFill>
-                  <a:srgbClr val="FFFFFF"/>
-                </a:solidFill>
-                <a:latin typeface="Calibri" pitchFamily="34" charset="0"/>
-                <a:ea typeface="Calibri" pitchFamily="34" charset="-122"/>
-                <a:cs typeface="Calibri" pitchFamily="34" charset="-120"/>
-              </a:rPr>
-              <a:t>• Export comptable</a:t>
-            </a:r>
-            <a:endParaRPr lang="en-US" sz="1300" dirty="0"/>
-          </a:p>
-          <a:p>
+              <a:rPr lang="en-US" sz="1400" dirty="0">
+                <a:solidFill>
+                  <a:srgbClr val="1B2A3A"/>
+                </a:solidFill>
+                <a:latin typeface="Calibri" pitchFamily="34" charset="0"/>
+                <a:ea typeface="Calibri" pitchFamily="34" charset="-122"/>
+                <a:cs typeface="Calibri" pitchFamily="34" charset="-120"/>
+              </a:rPr>
+              <a:t>parcours API complets : login, création, RBAC, transitions interdites — httpx
+</a:t>
+            </a:r>
             <a:pPr indent="0" marL="0">
               <a:lnSpc>
-                <a:spcPct val="140000"/>
+                <a:spcPct val="125000"/>
               </a:lnSpc>
               <a:buNone/>
             </a:pPr>
             <a:r>
-              <a:rPr lang="en-US" sz="1300" dirty="0">
-                <a:solidFill>
-                  <a:srgbClr val="FFFFFF"/>
-                </a:solidFill>
-                <a:latin typeface="Calibri" pitchFamily="34" charset="0"/>
-                <a:ea typeface="Calibri" pitchFamily="34" charset="-122"/>
-                <a:cs typeface="Calibri" pitchFamily="34" charset="-120"/>
-              </a:rPr>
-              <a:t>• Application mobile</a:t>
-            </a:r>
-            <a:endParaRPr lang="en-US" sz="1300" dirty="0"/>
+              <a:rPr lang="en-US" sz="1400" b="1" dirty="0">
+                <a:solidFill>
+                  <a:srgbClr val="1C7293"/>
+                </a:solidFill>
+                <a:latin typeface="Calibri" pitchFamily="34" charset="0"/>
+                <a:ea typeface="Calibri" pitchFamily="34" charset="-122"/>
+                <a:cs typeface="Calibri" pitchFamily="34" charset="-120"/>
+              </a:rPr>
+              <a:t>Front  </a:t>
+            </a:r>
+            <a:pPr indent="0" marL="0">
+              <a:lnSpc>
+                <a:spcPct val="125000"/>
+              </a:lnSpc>
+              <a:buNone/>
+            </a:pPr>
+            <a:r>
+              <a:rPr lang="en-US" sz="1400" dirty="0">
+                <a:solidFill>
+                  <a:srgbClr val="1B2A3A"/>
+                </a:solidFill>
+                <a:latin typeface="Calibri" pitchFamily="34" charset="0"/>
+                <a:ea typeface="Calibri" pitchFamily="34" charset="-122"/>
+                <a:cs typeface="Calibri" pitchFamily="34" charset="-120"/>
+              </a:rPr>
+              <a:t>fonctions d'affichage — Vitest    ·    CI GitHub Actions à chaque push</a:t>
+            </a:r>
+            <a:endParaRPr lang="en-US" sz="1400" dirty="0"/>
           </a:p>
         </p:txBody>
       </p:sp>
@@ -4609,9 +6048,1282 @@
 </p:sld>
 </file>
 
-<file path=ppt/slides/slide14.xml><?xml version="1.0" encoding="utf-8"?>
+<file path=ppt/slides/slide17.xml><?xml version="1.0" encoding="utf-8"?>
 <p:sld xmlns:a="http://schemas.openxmlformats.org/drawingml/2006/main" xmlns:r="http://schemas.openxmlformats.org/officeDocument/2006/relationships" xmlns:p="http://schemas.openxmlformats.org/presentationml/2006/main">
-  <p:cSld name="Slide 14">
+  <p:cSld name="Slide 17">
+    <p:bg>
+      <p:bgPr>
+        <a:solidFill>
+          <a:srgbClr val="FFFFFF"/>
+        </a:solidFill>
+      </p:bgPr>
+    </p:bg>
+    <p:spTree>
+      <p:nvGrpSpPr>
+        <p:cNvPr id="1" name=""/>
+        <p:cNvGrpSpPr/>
+        <p:nvPr/>
+      </p:nvGrpSpPr>
+      <p:grpSpPr>
+        <a:xfrm>
+          <a:off x="0" y="0"/>
+          <a:ext cx="0" cy="0"/>
+          <a:chOff x="0" y="0"/>
+          <a:chExt cx="0" cy="0"/>
+        </a:xfrm>
+      </p:grpSpPr>
+      <p:sp>
+        <p:nvSpPr>
+          <p:cNvPr id="2" name="Text 0"/>
+          <p:cNvSpPr/>
+          <p:nvPr/>
+        </p:nvSpPr>
+        <p:spPr>
+          <a:xfrm>
+            <a:off x="640080" y="411480"/>
+            <a:ext cx="10972800" cy="274320"/>
+          </a:xfrm>
+          <a:prstGeom prst="rect">
+            <a:avLst/>
+          </a:prstGeom>
+          <a:noFill/>
+          <a:ln/>
+        </p:spPr>
+        <p:txBody>
+          <a:bodyPr wrap="square" rtlCol="0" anchor="ctr"/>
+          <a:lstStyle/>
+          <a:p>
+            <a:pPr indent="0" marL="0">
+              <a:buNone/>
+            </a:pPr>
+            <a:r>
+              <a:rPr lang="en-US" sz="1200" b="1" spc="200" kern="0" dirty="0">
+                <a:solidFill>
+                  <a:srgbClr val="13A89E"/>
+                </a:solidFill>
+                <a:latin typeface="Calibri" pitchFamily="34" charset="0"/>
+                <a:ea typeface="Calibri" pitchFamily="34" charset="-122"/>
+                <a:cs typeface="Calibri" pitchFamily="34" charset="-120"/>
+              </a:rPr>
+              <a:t>10 · RÉFÉRENTIEL</a:t>
+            </a:r>
+            <a:endParaRPr lang="en-US" sz="1200" dirty="0"/>
+          </a:p>
+        </p:txBody>
+      </p:sp>
+      <p:sp>
+        <p:nvSpPr>
+          <p:cNvPr id="3" name="Text 1"/>
+          <p:cNvSpPr/>
+          <p:nvPr/>
+        </p:nvSpPr>
+        <p:spPr>
+          <a:xfrm>
+            <a:off x="640080" y="658368"/>
+            <a:ext cx="10972800" cy="640080"/>
+          </a:xfrm>
+          <a:prstGeom prst="rect">
+            <a:avLst/>
+          </a:prstGeom>
+          <a:noFill/>
+          <a:ln/>
+        </p:spPr>
+        <p:txBody>
+          <a:bodyPr wrap="square" rtlCol="0" anchor="ctr"/>
+          <a:lstStyle/>
+          <a:p>
+            <a:pPr indent="0" marL="0">
+              <a:buNone/>
+            </a:pPr>
+            <a:r>
+              <a:rPr lang="en-US" sz="3000" b="1" dirty="0">
+                <a:solidFill>
+                  <a:srgbClr val="0A1A2F"/>
+                </a:solidFill>
+                <a:latin typeface="Cambria" pitchFamily="34" charset="0"/>
+                <a:ea typeface="Cambria" pitchFamily="34" charset="-122"/>
+                <a:cs typeface="Cambria" pitchFamily="34" charset="-120"/>
+              </a:rPr>
+              <a:t>Couverture des 3 blocs de compétences</a:t>
+            </a:r>
+            <a:endParaRPr lang="en-US" sz="3000" dirty="0"/>
+          </a:p>
+        </p:txBody>
+      </p:sp>
+      <p:sp>
+        <p:nvSpPr>
+          <p:cNvPr id="4" name="Shape 2"/>
+          <p:cNvSpPr/>
+          <p:nvPr/>
+        </p:nvSpPr>
+        <p:spPr>
+          <a:xfrm>
+            <a:off x="640080" y="1645920"/>
+            <a:ext cx="3429000" cy="4023360"/>
+          </a:xfrm>
+          <a:prstGeom prst="roundRect">
+            <a:avLst>
+              <a:gd name="adj" fmla="val 2133"/>
+            </a:avLst>
+          </a:prstGeom>
+          <a:solidFill>
+            <a:srgbClr val="EAF1F6"/>
+          </a:solidFill>
+          <a:ln w="12700">
+            <a:solidFill>
+              <a:srgbClr val="DCE6EE"/>
+            </a:solidFill>
+            <a:prstDash val="solid"/>
+          </a:ln>
+          <a:effectLst>
+            <a:outerShdw sx="100000" sy="100000" kx="0" ky="0" algn="bl" rotWithShape="0" blurRad="76200" dist="25400" dir="5400000">
+              <a:srgbClr val="B9C6D2">
+                <a:alpha val="30000"/>
+              </a:srgbClr>
+            </a:outerShdw>
+          </a:effectLst>
+        </p:spPr>
+      </p:sp>
+      <p:sp>
+        <p:nvSpPr>
+          <p:cNvPr id="5" name="Shape 3"/>
+          <p:cNvSpPr/>
+          <p:nvPr/>
+        </p:nvSpPr>
+        <p:spPr>
+          <a:xfrm>
+            <a:off x="640080" y="1645920"/>
+            <a:ext cx="3429000" cy="822960"/>
+          </a:xfrm>
+          <a:prstGeom prst="roundRect">
+            <a:avLst>
+              <a:gd name="adj" fmla="val 6667"/>
+            </a:avLst>
+          </a:prstGeom>
+          <a:solidFill>
+            <a:srgbClr val="0B5394"/>
+          </a:solidFill>
+          <a:ln/>
+        </p:spPr>
+      </p:sp>
+      <p:sp>
+        <p:nvSpPr>
+          <p:cNvPr id="6" name="Text 4"/>
+          <p:cNvSpPr/>
+          <p:nvPr/>
+        </p:nvSpPr>
+        <p:spPr>
+          <a:xfrm>
+            <a:off x="640080" y="1737360"/>
+            <a:ext cx="3429000" cy="640080"/>
+          </a:xfrm>
+          <a:prstGeom prst="rect">
+            <a:avLst/>
+          </a:prstGeom>
+          <a:noFill/>
+          <a:ln/>
+        </p:spPr>
+        <p:txBody>
+          <a:bodyPr wrap="square" rtlCol="0" anchor="ctr"/>
+          <a:lstStyle/>
+          <a:p>
+            <a:pPr algn="ctr" indent="0" marL="0">
+              <a:buNone/>
+            </a:pPr>
+            <a:r>
+              <a:rPr lang="en-US" sz="2200" b="1" dirty="0">
+                <a:solidFill>
+                  <a:srgbClr val="FFFFFF"/>
+                </a:solidFill>
+                <a:latin typeface="Cambria" pitchFamily="34" charset="0"/>
+                <a:ea typeface="Cambria" pitchFamily="34" charset="-122"/>
+                <a:cs typeface="Cambria" pitchFamily="34" charset="-120"/>
+              </a:rPr>
+              <a:t>Bloc 1</a:t>
+            </a:r>
+            <a:endParaRPr lang="en-US" sz="2200" dirty="0"/>
+          </a:p>
+        </p:txBody>
+      </p:sp>
+      <p:sp>
+        <p:nvSpPr>
+          <p:cNvPr id="7" name="Text 5"/>
+          <p:cNvSpPr/>
+          <p:nvPr/>
+        </p:nvSpPr>
+        <p:spPr>
+          <a:xfrm>
+            <a:off x="822960" y="2697480"/>
+            <a:ext cx="3063240" cy="640080"/>
+          </a:xfrm>
+          <a:prstGeom prst="rect">
+            <a:avLst/>
+          </a:prstGeom>
+          <a:noFill/>
+          <a:ln/>
+        </p:spPr>
+        <p:txBody>
+          <a:bodyPr wrap="square" rtlCol="0" anchor="ctr"/>
+          <a:lstStyle/>
+          <a:p>
+            <a:pPr algn="ctr" indent="0" marL="0">
+              <a:buNone/>
+            </a:pPr>
+            <a:r>
+              <a:rPr lang="en-US" sz="1500" b="1" dirty="0">
+                <a:solidFill>
+                  <a:srgbClr val="0A1A2F"/>
+                </a:solidFill>
+                <a:latin typeface="Calibri" pitchFamily="34" charset="0"/>
+                <a:ea typeface="Calibri" pitchFamily="34" charset="-122"/>
+                <a:cs typeface="Calibri" pitchFamily="34" charset="-120"/>
+              </a:rPr>
+              <a:t>Front-end sécurisé</a:t>
+            </a:r>
+            <a:endParaRPr lang="en-US" sz="1500" dirty="0"/>
+          </a:p>
+        </p:txBody>
+      </p:sp>
+      <p:sp>
+        <p:nvSpPr>
+          <p:cNvPr id="8" name="Text 6"/>
+          <p:cNvSpPr/>
+          <p:nvPr/>
+        </p:nvSpPr>
+        <p:spPr>
+          <a:xfrm>
+            <a:off x="868680" y="3383280"/>
+            <a:ext cx="2971800" cy="2103120"/>
+          </a:xfrm>
+          <a:prstGeom prst="rect">
+            <a:avLst/>
+          </a:prstGeom>
+          <a:noFill/>
+          <a:ln/>
+        </p:spPr>
+        <p:txBody>
+          <a:bodyPr wrap="square" rtlCol="0" anchor="t"/>
+          <a:lstStyle/>
+          <a:p>
+            <a:pPr indent="0" marL="0">
+              <a:lnSpc>
+                <a:spcPct val="120000"/>
+              </a:lnSpc>
+              <a:buNone/>
+            </a:pPr>
+            <a:r>
+              <a:rPr lang="en-US" sz="1300" dirty="0">
+                <a:solidFill>
+                  <a:srgbClr val="1B2A3A"/>
+                </a:solidFill>
+                <a:latin typeface="Calibri" pitchFamily="34" charset="0"/>
+                <a:ea typeface="Calibri" pitchFamily="34" charset="-122"/>
+                <a:cs typeface="Calibri" pitchFamily="34" charset="-120"/>
+              </a:rPr>
+              <a:t>React/TS · maquettes Figma · routes par rôle · consommation API</a:t>
+            </a:r>
+            <a:endParaRPr lang="en-US" sz="1300" dirty="0"/>
+          </a:p>
+        </p:txBody>
+      </p:sp>
+      <p:sp>
+        <p:nvSpPr>
+          <p:cNvPr id="9" name="Shape 7"/>
+          <p:cNvSpPr/>
+          <p:nvPr/>
+        </p:nvSpPr>
+        <p:spPr>
+          <a:xfrm>
+            <a:off x="4343400" y="1645920"/>
+            <a:ext cx="3429000" cy="4023360"/>
+          </a:xfrm>
+          <a:prstGeom prst="roundRect">
+            <a:avLst>
+              <a:gd name="adj" fmla="val 2133"/>
+            </a:avLst>
+          </a:prstGeom>
+          <a:solidFill>
+            <a:srgbClr val="EAF1F6"/>
+          </a:solidFill>
+          <a:ln w="12700">
+            <a:solidFill>
+              <a:srgbClr val="DCE6EE"/>
+            </a:solidFill>
+            <a:prstDash val="solid"/>
+          </a:ln>
+          <a:effectLst>
+            <a:outerShdw sx="100000" sy="100000" kx="0" ky="0" algn="bl" rotWithShape="0" blurRad="76200" dist="25400" dir="5400000">
+              <a:srgbClr val="B9C6D2">
+                <a:alpha val="30000"/>
+              </a:srgbClr>
+            </a:outerShdw>
+          </a:effectLst>
+        </p:spPr>
+      </p:sp>
+      <p:sp>
+        <p:nvSpPr>
+          <p:cNvPr id="10" name="Shape 8"/>
+          <p:cNvSpPr/>
+          <p:nvPr/>
+        </p:nvSpPr>
+        <p:spPr>
+          <a:xfrm>
+            <a:off x="4343400" y="1645920"/>
+            <a:ext cx="3429000" cy="822960"/>
+          </a:xfrm>
+          <a:prstGeom prst="roundRect">
+            <a:avLst>
+              <a:gd name="adj" fmla="val 6667"/>
+            </a:avLst>
+          </a:prstGeom>
+          <a:solidFill>
+            <a:srgbClr val="1C7293"/>
+          </a:solidFill>
+          <a:ln/>
+        </p:spPr>
+      </p:sp>
+      <p:sp>
+        <p:nvSpPr>
+          <p:cNvPr id="11" name="Text 9"/>
+          <p:cNvSpPr/>
+          <p:nvPr/>
+        </p:nvSpPr>
+        <p:spPr>
+          <a:xfrm>
+            <a:off x="4343400" y="1737360"/>
+            <a:ext cx="3429000" cy="640080"/>
+          </a:xfrm>
+          <a:prstGeom prst="rect">
+            <a:avLst/>
+          </a:prstGeom>
+          <a:noFill/>
+          <a:ln/>
+        </p:spPr>
+        <p:txBody>
+          <a:bodyPr wrap="square" rtlCol="0" anchor="ctr"/>
+          <a:lstStyle/>
+          <a:p>
+            <a:pPr algn="ctr" indent="0" marL="0">
+              <a:buNone/>
+            </a:pPr>
+            <a:r>
+              <a:rPr lang="en-US" sz="2200" b="1" dirty="0">
+                <a:solidFill>
+                  <a:srgbClr val="FFFFFF"/>
+                </a:solidFill>
+                <a:latin typeface="Cambria" pitchFamily="34" charset="0"/>
+                <a:ea typeface="Cambria" pitchFamily="34" charset="-122"/>
+                <a:cs typeface="Cambria" pitchFamily="34" charset="-120"/>
+              </a:rPr>
+              <a:t>Bloc 2</a:t>
+            </a:r>
+            <a:endParaRPr lang="en-US" sz="2200" dirty="0"/>
+          </a:p>
+        </p:txBody>
+      </p:sp>
+      <p:sp>
+        <p:nvSpPr>
+          <p:cNvPr id="12" name="Text 10"/>
+          <p:cNvSpPr/>
+          <p:nvPr/>
+        </p:nvSpPr>
+        <p:spPr>
+          <a:xfrm>
+            <a:off x="4526280" y="2697480"/>
+            <a:ext cx="3063240" cy="640080"/>
+          </a:xfrm>
+          <a:prstGeom prst="rect">
+            <a:avLst/>
+          </a:prstGeom>
+          <a:noFill/>
+          <a:ln/>
+        </p:spPr>
+        <p:txBody>
+          <a:bodyPr wrap="square" rtlCol="0" anchor="ctr"/>
+          <a:lstStyle/>
+          <a:p>
+            <a:pPr algn="ctr" indent="0" marL="0">
+              <a:buNone/>
+            </a:pPr>
+            <a:r>
+              <a:rPr lang="en-US" sz="1500" b="1" dirty="0">
+                <a:solidFill>
+                  <a:srgbClr val="0A1A2F"/>
+                </a:solidFill>
+                <a:latin typeface="Calibri" pitchFamily="34" charset="0"/>
+                <a:ea typeface="Calibri" pitchFamily="34" charset="-122"/>
+                <a:cs typeface="Calibri" pitchFamily="34" charset="-120"/>
+              </a:rPr>
+              <a:t>Back-end sécurisé</a:t>
+            </a:r>
+            <a:endParaRPr lang="en-US" sz="1500" dirty="0"/>
+          </a:p>
+        </p:txBody>
+      </p:sp>
+      <p:sp>
+        <p:nvSpPr>
+          <p:cNvPr id="13" name="Text 11"/>
+          <p:cNvSpPr/>
+          <p:nvPr/>
+        </p:nvSpPr>
+        <p:spPr>
+          <a:xfrm>
+            <a:off x="4572000" y="3383280"/>
+            <a:ext cx="2971800" cy="2103120"/>
+          </a:xfrm>
+          <a:prstGeom prst="rect">
+            <a:avLst/>
+          </a:prstGeom>
+          <a:noFill/>
+          <a:ln/>
+        </p:spPr>
+        <p:txBody>
+          <a:bodyPr wrap="square" rtlCol="0" anchor="t"/>
+          <a:lstStyle/>
+          <a:p>
+            <a:pPr indent="0" marL="0">
+              <a:lnSpc>
+                <a:spcPct val="120000"/>
+              </a:lnSpc>
+              <a:buNone/>
+            </a:pPr>
+            <a:r>
+              <a:rPr lang="en-US" sz="1300" dirty="0">
+                <a:solidFill>
+                  <a:srgbClr val="1B2A3A"/>
+                </a:solidFill>
+                <a:latin typeface="Calibri" pitchFamily="34" charset="0"/>
+                <a:ea typeface="Calibri" pitchFamily="34" charset="-122"/>
+                <a:cs typeface="Calibri" pitchFamily="34" charset="-120"/>
+              </a:rPr>
+              <a:t>API FastAPI · PostgreSQL · JWT/RBAC · bcrypt · OWASP</a:t>
+            </a:r>
+            <a:endParaRPr lang="en-US" sz="1300" dirty="0"/>
+          </a:p>
+        </p:txBody>
+      </p:sp>
+      <p:sp>
+        <p:nvSpPr>
+          <p:cNvPr id="14" name="Shape 12"/>
+          <p:cNvSpPr/>
+          <p:nvPr/>
+        </p:nvSpPr>
+        <p:spPr>
+          <a:xfrm>
+            <a:off x="8046720" y="1645920"/>
+            <a:ext cx="3429000" cy="4023360"/>
+          </a:xfrm>
+          <a:prstGeom prst="roundRect">
+            <a:avLst>
+              <a:gd name="adj" fmla="val 2133"/>
+            </a:avLst>
+          </a:prstGeom>
+          <a:solidFill>
+            <a:srgbClr val="EAF1F6"/>
+          </a:solidFill>
+          <a:ln w="12700">
+            <a:solidFill>
+              <a:srgbClr val="DCE6EE"/>
+            </a:solidFill>
+            <a:prstDash val="solid"/>
+          </a:ln>
+          <a:effectLst>
+            <a:outerShdw sx="100000" sy="100000" kx="0" ky="0" algn="bl" rotWithShape="0" blurRad="76200" dist="25400" dir="5400000">
+              <a:srgbClr val="B9C6D2">
+                <a:alpha val="30000"/>
+              </a:srgbClr>
+            </a:outerShdw>
+          </a:effectLst>
+        </p:spPr>
+      </p:sp>
+      <p:sp>
+        <p:nvSpPr>
+          <p:cNvPr id="15" name="Shape 13"/>
+          <p:cNvSpPr/>
+          <p:nvPr/>
+        </p:nvSpPr>
+        <p:spPr>
+          <a:xfrm>
+            <a:off x="8046720" y="1645920"/>
+            <a:ext cx="3429000" cy="822960"/>
+          </a:xfrm>
+          <a:prstGeom prst="roundRect">
+            <a:avLst>
+              <a:gd name="adj" fmla="val 6667"/>
+            </a:avLst>
+          </a:prstGeom>
+          <a:solidFill>
+            <a:srgbClr val="13A89E"/>
+          </a:solidFill>
+          <a:ln/>
+        </p:spPr>
+      </p:sp>
+      <p:sp>
+        <p:nvSpPr>
+          <p:cNvPr id="16" name="Text 14"/>
+          <p:cNvSpPr/>
+          <p:nvPr/>
+        </p:nvSpPr>
+        <p:spPr>
+          <a:xfrm>
+            <a:off x="8046720" y="1737360"/>
+            <a:ext cx="3429000" cy="640080"/>
+          </a:xfrm>
+          <a:prstGeom prst="rect">
+            <a:avLst/>
+          </a:prstGeom>
+          <a:noFill/>
+          <a:ln/>
+        </p:spPr>
+        <p:txBody>
+          <a:bodyPr wrap="square" rtlCol="0" anchor="ctr"/>
+          <a:lstStyle/>
+          <a:p>
+            <a:pPr algn="ctr" indent="0" marL="0">
+              <a:buNone/>
+            </a:pPr>
+            <a:r>
+              <a:rPr lang="en-US" sz="2200" b="1" dirty="0">
+                <a:solidFill>
+                  <a:srgbClr val="FFFFFF"/>
+                </a:solidFill>
+                <a:latin typeface="Cambria" pitchFamily="34" charset="0"/>
+                <a:ea typeface="Cambria" pitchFamily="34" charset="-122"/>
+                <a:cs typeface="Cambria" pitchFamily="34" charset="-120"/>
+              </a:rPr>
+              <a:t>Bloc 3</a:t>
+            </a:r>
+            <a:endParaRPr lang="en-US" sz="2200" dirty="0"/>
+          </a:p>
+        </p:txBody>
+      </p:sp>
+      <p:sp>
+        <p:nvSpPr>
+          <p:cNvPr id="17" name="Text 15"/>
+          <p:cNvSpPr/>
+          <p:nvPr/>
+        </p:nvSpPr>
+        <p:spPr>
+          <a:xfrm>
+            <a:off x="8229600" y="2697480"/>
+            <a:ext cx="3063240" cy="640080"/>
+          </a:xfrm>
+          <a:prstGeom prst="rect">
+            <a:avLst/>
+          </a:prstGeom>
+          <a:noFill/>
+          <a:ln/>
+        </p:spPr>
+        <p:txBody>
+          <a:bodyPr wrap="square" rtlCol="0" anchor="ctr"/>
+          <a:lstStyle/>
+          <a:p>
+            <a:pPr algn="ctr" indent="0" marL="0">
+              <a:buNone/>
+            </a:pPr>
+            <a:r>
+              <a:rPr lang="en-US" sz="1500" b="1" dirty="0">
+                <a:solidFill>
+                  <a:srgbClr val="0A1A2F"/>
+                </a:solidFill>
+                <a:latin typeface="Calibri" pitchFamily="34" charset="0"/>
+                <a:ea typeface="Calibri" pitchFamily="34" charset="-122"/>
+                <a:cs typeface="Calibri" pitchFamily="34" charset="-120"/>
+              </a:rPr>
+              <a:t>Conception &amp; organisation</a:t>
+            </a:r>
+            <a:endParaRPr lang="en-US" sz="1500" dirty="0"/>
+          </a:p>
+        </p:txBody>
+      </p:sp>
+      <p:sp>
+        <p:nvSpPr>
+          <p:cNvPr id="18" name="Text 16"/>
+          <p:cNvSpPr/>
+          <p:nvPr/>
+        </p:nvSpPr>
+        <p:spPr>
+          <a:xfrm>
+            <a:off x="8275320" y="3383280"/>
+            <a:ext cx="2971800" cy="2103120"/>
+          </a:xfrm>
+          <a:prstGeom prst="rect">
+            <a:avLst/>
+          </a:prstGeom>
+          <a:noFill/>
+          <a:ln/>
+        </p:spPr>
+        <p:txBody>
+          <a:bodyPr wrap="square" rtlCol="0" anchor="t"/>
+          <a:lstStyle/>
+          <a:p>
+            <a:pPr indent="0" marL="0">
+              <a:lnSpc>
+                <a:spcPct val="120000"/>
+              </a:lnSpc>
+              <a:buNone/>
+            </a:pPr>
+            <a:r>
+              <a:rPr lang="en-US" sz="1300" dirty="0">
+                <a:solidFill>
+                  <a:srgbClr val="1B2A3A"/>
+                </a:solidFill>
+                <a:latin typeface="Calibri" pitchFamily="34" charset="0"/>
+                <a:ea typeface="Calibri" pitchFamily="34" charset="-122"/>
+                <a:cs typeface="Calibri" pitchFamily="34" charset="-120"/>
+              </a:rPr>
+              <a:t>UML · agile/MoSCoW · tests · Docker · CI/CD · Git</a:t>
+            </a:r>
+            <a:endParaRPr lang="en-US" sz="1300" dirty="0"/>
+          </a:p>
+        </p:txBody>
+      </p:sp>
+    </p:spTree>
+  </p:cSld>
+  <p:clrMapOvr>
+    <a:masterClrMapping/>
+  </p:clrMapOvr>
+</p:sld>
+</file>
+
+<file path=ppt/slides/slide18.xml><?xml version="1.0" encoding="utf-8"?>
+<p:sld xmlns:a="http://schemas.openxmlformats.org/drawingml/2006/main" xmlns:r="http://schemas.openxmlformats.org/officeDocument/2006/relationships" xmlns:p="http://schemas.openxmlformats.org/presentationml/2006/main">
+  <p:cSld name="Slide 18">
+    <p:bg>
+      <p:bgPr>
+        <a:solidFill>
+          <a:srgbClr val="FFFFFF"/>
+        </a:solidFill>
+      </p:bgPr>
+    </p:bg>
+    <p:spTree>
+      <p:nvGrpSpPr>
+        <p:cNvPr id="1" name=""/>
+        <p:cNvGrpSpPr/>
+        <p:nvPr/>
+      </p:nvGrpSpPr>
+      <p:grpSpPr>
+        <a:xfrm>
+          <a:off x="0" y="0"/>
+          <a:ext cx="0" cy="0"/>
+          <a:chOff x="0" y="0"/>
+          <a:chExt cx="0" cy="0"/>
+        </a:xfrm>
+      </p:grpSpPr>
+      <p:sp>
+        <p:nvSpPr>
+          <p:cNvPr id="2" name="Text 0"/>
+          <p:cNvSpPr/>
+          <p:nvPr/>
+        </p:nvSpPr>
+        <p:spPr>
+          <a:xfrm>
+            <a:off x="640080" y="411480"/>
+            <a:ext cx="10972800" cy="274320"/>
+          </a:xfrm>
+          <a:prstGeom prst="rect">
+            <a:avLst/>
+          </a:prstGeom>
+          <a:noFill/>
+          <a:ln/>
+        </p:spPr>
+        <p:txBody>
+          <a:bodyPr wrap="square" rtlCol="0" anchor="ctr"/>
+          <a:lstStyle/>
+          <a:p>
+            <a:pPr indent="0" marL="0">
+              <a:buNone/>
+            </a:pPr>
+            <a:r>
+              <a:rPr lang="en-US" sz="1200" b="1" spc="200" kern="0" dirty="0">
+                <a:solidFill>
+                  <a:srgbClr val="13A89E"/>
+                </a:solidFill>
+                <a:latin typeface="Calibri" pitchFamily="34" charset="0"/>
+                <a:ea typeface="Calibri" pitchFamily="34" charset="-122"/>
+                <a:cs typeface="Calibri" pitchFamily="34" charset="-120"/>
+              </a:rPr>
+              <a:t>BILAN</a:t>
+            </a:r>
+            <a:endParaRPr lang="en-US" sz="1200" dirty="0"/>
+          </a:p>
+        </p:txBody>
+      </p:sp>
+      <p:sp>
+        <p:nvSpPr>
+          <p:cNvPr id="3" name="Text 1"/>
+          <p:cNvSpPr/>
+          <p:nvPr/>
+        </p:nvSpPr>
+        <p:spPr>
+          <a:xfrm>
+            <a:off x="640080" y="658368"/>
+            <a:ext cx="10972800" cy="640080"/>
+          </a:xfrm>
+          <a:prstGeom prst="rect">
+            <a:avLst/>
+          </a:prstGeom>
+          <a:noFill/>
+          <a:ln/>
+        </p:spPr>
+        <p:txBody>
+          <a:bodyPr wrap="square" rtlCol="0" anchor="ctr"/>
+          <a:lstStyle/>
+          <a:p>
+            <a:pPr indent="0" marL="0">
+              <a:buNone/>
+            </a:pPr>
+            <a:r>
+              <a:rPr lang="en-US" sz="3000" b="1" dirty="0">
+                <a:solidFill>
+                  <a:srgbClr val="0A1A2F"/>
+                </a:solidFill>
+                <a:latin typeface="Cambria" pitchFamily="34" charset="0"/>
+                <a:ea typeface="Cambria" pitchFamily="34" charset="-122"/>
+                <a:cs typeface="Cambria" pitchFamily="34" charset="-120"/>
+              </a:rPr>
+              <a:t>Conclusion &amp; perspectives</a:t>
+            </a:r>
+            <a:endParaRPr lang="en-US" sz="3000" dirty="0"/>
+          </a:p>
+        </p:txBody>
+      </p:sp>
+      <p:sp>
+        <p:nvSpPr>
+          <p:cNvPr id="4" name="Shape 2"/>
+          <p:cNvSpPr/>
+          <p:nvPr/>
+        </p:nvSpPr>
+        <p:spPr>
+          <a:xfrm>
+            <a:off x="640080" y="1600200"/>
+            <a:ext cx="3520440" cy="4114800"/>
+          </a:xfrm>
+          <a:prstGeom prst="roundRect">
+            <a:avLst>
+              <a:gd name="adj" fmla="val 2078"/>
+            </a:avLst>
+          </a:prstGeom>
+          <a:solidFill>
+            <a:srgbClr val="EAF1F6"/>
+          </a:solidFill>
+          <a:ln w="12700">
+            <a:solidFill>
+              <a:srgbClr val="DCE6EE"/>
+            </a:solidFill>
+            <a:prstDash val="solid"/>
+          </a:ln>
+          <a:effectLst>
+            <a:outerShdw sx="100000" sy="100000" kx="0" ky="0" algn="bl" rotWithShape="0" blurRad="76200" dist="25400" dir="5400000">
+              <a:srgbClr val="B9C6D2">
+                <a:alpha val="30000"/>
+              </a:srgbClr>
+            </a:outerShdw>
+          </a:effectLst>
+        </p:spPr>
+      </p:sp>
+      <p:sp>
+        <p:nvSpPr>
+          <p:cNvPr id="5" name="Text 3"/>
+          <p:cNvSpPr/>
+          <p:nvPr/>
+        </p:nvSpPr>
+        <p:spPr>
+          <a:xfrm>
+            <a:off x="868680" y="1783080"/>
+            <a:ext cx="3108960" cy="365760"/>
+          </a:xfrm>
+          <a:prstGeom prst="rect">
+            <a:avLst/>
+          </a:prstGeom>
+          <a:noFill/>
+          <a:ln/>
+        </p:spPr>
+        <p:txBody>
+          <a:bodyPr wrap="square" rtlCol="0" anchor="ctr"/>
+          <a:lstStyle/>
+          <a:p>
+            <a:pPr indent="0" marL="0">
+              <a:buNone/>
+            </a:pPr>
+            <a:r>
+              <a:rPr lang="en-US" sz="1600" b="1" dirty="0">
+                <a:solidFill>
+                  <a:srgbClr val="1E7E4F"/>
+                </a:solidFill>
+                <a:latin typeface="Cambria" pitchFamily="34" charset="0"/>
+                <a:ea typeface="Cambria" pitchFamily="34" charset="-122"/>
+                <a:cs typeface="Cambria" pitchFamily="34" charset="-120"/>
+              </a:rPr>
+              <a:t>Acquis</a:t>
+            </a:r>
+            <a:endParaRPr lang="en-US" sz="1600" dirty="0"/>
+          </a:p>
+        </p:txBody>
+      </p:sp>
+      <p:sp>
+        <p:nvSpPr>
+          <p:cNvPr id="6" name="Text 4"/>
+          <p:cNvSpPr/>
+          <p:nvPr/>
+        </p:nvSpPr>
+        <p:spPr>
+          <a:xfrm>
+            <a:off x="868680" y="2240280"/>
+            <a:ext cx="3108960" cy="3291840"/>
+          </a:xfrm>
+          <a:prstGeom prst="rect">
+            <a:avLst/>
+          </a:prstGeom>
+          <a:noFill/>
+          <a:ln/>
+        </p:spPr>
+        <p:txBody>
+          <a:bodyPr wrap="square" rtlCol="0" anchor="t"/>
+          <a:lstStyle/>
+          <a:p>
+            <a:pPr indent="0" marL="0">
+              <a:lnSpc>
+                <a:spcPct val="140000"/>
+              </a:lnSpc>
+              <a:buNone/>
+            </a:pPr>
+            <a:r>
+              <a:rPr lang="en-US" sz="1300" dirty="0">
+                <a:solidFill>
+                  <a:srgbClr val="1B2A3A"/>
+                </a:solidFill>
+                <a:latin typeface="Calibri" pitchFamily="34" charset="0"/>
+                <a:ea typeface="Calibri" pitchFamily="34" charset="-122"/>
+                <a:cs typeface="Calibri" pitchFamily="34" charset="-120"/>
+              </a:rPr>
+              <a:t>• Application full-stack fonctionnelle</a:t>
+            </a:r>
+            <a:endParaRPr lang="en-US" sz="1300" dirty="0"/>
+          </a:p>
+          <a:p>
+            <a:pPr indent="0" marL="0">
+              <a:lnSpc>
+                <a:spcPct val="140000"/>
+              </a:lnSpc>
+              <a:buNone/>
+            </a:pPr>
+            <a:r>
+              <a:rPr lang="en-US" sz="1300" dirty="0">
+                <a:solidFill>
+                  <a:srgbClr val="1B2A3A"/>
+                </a:solidFill>
+                <a:latin typeface="Calibri" pitchFamily="34" charset="0"/>
+                <a:ea typeface="Calibri" pitchFamily="34" charset="-122"/>
+                <a:cs typeface="Calibri" pitchFamily="34" charset="-120"/>
+              </a:rPr>
+              <a:t>• Sécurité conforme aux standards</a:t>
+            </a:r>
+            <a:endParaRPr lang="en-US" sz="1300" dirty="0"/>
+          </a:p>
+          <a:p>
+            <a:pPr indent="0" marL="0">
+              <a:lnSpc>
+                <a:spcPct val="140000"/>
+              </a:lnSpc>
+              <a:buNone/>
+            </a:pPr>
+            <a:r>
+              <a:rPr lang="en-US" sz="1300" dirty="0">
+                <a:solidFill>
+                  <a:srgbClr val="1B2A3A"/>
+                </a:solidFill>
+                <a:latin typeface="Calibri" pitchFamily="34" charset="0"/>
+                <a:ea typeface="Calibri" pitchFamily="34" charset="-122"/>
+                <a:cs typeface="Calibri" pitchFamily="34" charset="-120"/>
+              </a:rPr>
+              <a:t>• Démarche de conception complète</a:t>
+            </a:r>
+            <a:endParaRPr lang="en-US" sz="1300" dirty="0"/>
+          </a:p>
+          <a:p>
+            <a:pPr indent="0" marL="0">
+              <a:lnSpc>
+                <a:spcPct val="140000"/>
+              </a:lnSpc>
+              <a:buNone/>
+            </a:pPr>
+            <a:r>
+              <a:rPr lang="en-US" sz="1300" dirty="0">
+                <a:solidFill>
+                  <a:srgbClr val="1B2A3A"/>
+                </a:solidFill>
+                <a:latin typeface="Calibri" pitchFamily="34" charset="0"/>
+                <a:ea typeface="Calibri" pitchFamily="34" charset="-122"/>
+                <a:cs typeface="Calibri" pitchFamily="34" charset="-120"/>
+              </a:rPr>
+              <a:t>• Chaîne DevOps en place</a:t>
+            </a:r>
+            <a:endParaRPr lang="en-US" sz="1300" dirty="0"/>
+          </a:p>
+        </p:txBody>
+      </p:sp>
+      <p:sp>
+        <p:nvSpPr>
+          <p:cNvPr id="7" name="Shape 5"/>
+          <p:cNvSpPr/>
+          <p:nvPr/>
+        </p:nvSpPr>
+        <p:spPr>
+          <a:xfrm>
+            <a:off x="4343400" y="1600200"/>
+            <a:ext cx="3520440" cy="4114800"/>
+          </a:xfrm>
+          <a:prstGeom prst="roundRect">
+            <a:avLst>
+              <a:gd name="adj" fmla="val 2078"/>
+            </a:avLst>
+          </a:prstGeom>
+          <a:solidFill>
+            <a:srgbClr val="EAF1F6"/>
+          </a:solidFill>
+          <a:ln w="12700">
+            <a:solidFill>
+              <a:srgbClr val="DCE6EE"/>
+            </a:solidFill>
+            <a:prstDash val="solid"/>
+          </a:ln>
+          <a:effectLst>
+            <a:outerShdw sx="100000" sy="100000" kx="0" ky="0" algn="bl" rotWithShape="0" blurRad="76200" dist="25400" dir="5400000">
+              <a:srgbClr val="B9C6D2">
+                <a:alpha val="30000"/>
+              </a:srgbClr>
+            </a:outerShdw>
+          </a:effectLst>
+        </p:spPr>
+      </p:sp>
+      <p:sp>
+        <p:nvSpPr>
+          <p:cNvPr id="8" name="Text 6"/>
+          <p:cNvSpPr/>
+          <p:nvPr/>
+        </p:nvSpPr>
+        <p:spPr>
+          <a:xfrm>
+            <a:off x="4572000" y="1783080"/>
+            <a:ext cx="3108960" cy="365760"/>
+          </a:xfrm>
+          <a:prstGeom prst="rect">
+            <a:avLst/>
+          </a:prstGeom>
+          <a:noFill/>
+          <a:ln/>
+        </p:spPr>
+        <p:txBody>
+          <a:bodyPr wrap="square" rtlCol="0" anchor="ctr"/>
+          <a:lstStyle/>
+          <a:p>
+            <a:pPr indent="0" marL="0">
+              <a:buNone/>
+            </a:pPr>
+            <a:r>
+              <a:rPr lang="en-US" sz="1600" b="1" dirty="0">
+                <a:solidFill>
+                  <a:srgbClr val="B23A48"/>
+                </a:solidFill>
+                <a:latin typeface="Cambria" pitchFamily="34" charset="0"/>
+                <a:ea typeface="Cambria" pitchFamily="34" charset="-122"/>
+                <a:cs typeface="Cambria" pitchFamily="34" charset="-120"/>
+              </a:rPr>
+              <a:t>Limites</a:t>
+            </a:r>
+            <a:endParaRPr lang="en-US" sz="1600" dirty="0"/>
+          </a:p>
+        </p:txBody>
+      </p:sp>
+      <p:sp>
+        <p:nvSpPr>
+          <p:cNvPr id="9" name="Text 7"/>
+          <p:cNvSpPr/>
+          <p:nvPr/>
+        </p:nvSpPr>
+        <p:spPr>
+          <a:xfrm>
+            <a:off x="4572000" y="2240280"/>
+            <a:ext cx="3108960" cy="3291840"/>
+          </a:xfrm>
+          <a:prstGeom prst="rect">
+            <a:avLst/>
+          </a:prstGeom>
+          <a:noFill/>
+          <a:ln/>
+        </p:spPr>
+        <p:txBody>
+          <a:bodyPr wrap="square" rtlCol="0" anchor="t"/>
+          <a:lstStyle/>
+          <a:p>
+            <a:pPr indent="0" marL="0">
+              <a:lnSpc>
+                <a:spcPct val="140000"/>
+              </a:lnSpc>
+              <a:buNone/>
+            </a:pPr>
+            <a:r>
+              <a:rPr lang="en-US" sz="1300" dirty="0">
+                <a:solidFill>
+                  <a:srgbClr val="1B2A3A"/>
+                </a:solidFill>
+                <a:latin typeface="Calibri" pitchFamily="34" charset="0"/>
+                <a:ea typeface="Calibri" pitchFamily="34" charset="-122"/>
+                <a:cs typeface="Calibri" pitchFamily="34" charset="-120"/>
+              </a:rPr>
+              <a:t>• Pas de jours fériés</a:t>
+            </a:r>
+            <a:endParaRPr lang="en-US" sz="1300" dirty="0"/>
+          </a:p>
+          <a:p>
+            <a:pPr indent="0" marL="0">
+              <a:lnSpc>
+                <a:spcPct val="140000"/>
+              </a:lnSpc>
+              <a:buNone/>
+            </a:pPr>
+            <a:r>
+              <a:rPr lang="en-US" sz="1300" dirty="0">
+                <a:solidFill>
+                  <a:srgbClr val="1B2A3A"/>
+                </a:solidFill>
+                <a:latin typeface="Calibri" pitchFamily="34" charset="0"/>
+                <a:ea typeface="Calibri" pitchFamily="34" charset="-122"/>
+                <a:cs typeface="Calibri" pitchFamily="34" charset="-120"/>
+              </a:rPr>
+              <a:t>• Notifications e-mail non faites</a:t>
+            </a:r>
+            <a:endParaRPr lang="en-US" sz="1300" dirty="0"/>
+          </a:p>
+          <a:p>
+            <a:pPr indent="0" marL="0">
+              <a:lnSpc>
+                <a:spcPct val="140000"/>
+              </a:lnSpc>
+              <a:buNone/>
+            </a:pPr>
+            <a:r>
+              <a:rPr lang="en-US" sz="1300" dirty="0">
+                <a:solidFill>
+                  <a:srgbClr val="1B2A3A"/>
+                </a:solidFill>
+                <a:latin typeface="Calibri" pitchFamily="34" charset="0"/>
+                <a:ea typeface="Calibri" pitchFamily="34" charset="-122"/>
+                <a:cs typeface="Calibri" pitchFamily="34" charset="-120"/>
+              </a:rPr>
+              <a:t>• Validation à un seul niveau</a:t>
+            </a:r>
+            <a:endParaRPr lang="en-US" sz="1300" dirty="0"/>
+          </a:p>
+        </p:txBody>
+      </p:sp>
+      <p:sp>
+        <p:nvSpPr>
+          <p:cNvPr id="10" name="Shape 8"/>
+          <p:cNvSpPr/>
+          <p:nvPr/>
+        </p:nvSpPr>
+        <p:spPr>
+          <a:xfrm>
+            <a:off x="8046720" y="1600200"/>
+            <a:ext cx="3474720" cy="4114800"/>
+          </a:xfrm>
+          <a:prstGeom prst="roundRect">
+            <a:avLst>
+              <a:gd name="adj" fmla="val 2105"/>
+            </a:avLst>
+          </a:prstGeom>
+          <a:solidFill>
+            <a:srgbClr val="0A1A2F"/>
+          </a:solidFill>
+          <a:ln w="12700">
+            <a:solidFill>
+              <a:srgbClr val="DCE6EE"/>
+            </a:solidFill>
+            <a:prstDash val="solid"/>
+          </a:ln>
+          <a:effectLst>
+            <a:outerShdw sx="100000" sy="100000" kx="0" ky="0" algn="bl" rotWithShape="0" blurRad="76200" dist="25400" dir="5400000">
+              <a:srgbClr val="B9C6D2">
+                <a:alpha val="30000"/>
+              </a:srgbClr>
+            </a:outerShdw>
+          </a:effectLst>
+        </p:spPr>
+      </p:sp>
+      <p:sp>
+        <p:nvSpPr>
+          <p:cNvPr id="11" name="Text 9"/>
+          <p:cNvSpPr/>
+          <p:nvPr/>
+        </p:nvSpPr>
+        <p:spPr>
+          <a:xfrm>
+            <a:off x="8275320" y="1783080"/>
+            <a:ext cx="3017520" cy="365760"/>
+          </a:xfrm>
+          <a:prstGeom prst="rect">
+            <a:avLst/>
+          </a:prstGeom>
+          <a:noFill/>
+          <a:ln/>
+        </p:spPr>
+        <p:txBody>
+          <a:bodyPr wrap="square" rtlCol="0" anchor="ctr"/>
+          <a:lstStyle/>
+          <a:p>
+            <a:pPr indent="0" marL="0">
+              <a:buNone/>
+            </a:pPr>
+            <a:r>
+              <a:rPr lang="en-US" sz="1600" b="1" dirty="0">
+                <a:solidFill>
+                  <a:srgbClr val="13A89E"/>
+                </a:solidFill>
+                <a:latin typeface="Cambria" pitchFamily="34" charset="0"/>
+                <a:ea typeface="Cambria" pitchFamily="34" charset="-122"/>
+                <a:cs typeface="Cambria" pitchFamily="34" charset="-120"/>
+              </a:rPr>
+              <a:t>Perspectives</a:t>
+            </a:r>
+            <a:endParaRPr lang="en-US" sz="1600" dirty="0"/>
+          </a:p>
+        </p:txBody>
+      </p:sp>
+      <p:sp>
+        <p:nvSpPr>
+          <p:cNvPr id="12" name="Text 10"/>
+          <p:cNvSpPr/>
+          <p:nvPr/>
+        </p:nvSpPr>
+        <p:spPr>
+          <a:xfrm>
+            <a:off x="8275320" y="2240280"/>
+            <a:ext cx="3017520" cy="3291840"/>
+          </a:xfrm>
+          <a:prstGeom prst="rect">
+            <a:avLst/>
+          </a:prstGeom>
+          <a:noFill/>
+          <a:ln/>
+        </p:spPr>
+        <p:txBody>
+          <a:bodyPr wrap="square" rtlCol="0" anchor="t"/>
+          <a:lstStyle/>
+          <a:p>
+            <a:pPr indent="0" marL="0">
+              <a:lnSpc>
+                <a:spcPct val="140000"/>
+              </a:lnSpc>
+              <a:buNone/>
+            </a:pPr>
+            <a:r>
+              <a:rPr lang="en-US" sz="1300" dirty="0">
+                <a:solidFill>
+                  <a:srgbClr val="FFFFFF"/>
+                </a:solidFill>
+                <a:latin typeface="Calibri" pitchFamily="34" charset="0"/>
+                <a:ea typeface="Calibri" pitchFamily="34" charset="-122"/>
+                <a:cs typeface="Calibri" pitchFamily="34" charset="-120"/>
+              </a:rPr>
+              <a:t>• Notifications e-mail</a:t>
+            </a:r>
+            <a:endParaRPr lang="en-US" sz="1300" dirty="0"/>
+          </a:p>
+          <a:p>
+            <a:pPr indent="0" marL="0">
+              <a:lnSpc>
+                <a:spcPct val="140000"/>
+              </a:lnSpc>
+              <a:buNone/>
+            </a:pPr>
+            <a:r>
+              <a:rPr lang="en-US" sz="1300" dirty="0">
+                <a:solidFill>
+                  <a:srgbClr val="FFFFFF"/>
+                </a:solidFill>
+                <a:latin typeface="Calibri" pitchFamily="34" charset="0"/>
+                <a:ea typeface="Calibri" pitchFamily="34" charset="-122"/>
+                <a:cs typeface="Calibri" pitchFamily="34" charset="-120"/>
+              </a:rPr>
+              <a:t>• Calendrier d'équipe</a:t>
+            </a:r>
+            <a:endParaRPr lang="en-US" sz="1300" dirty="0"/>
+          </a:p>
+          <a:p>
+            <a:pPr indent="0" marL="0">
+              <a:lnSpc>
+                <a:spcPct val="140000"/>
+              </a:lnSpc>
+              <a:buNone/>
+            </a:pPr>
+            <a:r>
+              <a:rPr lang="en-US" sz="1300" dirty="0">
+                <a:solidFill>
+                  <a:srgbClr val="FFFFFF"/>
+                </a:solidFill>
+                <a:latin typeface="Calibri" pitchFamily="34" charset="0"/>
+                <a:ea typeface="Calibri" pitchFamily="34" charset="-122"/>
+                <a:cs typeface="Calibri" pitchFamily="34" charset="-120"/>
+              </a:rPr>
+              <a:t>• Jours fériés</a:t>
+            </a:r>
+            <a:endParaRPr lang="en-US" sz="1300" dirty="0"/>
+          </a:p>
+          <a:p>
+            <a:pPr indent="0" marL="0">
+              <a:lnSpc>
+                <a:spcPct val="140000"/>
+              </a:lnSpc>
+              <a:buNone/>
+            </a:pPr>
+            <a:r>
+              <a:rPr lang="en-US" sz="1300" dirty="0">
+                <a:solidFill>
+                  <a:srgbClr val="FFFFFF"/>
+                </a:solidFill>
+                <a:latin typeface="Calibri" pitchFamily="34" charset="0"/>
+                <a:ea typeface="Calibri" pitchFamily="34" charset="-122"/>
+                <a:cs typeface="Calibri" pitchFamily="34" charset="-120"/>
+              </a:rPr>
+              <a:t>• Export comptable</a:t>
+            </a:r>
+            <a:endParaRPr lang="en-US" sz="1300" dirty="0"/>
+          </a:p>
+          <a:p>
+            <a:pPr indent="0" marL="0">
+              <a:lnSpc>
+                <a:spcPct val="140000"/>
+              </a:lnSpc>
+              <a:buNone/>
+            </a:pPr>
+            <a:r>
+              <a:rPr lang="en-US" sz="1300" dirty="0">
+                <a:solidFill>
+                  <a:srgbClr val="FFFFFF"/>
+                </a:solidFill>
+                <a:latin typeface="Calibri" pitchFamily="34" charset="0"/>
+                <a:ea typeface="Calibri" pitchFamily="34" charset="-122"/>
+                <a:cs typeface="Calibri" pitchFamily="34" charset="-120"/>
+              </a:rPr>
+              <a:t>• Application mobile</a:t>
+            </a:r>
+            <a:endParaRPr lang="en-US" sz="1300" dirty="0"/>
+          </a:p>
+        </p:txBody>
+      </p:sp>
+    </p:spTree>
+  </p:cSld>
+  <p:clrMapOvr>
+    <a:masterClrMapping/>
+  </p:clrMapOvr>
+</p:sld>
+</file>
+
+<file path=ppt/slides/slide19.xml><?xml version="1.0" encoding="utf-8"?>
+<p:sld xmlns:a="http://schemas.openxmlformats.org/drawingml/2006/main" xmlns:r="http://schemas.openxmlformats.org/officeDocument/2006/relationships" xmlns:p="http://schemas.openxmlformats.org/presentationml/2006/main">
+  <p:cSld name="Slide 19">
     <p:bg>
       <p:bgPr>
         <a:solidFill>
@@ -9224,7 +11936,7 @@
                 <a:ea typeface="Cambria" pitchFamily="34" charset="-122"/>
                 <a:cs typeface="Cambria" pitchFamily="34" charset="-120"/>
               </a:rPr>
-              <a:t>Modélisation UML &amp; données</a:t>
+              <a:t>Modélisation : 10 diagrammes UML / Merise</a:t>
             </a:r>
             <a:endParaRPr lang="en-US" sz="3000" dirty="0"/>
           </a:p>
@@ -9238,12 +11950,12 @@
         </p:nvSpPr>
         <p:spPr>
           <a:xfrm>
-            <a:off x="640080" y="1645920"/>
-            <a:ext cx="3429000" cy="1143000"/>
+            <a:off x="640080" y="1737360"/>
+            <a:ext cx="2057400" cy="1965960"/>
           </a:xfrm>
           <a:prstGeom prst="roundRect">
             <a:avLst>
-              <a:gd name="adj" fmla="val 6400"/>
+              <a:gd name="adj" fmla="val 3721"/>
             </a:avLst>
           </a:prstGeom>
           <a:solidFill>
@@ -9264,36 +11976,40 @@
           </a:effectLst>
         </p:spPr>
       </p:sp>
-      <p:sp>
-        <p:nvSpPr>
-          <p:cNvPr id="5" name="Shape 3"/>
-          <p:cNvSpPr/>
-          <p:nvPr/>
-        </p:nvSpPr>
-        <p:spPr>
-          <a:xfrm>
-            <a:off x="868680" y="1984248"/>
-            <a:ext cx="457200" cy="457200"/>
-          </a:xfrm>
-          <a:prstGeom prst="ellipse">
-            <a:avLst/>
-          </a:prstGeom>
-          <a:solidFill>
-            <a:srgbClr val="1C7293"/>
-          </a:solidFill>
-          <a:ln/>
-        </p:spPr>
-      </p:sp>
-      <p:sp>
-        <p:nvSpPr>
-          <p:cNvPr id="6" name="Text 4"/>
-          <p:cNvSpPr/>
-          <p:nvPr/>
-        </p:nvSpPr>
-        <p:spPr>
-          <a:xfrm>
-            <a:off x="868680" y="1984248"/>
-            <a:ext cx="457200" cy="457200"/>
+      <p:pic>
+        <p:nvPicPr>
+          <p:cNvPr id="5" name="Image 0" descr="/Users/boungoumbimigloirebryan/Desktop/ProjetCda/docs/diagrammes/images/01-contexte.png">    </p:cNvPr>
+          <p:cNvPicPr>
+            <a:picLocks noChangeAspect="1"/>
+          </p:cNvPicPr>
+          <p:nvPr/>
+        </p:nvPicPr>
+        <p:blipFill>
+          <a:blip r:embed="rId1"/>
+          <a:stretch>
+            <a:fillRect/>
+          </a:stretch>
+        </p:blipFill>
+        <p:spPr>
+          <a:xfrm>
+            <a:off x="749808" y="2097702"/>
+            <a:ext cx="1837944" cy="916091"/>
+          </a:xfrm>
+          <a:prstGeom prst="rect">
+            <a:avLst/>
+          </a:prstGeom>
+        </p:spPr>
+      </p:pic>
+      <p:sp>
+        <p:nvSpPr>
+          <p:cNvPr id="6" name="Text 3"/>
+          <p:cNvSpPr/>
+          <p:nvPr/>
+        </p:nvSpPr>
+        <p:spPr>
+          <a:xfrm>
+            <a:off x="685800" y="3310128"/>
+            <a:ext cx="1965960" cy="320040"/>
           </a:xfrm>
           <a:prstGeom prst="rect">
             <a:avLst/>
@@ -9309,46 +12025,7 @@
               <a:buNone/>
             </a:pPr>
             <a:r>
-              <a:rPr lang="en-US" sz="1600" b="1" dirty="0">
-                <a:solidFill>
-                  <a:srgbClr val="FFFFFF"/>
-                </a:solidFill>
-                <a:latin typeface="Calibri" pitchFamily="34" charset="0"/>
-                <a:ea typeface="Calibri" pitchFamily="34" charset="-122"/>
-                <a:cs typeface="Calibri" pitchFamily="34" charset="-120"/>
-              </a:rPr>
-              <a:t>▦</a:t>
-            </a:r>
-            <a:endParaRPr lang="en-US" sz="1600" dirty="0"/>
-          </a:p>
-        </p:txBody>
-      </p:sp>
-      <p:sp>
-        <p:nvSpPr>
-          <p:cNvPr id="7" name="Text 5"/>
-          <p:cNvSpPr/>
-          <p:nvPr/>
-        </p:nvSpPr>
-        <p:spPr>
-          <a:xfrm>
-            <a:off x="1508760" y="1645920"/>
-            <a:ext cx="2468880" cy="1143000"/>
-          </a:xfrm>
-          <a:prstGeom prst="rect">
-            <a:avLst/>
-          </a:prstGeom>
-          <a:noFill/>
-          <a:ln/>
-        </p:spPr>
-        <p:txBody>
-          <a:bodyPr wrap="square" rtlCol="0" anchor="ctr"/>
-          <a:lstStyle/>
-          <a:p>
-            <a:pPr indent="0" marL="0">
-              <a:buNone/>
-            </a:pPr>
-            <a:r>
-              <a:rPr lang="en-US" sz="1400" b="1" dirty="0">
+              <a:rPr lang="en-US" sz="1100" b="1" dirty="0">
                 <a:solidFill>
                   <a:srgbClr val="1B2A3A"/>
                 </a:solidFill>
@@ -9356,26 +12033,26 @@
                 <a:ea typeface="Calibri" pitchFamily="34" charset="-122"/>
                 <a:cs typeface="Calibri" pitchFamily="34" charset="-120"/>
               </a:rPr>
-              <a:t>Cas d'utilisation</a:t>
-            </a:r>
-            <a:endParaRPr lang="en-US" sz="1400" dirty="0"/>
-          </a:p>
-        </p:txBody>
-      </p:sp>
-      <p:sp>
-        <p:nvSpPr>
-          <p:cNvPr id="8" name="Shape 6"/>
-          <p:cNvSpPr/>
-          <p:nvPr/>
-        </p:nvSpPr>
-        <p:spPr>
-          <a:xfrm>
-            <a:off x="4343400" y="1645920"/>
-            <a:ext cx="3429000" cy="1143000"/>
+              <a:t>Contexte</a:t>
+            </a:r>
+            <a:endParaRPr lang="en-US" sz="1100" dirty="0"/>
+          </a:p>
+        </p:txBody>
+      </p:sp>
+      <p:sp>
+        <p:nvSpPr>
+          <p:cNvPr id="7" name="Shape 4"/>
+          <p:cNvSpPr/>
+          <p:nvPr/>
+        </p:nvSpPr>
+        <p:spPr>
+          <a:xfrm>
+            <a:off x="2852928" y="1737360"/>
+            <a:ext cx="2057400" cy="1965960"/>
           </a:xfrm>
           <a:prstGeom prst="roundRect">
             <a:avLst>
-              <a:gd name="adj" fmla="val 6400"/>
+              <a:gd name="adj" fmla="val 3721"/>
             </a:avLst>
           </a:prstGeom>
           <a:solidFill>
@@ -9396,36 +12073,40 @@
           </a:effectLst>
         </p:spPr>
       </p:sp>
-      <p:sp>
-        <p:nvSpPr>
-          <p:cNvPr id="9" name="Shape 7"/>
-          <p:cNvSpPr/>
-          <p:nvPr/>
-        </p:nvSpPr>
-        <p:spPr>
-          <a:xfrm>
-            <a:off x="4572000" y="1984248"/>
-            <a:ext cx="457200" cy="457200"/>
-          </a:xfrm>
-          <a:prstGeom prst="ellipse">
-            <a:avLst/>
-          </a:prstGeom>
-          <a:solidFill>
-            <a:srgbClr val="1C7293"/>
-          </a:solidFill>
-          <a:ln/>
-        </p:spPr>
-      </p:sp>
-      <p:sp>
-        <p:nvSpPr>
-          <p:cNvPr id="10" name="Text 8"/>
-          <p:cNvSpPr/>
-          <p:nvPr/>
-        </p:nvSpPr>
-        <p:spPr>
-          <a:xfrm>
-            <a:off x="4572000" y="1984248"/>
-            <a:ext cx="457200" cy="457200"/>
+      <p:pic>
+        <p:nvPicPr>
+          <p:cNvPr id="8" name="Image 1" descr="/Users/boungoumbimigloirebryan/Desktop/ProjetCda/docs/diagrammes/images/02-cas-utilisation.png">    </p:cNvPr>
+          <p:cNvPicPr>
+            <a:picLocks noChangeAspect="1"/>
+          </p:cNvPicPr>
+          <p:nvPr/>
+        </p:nvPicPr>
+        <p:blipFill>
+          <a:blip r:embed="rId2"/>
+          <a:stretch>
+            <a:fillRect/>
+          </a:stretch>
+        </p:blipFill>
+        <p:spPr>
+          <a:xfrm>
+            <a:off x="3054405" y="1847088"/>
+            <a:ext cx="1654445" cy="1417320"/>
+          </a:xfrm>
+          <a:prstGeom prst="rect">
+            <a:avLst/>
+          </a:prstGeom>
+        </p:spPr>
+      </p:pic>
+      <p:sp>
+        <p:nvSpPr>
+          <p:cNvPr id="9" name="Text 5"/>
+          <p:cNvSpPr/>
+          <p:nvPr/>
+        </p:nvSpPr>
+        <p:spPr>
+          <a:xfrm>
+            <a:off x="2898648" y="3310128"/>
+            <a:ext cx="1965960" cy="320040"/>
           </a:xfrm>
           <a:prstGeom prst="rect">
             <a:avLst/>
@@ -9441,46 +12122,7 @@
               <a:buNone/>
             </a:pPr>
             <a:r>
-              <a:rPr lang="en-US" sz="1600" b="1" dirty="0">
-                <a:solidFill>
-                  <a:srgbClr val="FFFFFF"/>
-                </a:solidFill>
-                <a:latin typeface="Calibri" pitchFamily="34" charset="0"/>
-                <a:ea typeface="Calibri" pitchFamily="34" charset="-122"/>
-                <a:cs typeface="Calibri" pitchFamily="34" charset="-120"/>
-              </a:rPr>
-              <a:t>▦</a:t>
-            </a:r>
-            <a:endParaRPr lang="en-US" sz="1600" dirty="0"/>
-          </a:p>
-        </p:txBody>
-      </p:sp>
-      <p:sp>
-        <p:nvSpPr>
-          <p:cNvPr id="11" name="Text 9"/>
-          <p:cNvSpPr/>
-          <p:nvPr/>
-        </p:nvSpPr>
-        <p:spPr>
-          <a:xfrm>
-            <a:off x="5212080" y="1645920"/>
-            <a:ext cx="2468880" cy="1143000"/>
-          </a:xfrm>
-          <a:prstGeom prst="rect">
-            <a:avLst/>
-          </a:prstGeom>
-          <a:noFill/>
-          <a:ln/>
-        </p:spPr>
-        <p:txBody>
-          <a:bodyPr wrap="square" rtlCol="0" anchor="ctr"/>
-          <a:lstStyle/>
-          <a:p>
-            <a:pPr indent="0" marL="0">
-              <a:buNone/>
-            </a:pPr>
-            <a:r>
-              <a:rPr lang="en-US" sz="1400" b="1" dirty="0">
+              <a:rPr lang="en-US" sz="1100" b="1" dirty="0">
                 <a:solidFill>
                   <a:srgbClr val="1B2A3A"/>
                 </a:solidFill>
@@ -9488,26 +12130,26 @@
                 <a:ea typeface="Calibri" pitchFamily="34" charset="-122"/>
                 <a:cs typeface="Calibri" pitchFamily="34" charset="-120"/>
               </a:rPr>
-              <a:t>Séquence</a:t>
-            </a:r>
-            <a:endParaRPr lang="en-US" sz="1400" dirty="0"/>
-          </a:p>
-        </p:txBody>
-      </p:sp>
-      <p:sp>
-        <p:nvSpPr>
-          <p:cNvPr id="12" name="Shape 10"/>
-          <p:cNvSpPr/>
-          <p:nvPr/>
-        </p:nvSpPr>
-        <p:spPr>
-          <a:xfrm>
-            <a:off x="8046720" y="1645920"/>
-            <a:ext cx="3429000" cy="1143000"/>
+              <a:t>Cas d'utilisation</a:t>
+            </a:r>
+            <a:endParaRPr lang="en-US" sz="1100" dirty="0"/>
+          </a:p>
+        </p:txBody>
+      </p:sp>
+      <p:sp>
+        <p:nvSpPr>
+          <p:cNvPr id="10" name="Shape 6"/>
+          <p:cNvSpPr/>
+          <p:nvPr/>
+        </p:nvSpPr>
+        <p:spPr>
+          <a:xfrm>
+            <a:off x="5065776" y="1737360"/>
+            <a:ext cx="2057400" cy="1965960"/>
           </a:xfrm>
           <a:prstGeom prst="roundRect">
             <a:avLst>
-              <a:gd name="adj" fmla="val 6400"/>
+              <a:gd name="adj" fmla="val 3721"/>
             </a:avLst>
           </a:prstGeom>
           <a:solidFill>
@@ -9528,36 +12170,40 @@
           </a:effectLst>
         </p:spPr>
       </p:sp>
-      <p:sp>
-        <p:nvSpPr>
-          <p:cNvPr id="13" name="Shape 11"/>
-          <p:cNvSpPr/>
-          <p:nvPr/>
-        </p:nvSpPr>
-        <p:spPr>
-          <a:xfrm>
-            <a:off x="8275320" y="1984248"/>
-            <a:ext cx="457200" cy="457200"/>
-          </a:xfrm>
-          <a:prstGeom prst="ellipse">
-            <a:avLst/>
-          </a:prstGeom>
-          <a:solidFill>
-            <a:srgbClr val="1C7293"/>
-          </a:solidFill>
-          <a:ln/>
-        </p:spPr>
-      </p:sp>
-      <p:sp>
-        <p:nvSpPr>
-          <p:cNvPr id="14" name="Text 12"/>
-          <p:cNvSpPr/>
-          <p:nvPr/>
-        </p:nvSpPr>
-        <p:spPr>
-          <a:xfrm>
-            <a:off x="8275320" y="1984248"/>
-            <a:ext cx="457200" cy="457200"/>
+      <p:pic>
+        <p:nvPicPr>
+          <p:cNvPr id="11" name="Image 2" descr="/Users/boungoumbimigloirebryan/Desktop/ProjetCda/docs/diagrammes/images/03-activite-demande.png">    </p:cNvPr>
+          <p:cNvPicPr>
+            <a:picLocks noChangeAspect="1"/>
+          </p:cNvPicPr>
+          <p:nvPr/>
+        </p:nvPicPr>
+        <p:blipFill>
+          <a:blip r:embed="rId3"/>
+          <a:stretch>
+            <a:fillRect/>
+          </a:stretch>
+        </p:blipFill>
+        <p:spPr>
+          <a:xfrm>
+            <a:off x="5544404" y="1847088"/>
+            <a:ext cx="1100144" cy="1417320"/>
+          </a:xfrm>
+          <a:prstGeom prst="rect">
+            <a:avLst/>
+          </a:prstGeom>
+        </p:spPr>
+      </p:pic>
+      <p:sp>
+        <p:nvSpPr>
+          <p:cNvPr id="12" name="Text 7"/>
+          <p:cNvSpPr/>
+          <p:nvPr/>
+        </p:nvSpPr>
+        <p:spPr>
+          <a:xfrm>
+            <a:off x="5111496" y="3310128"/>
+            <a:ext cx="1965960" cy="320040"/>
           </a:xfrm>
           <a:prstGeom prst="rect">
             <a:avLst/>
@@ -9573,46 +12219,7 @@
               <a:buNone/>
             </a:pPr>
             <a:r>
-              <a:rPr lang="en-US" sz="1600" b="1" dirty="0">
-                <a:solidFill>
-                  <a:srgbClr val="FFFFFF"/>
-                </a:solidFill>
-                <a:latin typeface="Calibri" pitchFamily="34" charset="0"/>
-                <a:ea typeface="Calibri" pitchFamily="34" charset="-122"/>
-                <a:cs typeface="Calibri" pitchFamily="34" charset="-120"/>
-              </a:rPr>
-              <a:t>▦</a:t>
-            </a:r>
-            <a:endParaRPr lang="en-US" sz="1600" dirty="0"/>
-          </a:p>
-        </p:txBody>
-      </p:sp>
-      <p:sp>
-        <p:nvSpPr>
-          <p:cNvPr id="15" name="Text 13"/>
-          <p:cNvSpPr/>
-          <p:nvPr/>
-        </p:nvSpPr>
-        <p:spPr>
-          <a:xfrm>
-            <a:off x="8915400" y="1645920"/>
-            <a:ext cx="2468880" cy="1143000"/>
-          </a:xfrm>
-          <a:prstGeom prst="rect">
-            <a:avLst/>
-          </a:prstGeom>
-          <a:noFill/>
-          <a:ln/>
-        </p:spPr>
-        <p:txBody>
-          <a:bodyPr wrap="square" rtlCol="0" anchor="ctr"/>
-          <a:lstStyle/>
-          <a:p>
-            <a:pPr indent="0" marL="0">
-              <a:buNone/>
-            </a:pPr>
-            <a:r>
-              <a:rPr lang="en-US" sz="1400" b="1" dirty="0">
+              <a:rPr lang="en-US" sz="1100" b="1" dirty="0">
                 <a:solidFill>
                   <a:srgbClr val="1B2A3A"/>
                 </a:solidFill>
@@ -9620,26 +12227,26 @@
                 <a:ea typeface="Calibri" pitchFamily="34" charset="-122"/>
                 <a:cs typeface="Calibri" pitchFamily="34" charset="-120"/>
               </a:rPr>
-              <a:t>Classes</a:t>
-            </a:r>
-            <a:endParaRPr lang="en-US" sz="1400" dirty="0"/>
-          </a:p>
-        </p:txBody>
-      </p:sp>
-      <p:sp>
-        <p:nvSpPr>
-          <p:cNvPr id="16" name="Shape 14"/>
-          <p:cNvSpPr/>
-          <p:nvPr/>
-        </p:nvSpPr>
-        <p:spPr>
-          <a:xfrm>
-            <a:off x="640080" y="3017520"/>
-            <a:ext cx="3429000" cy="1143000"/>
+              <a:t>Activité</a:t>
+            </a:r>
+            <a:endParaRPr lang="en-US" sz="1100" dirty="0"/>
+          </a:p>
+        </p:txBody>
+      </p:sp>
+      <p:sp>
+        <p:nvSpPr>
+          <p:cNvPr id="13" name="Shape 8"/>
+          <p:cNvSpPr/>
+          <p:nvPr/>
+        </p:nvSpPr>
+        <p:spPr>
+          <a:xfrm>
+            <a:off x="7278624" y="1737360"/>
+            <a:ext cx="2057400" cy="1965960"/>
           </a:xfrm>
           <a:prstGeom prst="roundRect">
             <a:avLst>
-              <a:gd name="adj" fmla="val 6400"/>
+              <a:gd name="adj" fmla="val 3721"/>
             </a:avLst>
           </a:prstGeom>
           <a:solidFill>
@@ -9660,36 +12267,40 @@
           </a:effectLst>
         </p:spPr>
       </p:sp>
-      <p:sp>
-        <p:nvSpPr>
-          <p:cNvPr id="17" name="Shape 15"/>
-          <p:cNvSpPr/>
-          <p:nvPr/>
-        </p:nvSpPr>
-        <p:spPr>
-          <a:xfrm>
-            <a:off x="868680" y="3355848"/>
-            <a:ext cx="457200" cy="457200"/>
-          </a:xfrm>
-          <a:prstGeom prst="ellipse">
-            <a:avLst/>
-          </a:prstGeom>
-          <a:solidFill>
-            <a:srgbClr val="1C7293"/>
-          </a:solidFill>
-          <a:ln/>
-        </p:spPr>
-      </p:sp>
-      <p:sp>
-        <p:nvSpPr>
-          <p:cNvPr id="18" name="Text 16"/>
-          <p:cNvSpPr/>
-          <p:nvPr/>
-        </p:nvSpPr>
-        <p:spPr>
-          <a:xfrm>
-            <a:off x="868680" y="3355848"/>
-            <a:ext cx="457200" cy="457200"/>
+      <p:pic>
+        <p:nvPicPr>
+          <p:cNvPr id="14" name="Image 3" descr="/Users/boungoumbimigloirebryan/Desktop/ProjetCda/docs/diagrammes/images/04-sequence-creation.png">    </p:cNvPr>
+          <p:cNvPicPr>
+            <a:picLocks noChangeAspect="1"/>
+          </p:cNvPicPr>
+          <p:nvPr/>
+        </p:nvPicPr>
+        <p:blipFill>
+          <a:blip r:embed="rId4"/>
+          <a:stretch>
+            <a:fillRect/>
+          </a:stretch>
+        </p:blipFill>
+        <p:spPr>
+          <a:xfrm>
+            <a:off x="7388352" y="1912540"/>
+            <a:ext cx="1837944" cy="1286416"/>
+          </a:xfrm>
+          <a:prstGeom prst="rect">
+            <a:avLst/>
+          </a:prstGeom>
+        </p:spPr>
+      </p:pic>
+      <p:sp>
+        <p:nvSpPr>
+          <p:cNvPr id="15" name="Text 9"/>
+          <p:cNvSpPr/>
+          <p:nvPr/>
+        </p:nvSpPr>
+        <p:spPr>
+          <a:xfrm>
+            <a:off x="7324344" y="3310128"/>
+            <a:ext cx="1965960" cy="320040"/>
           </a:xfrm>
           <a:prstGeom prst="rect">
             <a:avLst/>
@@ -9705,46 +12316,7 @@
               <a:buNone/>
             </a:pPr>
             <a:r>
-              <a:rPr lang="en-US" sz="1600" b="1" dirty="0">
-                <a:solidFill>
-                  <a:srgbClr val="FFFFFF"/>
-                </a:solidFill>
-                <a:latin typeface="Calibri" pitchFamily="34" charset="0"/>
-                <a:ea typeface="Calibri" pitchFamily="34" charset="-122"/>
-                <a:cs typeface="Calibri" pitchFamily="34" charset="-120"/>
-              </a:rPr>
-              <a:t>▦</a:t>
-            </a:r>
-            <a:endParaRPr lang="en-US" sz="1600" dirty="0"/>
-          </a:p>
-        </p:txBody>
-      </p:sp>
-      <p:sp>
-        <p:nvSpPr>
-          <p:cNvPr id="19" name="Text 17"/>
-          <p:cNvSpPr/>
-          <p:nvPr/>
-        </p:nvSpPr>
-        <p:spPr>
-          <a:xfrm>
-            <a:off x="1508760" y="3017520"/>
-            <a:ext cx="2468880" cy="1143000"/>
-          </a:xfrm>
-          <a:prstGeom prst="rect">
-            <a:avLst/>
-          </a:prstGeom>
-          <a:noFill/>
-          <a:ln/>
-        </p:spPr>
-        <p:txBody>
-          <a:bodyPr wrap="square" rtlCol="0" anchor="ctr"/>
-          <a:lstStyle/>
-          <a:p>
-            <a:pPr indent="0" marL="0">
-              <a:buNone/>
-            </a:pPr>
-            <a:r>
-              <a:rPr lang="en-US" sz="1400" b="1" dirty="0">
+              <a:rPr lang="en-US" sz="1100" b="1" dirty="0">
                 <a:solidFill>
                   <a:srgbClr val="1B2A3A"/>
                 </a:solidFill>
@@ -9752,26 +12324,26 @@
                 <a:ea typeface="Calibri" pitchFamily="34" charset="-122"/>
                 <a:cs typeface="Calibri" pitchFamily="34" charset="-120"/>
               </a:rPr>
-              <a:t>État-transition</a:t>
-            </a:r>
-            <a:endParaRPr lang="en-US" sz="1400" dirty="0"/>
-          </a:p>
-        </p:txBody>
-      </p:sp>
-      <p:sp>
-        <p:nvSpPr>
-          <p:cNvPr id="20" name="Shape 18"/>
-          <p:cNvSpPr/>
-          <p:nvPr/>
-        </p:nvSpPr>
-        <p:spPr>
-          <a:xfrm>
-            <a:off x="4343400" y="3017520"/>
-            <a:ext cx="3429000" cy="1143000"/>
+              <a:t>Séquence</a:t>
+            </a:r>
+            <a:endParaRPr lang="en-US" sz="1100" dirty="0"/>
+          </a:p>
+        </p:txBody>
+      </p:sp>
+      <p:sp>
+        <p:nvSpPr>
+          <p:cNvPr id="16" name="Shape 10"/>
+          <p:cNvSpPr/>
+          <p:nvPr/>
+        </p:nvSpPr>
+        <p:spPr>
+          <a:xfrm>
+            <a:off x="9491472" y="1737360"/>
+            <a:ext cx="2057400" cy="1965960"/>
           </a:xfrm>
           <a:prstGeom prst="roundRect">
             <a:avLst>
-              <a:gd name="adj" fmla="val 6400"/>
+              <a:gd name="adj" fmla="val 3721"/>
             </a:avLst>
           </a:prstGeom>
           <a:solidFill>
@@ -9792,36 +12364,40 @@
           </a:effectLst>
         </p:spPr>
       </p:sp>
-      <p:sp>
-        <p:nvSpPr>
-          <p:cNvPr id="21" name="Shape 19"/>
-          <p:cNvSpPr/>
-          <p:nvPr/>
-        </p:nvSpPr>
-        <p:spPr>
-          <a:xfrm>
-            <a:off x="4572000" y="3355848"/>
-            <a:ext cx="457200" cy="457200"/>
-          </a:xfrm>
-          <a:prstGeom prst="ellipse">
-            <a:avLst/>
-          </a:prstGeom>
-          <a:solidFill>
-            <a:srgbClr val="1C7293"/>
-          </a:solidFill>
-          <a:ln/>
-        </p:spPr>
-      </p:sp>
-      <p:sp>
-        <p:nvSpPr>
-          <p:cNvPr id="22" name="Text 20"/>
-          <p:cNvSpPr/>
-          <p:nvPr/>
-        </p:nvSpPr>
-        <p:spPr>
-          <a:xfrm>
-            <a:off x="4572000" y="3355848"/>
-            <a:ext cx="457200" cy="457200"/>
+      <p:pic>
+        <p:nvPicPr>
+          <p:cNvPr id="17" name="Image 4" descr="/Users/boungoumbimigloirebryan/Desktop/ProjetCda/docs/diagrammes/images/05-etat-demande.png">    </p:cNvPr>
+          <p:cNvPicPr>
+            <a:picLocks noChangeAspect="1"/>
+          </p:cNvPicPr>
+          <p:nvPr/>
+        </p:nvPicPr>
+        <p:blipFill>
+          <a:blip r:embed="rId5"/>
+          <a:stretch>
+            <a:fillRect/>
+          </a:stretch>
+        </p:blipFill>
+        <p:spPr>
+          <a:xfrm>
+            <a:off x="9655656" y="1847088"/>
+            <a:ext cx="1729033" cy="1417320"/>
+          </a:xfrm>
+          <a:prstGeom prst="rect">
+            <a:avLst/>
+          </a:prstGeom>
+        </p:spPr>
+      </p:pic>
+      <p:sp>
+        <p:nvSpPr>
+          <p:cNvPr id="18" name="Text 11"/>
+          <p:cNvSpPr/>
+          <p:nvPr/>
+        </p:nvSpPr>
+        <p:spPr>
+          <a:xfrm>
+            <a:off x="9537192" y="3310128"/>
+            <a:ext cx="1965960" cy="320040"/>
           </a:xfrm>
           <a:prstGeom prst="rect">
             <a:avLst/>
@@ -9837,46 +12413,7 @@
               <a:buNone/>
             </a:pPr>
             <a:r>
-              <a:rPr lang="en-US" sz="1600" b="1" dirty="0">
-                <a:solidFill>
-                  <a:srgbClr val="FFFFFF"/>
-                </a:solidFill>
-                <a:latin typeface="Calibri" pitchFamily="34" charset="0"/>
-                <a:ea typeface="Calibri" pitchFamily="34" charset="-122"/>
-                <a:cs typeface="Calibri" pitchFamily="34" charset="-120"/>
-              </a:rPr>
-              <a:t>▦</a:t>
-            </a:r>
-            <a:endParaRPr lang="en-US" sz="1600" dirty="0"/>
-          </a:p>
-        </p:txBody>
-      </p:sp>
-      <p:sp>
-        <p:nvSpPr>
-          <p:cNvPr id="23" name="Text 21"/>
-          <p:cNvSpPr/>
-          <p:nvPr/>
-        </p:nvSpPr>
-        <p:spPr>
-          <a:xfrm>
-            <a:off x="5212080" y="3017520"/>
-            <a:ext cx="2468880" cy="1143000"/>
-          </a:xfrm>
-          <a:prstGeom prst="rect">
-            <a:avLst/>
-          </a:prstGeom>
-          <a:noFill/>
-          <a:ln/>
-        </p:spPr>
-        <p:txBody>
-          <a:bodyPr wrap="square" rtlCol="0" anchor="ctr"/>
-          <a:lstStyle/>
-          <a:p>
-            <a:pPr indent="0" marL="0">
-              <a:buNone/>
-            </a:pPr>
-            <a:r>
-              <a:rPr lang="en-US" sz="1400" b="1" dirty="0">
+              <a:rPr lang="en-US" sz="1100" b="1" dirty="0">
                 <a:solidFill>
                   <a:srgbClr val="1B2A3A"/>
                 </a:solidFill>
@@ -9884,26 +12421,26 @@
                 <a:ea typeface="Calibri" pitchFamily="34" charset="-122"/>
                 <a:cs typeface="Calibri" pitchFamily="34" charset="-120"/>
               </a:rPr>
-              <a:t>MCD / MLD</a:t>
-            </a:r>
-            <a:endParaRPr lang="en-US" sz="1400" dirty="0"/>
-          </a:p>
-        </p:txBody>
-      </p:sp>
-      <p:sp>
-        <p:nvSpPr>
-          <p:cNvPr id="24" name="Shape 22"/>
-          <p:cNvSpPr/>
-          <p:nvPr/>
-        </p:nvSpPr>
-        <p:spPr>
-          <a:xfrm>
-            <a:off x="8046720" y="3017520"/>
-            <a:ext cx="3429000" cy="1143000"/>
+              <a:t>État-transition</a:t>
+            </a:r>
+            <a:endParaRPr lang="en-US" sz="1100" dirty="0"/>
+          </a:p>
+        </p:txBody>
+      </p:sp>
+      <p:sp>
+        <p:nvSpPr>
+          <p:cNvPr id="19" name="Shape 12"/>
+          <p:cNvSpPr/>
+          <p:nvPr/>
+        </p:nvSpPr>
+        <p:spPr>
+          <a:xfrm>
+            <a:off x="640080" y="3931920"/>
+            <a:ext cx="2057400" cy="1965960"/>
           </a:xfrm>
           <a:prstGeom prst="roundRect">
             <a:avLst>
-              <a:gd name="adj" fmla="val 6400"/>
+              <a:gd name="adj" fmla="val 3721"/>
             </a:avLst>
           </a:prstGeom>
           <a:solidFill>
@@ -9924,36 +12461,40 @@
           </a:effectLst>
         </p:spPr>
       </p:sp>
-      <p:sp>
-        <p:nvSpPr>
-          <p:cNvPr id="25" name="Shape 23"/>
-          <p:cNvSpPr/>
-          <p:nvPr/>
-        </p:nvSpPr>
-        <p:spPr>
-          <a:xfrm>
-            <a:off x="8275320" y="3355848"/>
-            <a:ext cx="457200" cy="457200"/>
-          </a:xfrm>
-          <a:prstGeom prst="ellipse">
-            <a:avLst/>
-          </a:prstGeom>
-          <a:solidFill>
-            <a:srgbClr val="1C7293"/>
-          </a:solidFill>
-          <a:ln/>
-        </p:spPr>
-      </p:sp>
-      <p:sp>
-        <p:nvSpPr>
-          <p:cNvPr id="26" name="Text 24"/>
-          <p:cNvSpPr/>
-          <p:nvPr/>
-        </p:nvSpPr>
-        <p:spPr>
-          <a:xfrm>
-            <a:off x="8275320" y="3355848"/>
-            <a:ext cx="457200" cy="457200"/>
+      <p:pic>
+        <p:nvPicPr>
+          <p:cNvPr id="20" name="Image 5" descr="/Users/boungoumbimigloirebryan/Desktop/ProjetCda/docs/diagrammes/images/06-classes.png">    </p:cNvPr>
+          <p:cNvPicPr>
+            <a:picLocks noChangeAspect="1"/>
+          </p:cNvPicPr>
+          <p:nvPr/>
+        </p:nvPicPr>
+        <p:blipFill>
+          <a:blip r:embed="rId6"/>
+          <a:stretch>
+            <a:fillRect/>
+          </a:stretch>
+        </p:blipFill>
+        <p:spPr>
+          <a:xfrm>
+            <a:off x="1099387" y="4041648"/>
+            <a:ext cx="1138786" cy="1417320"/>
+          </a:xfrm>
+          <a:prstGeom prst="rect">
+            <a:avLst/>
+          </a:prstGeom>
+        </p:spPr>
+      </p:pic>
+      <p:sp>
+        <p:nvSpPr>
+          <p:cNvPr id="21" name="Text 13"/>
+          <p:cNvSpPr/>
+          <p:nvPr/>
+        </p:nvSpPr>
+        <p:spPr>
+          <a:xfrm>
+            <a:off x="685800" y="5504688"/>
+            <a:ext cx="1965960" cy="320040"/>
           </a:xfrm>
           <a:prstGeom prst="rect">
             <a:avLst/>
@@ -9969,46 +12510,7 @@
               <a:buNone/>
             </a:pPr>
             <a:r>
-              <a:rPr lang="en-US" sz="1600" b="1" dirty="0">
-                <a:solidFill>
-                  <a:srgbClr val="FFFFFF"/>
-                </a:solidFill>
-                <a:latin typeface="Calibri" pitchFamily="34" charset="0"/>
-                <a:ea typeface="Calibri" pitchFamily="34" charset="-122"/>
-                <a:cs typeface="Calibri" pitchFamily="34" charset="-120"/>
-              </a:rPr>
-              <a:t>▦</a:t>
-            </a:r>
-            <a:endParaRPr lang="en-US" sz="1600" dirty="0"/>
-          </a:p>
-        </p:txBody>
-      </p:sp>
-      <p:sp>
-        <p:nvSpPr>
-          <p:cNvPr id="27" name="Text 25"/>
-          <p:cNvSpPr/>
-          <p:nvPr/>
-        </p:nvSpPr>
-        <p:spPr>
-          <a:xfrm>
-            <a:off x="8915400" y="3017520"/>
-            <a:ext cx="2468880" cy="1143000"/>
-          </a:xfrm>
-          <a:prstGeom prst="rect">
-            <a:avLst/>
-          </a:prstGeom>
-          <a:noFill/>
-          <a:ln/>
-        </p:spPr>
-        <p:txBody>
-          <a:bodyPr wrap="square" rtlCol="0" anchor="ctr"/>
-          <a:lstStyle/>
-          <a:p>
-            <a:pPr indent="0" marL="0">
-              <a:buNone/>
-            </a:pPr>
-            <a:r>
-              <a:rPr lang="en-US" sz="1400" b="1" dirty="0">
+              <a:rPr lang="en-US" sz="1100" b="1" dirty="0">
                 <a:solidFill>
                   <a:srgbClr val="1B2A3A"/>
                 </a:solidFill>
@@ -10016,88 +12518,80 @@
                 <a:ea typeface="Calibri" pitchFamily="34" charset="-122"/>
                 <a:cs typeface="Calibri" pitchFamily="34" charset="-120"/>
               </a:rPr>
-              <a:t>Composants &amp; déploiement</a:t>
-            </a:r>
-            <a:endParaRPr lang="en-US" sz="1400" dirty="0"/>
-          </a:p>
-        </p:txBody>
-      </p:sp>
-      <p:sp>
-        <p:nvSpPr>
-          <p:cNvPr id="28" name="Text 26"/>
-          <p:cNvSpPr/>
-          <p:nvPr/>
-        </p:nvSpPr>
-        <p:spPr>
-          <a:xfrm>
-            <a:off x="640080" y="4846320"/>
-            <a:ext cx="10881360" cy="457200"/>
-          </a:xfrm>
-          <a:prstGeom prst="rect">
-            <a:avLst/>
-          </a:prstGeom>
-          <a:noFill/>
-          <a:ln/>
-        </p:spPr>
-        <p:txBody>
-          <a:bodyPr wrap="square" rtlCol="0" anchor="ctr"/>
-          <a:lstStyle/>
-          <a:p>
-            <a:pPr indent="0" marL="0">
-              <a:buNone/>
-            </a:pPr>
-            <a:r>
-              <a:rPr lang="en-US" sz="1400" i="1" dirty="0">
-                <a:solidFill>
-                  <a:srgbClr val="5B6B7B"/>
-                </a:solidFill>
-                <a:latin typeface="Calibri" pitchFamily="34" charset="0"/>
-                <a:ea typeface="Calibri" pitchFamily="34" charset="-122"/>
-                <a:cs typeface="Calibri" pitchFamily="34" charset="-120"/>
-              </a:rPr>
-              <a:t>10 diagrammes produits — sources Mermaid / PlantUML dans le dépôt (docs/diagrammes/).</a:t>
-            </a:r>
-            <a:endParaRPr lang="en-US" sz="1400" dirty="0"/>
-          </a:p>
-        </p:txBody>
-      </p:sp>
-      <p:sp>
-        <p:nvSpPr>
-          <p:cNvPr id="29" name="Shape 27"/>
-          <p:cNvSpPr/>
-          <p:nvPr/>
-        </p:nvSpPr>
-        <p:spPr>
-          <a:xfrm>
-            <a:off x="640080" y="5349240"/>
-            <a:ext cx="10881360" cy="1005840"/>
+              <a:t>Classes</a:t>
+            </a:r>
+            <a:endParaRPr lang="en-US" sz="1100" dirty="0"/>
+          </a:p>
+        </p:txBody>
+      </p:sp>
+      <p:sp>
+        <p:nvSpPr>
+          <p:cNvPr id="22" name="Shape 14"/>
+          <p:cNvSpPr/>
+          <p:nvPr/>
+        </p:nvSpPr>
+        <p:spPr>
+          <a:xfrm>
+            <a:off x="2852928" y="3931920"/>
+            <a:ext cx="2057400" cy="1965960"/>
           </a:xfrm>
           <a:prstGeom prst="roundRect">
             <a:avLst>
-              <a:gd name="adj" fmla="val 5455"/>
+              <a:gd name="adj" fmla="val 3721"/>
             </a:avLst>
           </a:prstGeom>
           <a:solidFill>
-            <a:srgbClr val="F4F8FB"/>
+            <a:srgbClr val="EAF1F6"/>
           </a:solidFill>
-          <a:ln w="19050">
+          <a:ln w="12700">
             <a:solidFill>
-              <a:srgbClr val="0B5394"/>
+              <a:srgbClr val="DCE6EE"/>
             </a:solidFill>
-            <a:prstDash val="dash"/>
+            <a:prstDash val="solid"/>
           </a:ln>
-        </p:spPr>
-      </p:sp>
-      <p:sp>
-        <p:nvSpPr>
-          <p:cNvPr id="30" name="Text 28"/>
-          <p:cNvSpPr/>
-          <p:nvPr/>
-        </p:nvSpPr>
-        <p:spPr>
-          <a:xfrm>
-            <a:off x="822960" y="5349240"/>
-            <a:ext cx="10515600" cy="1005840"/>
+          <a:effectLst>
+            <a:outerShdw sx="100000" sy="100000" kx="0" ky="0" algn="bl" rotWithShape="0" blurRad="76200" dist="25400" dir="5400000">
+              <a:srgbClr val="B9C6D2">
+                <a:alpha val="30000"/>
+              </a:srgbClr>
+            </a:outerShdw>
+          </a:effectLst>
+        </p:spPr>
+      </p:sp>
+      <p:pic>
+        <p:nvPicPr>
+          <p:cNvPr id="23" name="Image 6" descr="/Users/boungoumbimigloirebryan/Desktop/ProjetCda/docs/diagrammes/images/07-mcd.png">    </p:cNvPr>
+          <p:cNvPicPr>
+            <a:picLocks noChangeAspect="1"/>
+          </p:cNvPicPr>
+          <p:nvPr/>
+        </p:nvPicPr>
+        <p:blipFill>
+          <a:blip r:embed="rId7"/>
+          <a:stretch>
+            <a:fillRect/>
+          </a:stretch>
+        </p:blipFill>
+        <p:spPr>
+          <a:xfrm>
+            <a:off x="3409358" y="4041648"/>
+            <a:ext cx="944540" cy="1417320"/>
+          </a:xfrm>
+          <a:prstGeom prst="rect">
+            <a:avLst/>
+          </a:prstGeom>
+        </p:spPr>
+      </p:pic>
+      <p:sp>
+        <p:nvSpPr>
+          <p:cNvPr id="24" name="Text 15"/>
+          <p:cNvSpPr/>
+          <p:nvPr/>
+        </p:nvSpPr>
+        <p:spPr>
+          <a:xfrm>
+            <a:off x="2898648" y="5504688"/>
+            <a:ext cx="1965960" cy="320040"/>
           </a:xfrm>
           <a:prstGeom prst="rect">
             <a:avLst/>
@@ -10113,22 +12607,337 @@
               <a:buNone/>
             </a:pPr>
             <a:r>
-              <a:rPr lang="en-US" sz="1400" b="1" dirty="0">
-                <a:solidFill>
-                  <a:srgbClr val="0B5394"/>
-                </a:solidFill>
-                <a:latin typeface="Calibri" pitchFamily="34" charset="0"/>
-                <a:ea typeface="Calibri" pitchFamily="34" charset="-122"/>
-                <a:cs typeface="Calibri" pitchFamily="34" charset="-120"/>
-              </a:rPr>
-              <a:t>📷 CAPTURE D'ÉCRAN À INSÉRER
-</a:t>
-            </a:r>
+              <a:rPr lang="en-US" sz="1100" b="1" dirty="0">
+                <a:solidFill>
+                  <a:srgbClr val="1B2A3A"/>
+                </a:solidFill>
+                <a:latin typeface="Calibri" pitchFamily="34" charset="0"/>
+                <a:ea typeface="Calibri" pitchFamily="34" charset="-122"/>
+                <a:cs typeface="Calibri" pitchFamily="34" charset="-120"/>
+              </a:rPr>
+              <a:t>MCD / Merise</a:t>
+            </a:r>
+            <a:endParaRPr lang="en-US" sz="1100" dirty="0"/>
+          </a:p>
+        </p:txBody>
+      </p:sp>
+      <p:sp>
+        <p:nvSpPr>
+          <p:cNvPr id="25" name="Shape 16"/>
+          <p:cNvSpPr/>
+          <p:nvPr/>
+        </p:nvSpPr>
+        <p:spPr>
+          <a:xfrm>
+            <a:off x="5065776" y="3931920"/>
+            <a:ext cx="2057400" cy="1965960"/>
+          </a:xfrm>
+          <a:prstGeom prst="roundRect">
+            <a:avLst>
+              <a:gd name="adj" fmla="val 3721"/>
+            </a:avLst>
+          </a:prstGeom>
+          <a:solidFill>
+            <a:srgbClr val="EAF1F6"/>
+          </a:solidFill>
+          <a:ln w="12700">
+            <a:solidFill>
+              <a:srgbClr val="DCE6EE"/>
+            </a:solidFill>
+            <a:prstDash val="solid"/>
+          </a:ln>
+          <a:effectLst>
+            <a:outerShdw sx="100000" sy="100000" kx="0" ky="0" algn="bl" rotWithShape="0" blurRad="76200" dist="25400" dir="5400000">
+              <a:srgbClr val="B9C6D2">
+                <a:alpha val="30000"/>
+              </a:srgbClr>
+            </a:outerShdw>
+          </a:effectLst>
+        </p:spPr>
+      </p:sp>
+      <p:pic>
+        <p:nvPicPr>
+          <p:cNvPr id="26" name="Image 7" descr="/Users/boungoumbimigloirebryan/Desktop/ProjetCda/docs/diagrammes/images/08-objets.png">    </p:cNvPr>
+          <p:cNvPicPr>
+            <a:picLocks noChangeAspect="1"/>
+          </p:cNvPicPr>
+          <p:nvPr/>
+        </p:nvPicPr>
+        <p:blipFill>
+          <a:blip r:embed="rId8"/>
+          <a:stretch>
+            <a:fillRect/>
+          </a:stretch>
+        </p:blipFill>
+        <p:spPr>
+          <a:xfrm>
+            <a:off x="5265889" y="4041648"/>
+            <a:ext cx="1657174" cy="1417320"/>
+          </a:xfrm>
+          <a:prstGeom prst="rect">
+            <a:avLst/>
+          </a:prstGeom>
+        </p:spPr>
+      </p:pic>
+      <p:sp>
+        <p:nvSpPr>
+          <p:cNvPr id="27" name="Text 17"/>
+          <p:cNvSpPr/>
+          <p:nvPr/>
+        </p:nvSpPr>
+        <p:spPr>
+          <a:xfrm>
+            <a:off x="5111496" y="5504688"/>
+            <a:ext cx="1965960" cy="320040"/>
+          </a:xfrm>
+          <a:prstGeom prst="rect">
+            <a:avLst/>
+          </a:prstGeom>
+          <a:noFill/>
+          <a:ln/>
+        </p:spPr>
+        <p:txBody>
+          <a:bodyPr wrap="square" rtlCol="0" anchor="ctr"/>
+          <a:lstStyle/>
+          <a:p>
             <a:pPr algn="ctr" indent="0" marL="0">
               <a:buNone/>
             </a:pPr>
             <a:r>
-              <a:rPr lang="en-US" sz="1100" i="1" dirty="0">
+              <a:rPr lang="en-US" sz="1100" b="1" dirty="0">
+                <a:solidFill>
+                  <a:srgbClr val="1B2A3A"/>
+                </a:solidFill>
+                <a:latin typeface="Calibri" pitchFamily="34" charset="0"/>
+                <a:ea typeface="Calibri" pitchFamily="34" charset="-122"/>
+                <a:cs typeface="Calibri" pitchFamily="34" charset="-120"/>
+              </a:rPr>
+              <a:t>Objets</a:t>
+            </a:r>
+            <a:endParaRPr lang="en-US" sz="1100" dirty="0"/>
+          </a:p>
+        </p:txBody>
+      </p:sp>
+      <p:sp>
+        <p:nvSpPr>
+          <p:cNvPr id="28" name="Shape 18"/>
+          <p:cNvSpPr/>
+          <p:nvPr/>
+        </p:nvSpPr>
+        <p:spPr>
+          <a:xfrm>
+            <a:off x="7278624" y="3931920"/>
+            <a:ext cx="2057400" cy="1965960"/>
+          </a:xfrm>
+          <a:prstGeom prst="roundRect">
+            <a:avLst>
+              <a:gd name="adj" fmla="val 3721"/>
+            </a:avLst>
+          </a:prstGeom>
+          <a:solidFill>
+            <a:srgbClr val="EAF1F6"/>
+          </a:solidFill>
+          <a:ln w="12700">
+            <a:solidFill>
+              <a:srgbClr val="DCE6EE"/>
+            </a:solidFill>
+            <a:prstDash val="solid"/>
+          </a:ln>
+          <a:effectLst>
+            <a:outerShdw sx="100000" sy="100000" kx="0" ky="0" algn="bl" rotWithShape="0" blurRad="76200" dist="25400" dir="5400000">
+              <a:srgbClr val="B9C6D2">
+                <a:alpha val="30000"/>
+              </a:srgbClr>
+            </a:outerShdw>
+          </a:effectLst>
+        </p:spPr>
+      </p:sp>
+      <p:pic>
+        <p:nvPicPr>
+          <p:cNvPr id="29" name="Image 8" descr="/Users/boungoumbimigloirebryan/Desktop/ProjetCda/docs/diagrammes/images/09-composants.png">    </p:cNvPr>
+          <p:cNvPicPr>
+            <a:picLocks noChangeAspect="1"/>
+          </p:cNvPicPr>
+          <p:nvPr/>
+        </p:nvPicPr>
+        <p:blipFill>
+          <a:blip r:embed="rId9"/>
+          <a:stretch>
+            <a:fillRect/>
+          </a:stretch>
+        </p:blipFill>
+        <p:spPr>
+          <a:xfrm>
+            <a:off x="7506348" y="4041648"/>
+            <a:ext cx="1601952" cy="1417320"/>
+          </a:xfrm>
+          <a:prstGeom prst="rect">
+            <a:avLst/>
+          </a:prstGeom>
+        </p:spPr>
+      </p:pic>
+      <p:sp>
+        <p:nvSpPr>
+          <p:cNvPr id="30" name="Text 19"/>
+          <p:cNvSpPr/>
+          <p:nvPr/>
+        </p:nvSpPr>
+        <p:spPr>
+          <a:xfrm>
+            <a:off x="7324344" y="5504688"/>
+            <a:ext cx="1965960" cy="320040"/>
+          </a:xfrm>
+          <a:prstGeom prst="rect">
+            <a:avLst/>
+          </a:prstGeom>
+          <a:noFill/>
+          <a:ln/>
+        </p:spPr>
+        <p:txBody>
+          <a:bodyPr wrap="square" rtlCol="0" anchor="ctr"/>
+          <a:lstStyle/>
+          <a:p>
+            <a:pPr algn="ctr" indent="0" marL="0">
+              <a:buNone/>
+            </a:pPr>
+            <a:r>
+              <a:rPr lang="en-US" sz="1100" b="1" dirty="0">
+                <a:solidFill>
+                  <a:srgbClr val="1B2A3A"/>
+                </a:solidFill>
+                <a:latin typeface="Calibri" pitchFamily="34" charset="0"/>
+                <a:ea typeface="Calibri" pitchFamily="34" charset="-122"/>
+                <a:cs typeface="Calibri" pitchFamily="34" charset="-120"/>
+              </a:rPr>
+              <a:t>Composants</a:t>
+            </a:r>
+            <a:endParaRPr lang="en-US" sz="1100" dirty="0"/>
+          </a:p>
+        </p:txBody>
+      </p:sp>
+      <p:sp>
+        <p:nvSpPr>
+          <p:cNvPr id="31" name="Shape 20"/>
+          <p:cNvSpPr/>
+          <p:nvPr/>
+        </p:nvSpPr>
+        <p:spPr>
+          <a:xfrm>
+            <a:off x="9491472" y="3931920"/>
+            <a:ext cx="2057400" cy="1965960"/>
+          </a:xfrm>
+          <a:prstGeom prst="roundRect">
+            <a:avLst>
+              <a:gd name="adj" fmla="val 3721"/>
+            </a:avLst>
+          </a:prstGeom>
+          <a:solidFill>
+            <a:srgbClr val="EAF1F6"/>
+          </a:solidFill>
+          <a:ln w="12700">
+            <a:solidFill>
+              <a:srgbClr val="DCE6EE"/>
+            </a:solidFill>
+            <a:prstDash val="solid"/>
+          </a:ln>
+          <a:effectLst>
+            <a:outerShdw sx="100000" sy="100000" kx="0" ky="0" algn="bl" rotWithShape="0" blurRad="76200" dist="25400" dir="5400000">
+              <a:srgbClr val="B9C6D2">
+                <a:alpha val="30000"/>
+              </a:srgbClr>
+            </a:outerShdw>
+          </a:effectLst>
+        </p:spPr>
+      </p:sp>
+      <p:pic>
+        <p:nvPicPr>
+          <p:cNvPr id="32" name="Image 9" descr="/Users/boungoumbimigloirebryan/Desktop/ProjetCda/docs/diagrammes/images/10-deploiement.png">    </p:cNvPr>
+          <p:cNvPicPr>
+            <a:picLocks noChangeAspect="1"/>
+          </p:cNvPicPr>
+          <p:nvPr/>
+        </p:nvPicPr>
+        <p:blipFill>
+          <a:blip r:embed="rId10"/>
+          <a:stretch>
+            <a:fillRect/>
+          </a:stretch>
+        </p:blipFill>
+        <p:spPr>
+          <a:xfrm>
+            <a:off x="10252638" y="4041648"/>
+            <a:ext cx="535069" cy="1417320"/>
+          </a:xfrm>
+          <a:prstGeom prst="rect">
+            <a:avLst/>
+          </a:prstGeom>
+        </p:spPr>
+      </p:pic>
+      <p:sp>
+        <p:nvSpPr>
+          <p:cNvPr id="33" name="Text 21"/>
+          <p:cNvSpPr/>
+          <p:nvPr/>
+        </p:nvSpPr>
+        <p:spPr>
+          <a:xfrm>
+            <a:off x="9537192" y="5504688"/>
+            <a:ext cx="1965960" cy="320040"/>
+          </a:xfrm>
+          <a:prstGeom prst="rect">
+            <a:avLst/>
+          </a:prstGeom>
+          <a:noFill/>
+          <a:ln/>
+        </p:spPr>
+        <p:txBody>
+          <a:bodyPr wrap="square" rtlCol="0" anchor="ctr"/>
+          <a:lstStyle/>
+          <a:p>
+            <a:pPr algn="ctr" indent="0" marL="0">
+              <a:buNone/>
+            </a:pPr>
+            <a:r>
+              <a:rPr lang="en-US" sz="1100" b="1" dirty="0">
+                <a:solidFill>
+                  <a:srgbClr val="1B2A3A"/>
+                </a:solidFill>
+                <a:latin typeface="Calibri" pitchFamily="34" charset="0"/>
+                <a:ea typeface="Calibri" pitchFamily="34" charset="-122"/>
+                <a:cs typeface="Calibri" pitchFamily="34" charset="-120"/>
+              </a:rPr>
+              <a:t>Déploiement</a:t>
+            </a:r>
+            <a:endParaRPr lang="en-US" sz="1100" dirty="0"/>
+          </a:p>
+        </p:txBody>
+      </p:sp>
+      <p:sp>
+        <p:nvSpPr>
+          <p:cNvPr id="34" name="Text 22"/>
+          <p:cNvSpPr/>
+          <p:nvPr/>
+        </p:nvSpPr>
+        <p:spPr>
+          <a:xfrm>
+            <a:off x="640080" y="6263640"/>
+            <a:ext cx="10881360" cy="365760"/>
+          </a:xfrm>
+          <a:prstGeom prst="rect">
+            <a:avLst/>
+          </a:prstGeom>
+          <a:noFill/>
+          <a:ln/>
+        </p:spPr>
+        <p:txBody>
+          <a:bodyPr wrap="square" rtlCol="0" anchor="ctr"/>
+          <a:lstStyle/>
+          <a:p>
+            <a:pPr indent="0" marL="0">
+              <a:buNone/>
+            </a:pPr>
+            <a:r>
+              <a:rPr lang="en-US" sz="1200" i="1" dirty="0">
                 <a:solidFill>
                   <a:srgbClr val="5B6B7B"/>
                 </a:solidFill>
@@ -10136,9 +12945,9 @@
                 <a:ea typeface="Calibri" pitchFamily="34" charset="-122"/>
                 <a:cs typeface="Calibri" pitchFamily="34" charset="-120"/>
               </a:rPr>
-              <a:t>Conseil : insérez ici votre diagramme de classes ou votre MCD (image exportée).</a:t>
-            </a:r>
-            <a:endParaRPr lang="en-US" sz="1400" dirty="0"/>
+              <a:t>Sources Mermaid / PlantUML versionnées dans le dépôt (docs/diagrammes/). Diagrammes en grand sur les slides suivantes.</a:t>
+            </a:r>
+            <a:endParaRPr lang="en-US" sz="1200" dirty="0"/>
           </a:p>
         </p:txBody>
       </p:sp>
@@ -10207,7 +13016,7 @@
                 <a:ea typeface="Calibri" pitchFamily="34" charset="-122"/>
                 <a:cs typeface="Calibri" pitchFamily="34" charset="-120"/>
               </a:rPr>
-              <a:t>06 · CŒUR MÉTIER</a:t>
+              <a:t>05 · CONCEPTION</a:t>
             </a:r>
             <a:endParaRPr lang="en-US" sz="1200" dirty="0"/>
           </a:p>
@@ -10246,631 +13055,36 @@
                 <a:ea typeface="Cambria" pitchFamily="34" charset="-122"/>
                 <a:cs typeface="Cambria" pitchFamily="34" charset="-120"/>
               </a:rPr>
-              <a:t>Règles métier &amp; machine à états</a:t>
+              <a:t>Diagramme de cas d'utilisation</a:t>
             </a:r>
             <a:endParaRPr lang="en-US" sz="3000" dirty="0"/>
           </a:p>
         </p:txBody>
       </p:sp>
-      <p:sp>
-        <p:nvSpPr>
-          <p:cNvPr id="4" name="Shape 2"/>
-          <p:cNvSpPr/>
-          <p:nvPr/>
-        </p:nvSpPr>
-        <p:spPr>
-          <a:xfrm>
-            <a:off x="640080" y="1554480"/>
-            <a:ext cx="5394960" cy="4297680"/>
-          </a:xfrm>
-          <a:prstGeom prst="roundRect">
-            <a:avLst>
-              <a:gd name="adj" fmla="val 1702"/>
-            </a:avLst>
-          </a:prstGeom>
-          <a:solidFill>
-            <a:srgbClr val="EAF1F6"/>
-          </a:solidFill>
-          <a:ln w="12700">
-            <a:solidFill>
-              <a:srgbClr val="DCE6EE"/>
-            </a:solidFill>
-            <a:prstDash val="solid"/>
-          </a:ln>
-          <a:effectLst>
-            <a:outerShdw sx="100000" sy="100000" kx="0" ky="0" algn="bl" rotWithShape="0" blurRad="76200" dist="25400" dir="5400000">
-              <a:srgbClr val="B9C6D2">
-                <a:alpha val="30000"/>
-              </a:srgbClr>
-            </a:outerShdw>
-          </a:effectLst>
-        </p:spPr>
-      </p:sp>
-      <p:sp>
-        <p:nvSpPr>
-          <p:cNvPr id="5" name="Text 3"/>
-          <p:cNvSpPr/>
-          <p:nvPr/>
-        </p:nvSpPr>
-        <p:spPr>
-          <a:xfrm>
-            <a:off x="914400" y="1783080"/>
-            <a:ext cx="4846320" cy="365760"/>
-          </a:xfrm>
-          <a:prstGeom prst="rect">
-            <a:avLst/>
-          </a:prstGeom>
-          <a:noFill/>
-          <a:ln/>
-        </p:spPr>
-        <p:txBody>
-          <a:bodyPr wrap="square" rtlCol="0" anchor="ctr"/>
-          <a:lstStyle/>
-          <a:p>
-            <a:pPr indent="0" marL="0">
-              <a:buNone/>
-            </a:pPr>
-            <a:r>
-              <a:rPr lang="en-US" sz="1600" b="1" dirty="0">
-                <a:solidFill>
-                  <a:srgbClr val="0B5394"/>
-                </a:solidFill>
-                <a:latin typeface="Cambria" pitchFamily="34" charset="0"/>
-                <a:ea typeface="Cambria" pitchFamily="34" charset="-122"/>
-                <a:cs typeface="Cambria" pitchFamily="34" charset="-120"/>
-              </a:rPr>
-              <a:t>Machine à états d'une demande</a:t>
-            </a:r>
-            <a:endParaRPr lang="en-US" sz="1600" dirty="0"/>
-          </a:p>
-        </p:txBody>
-      </p:sp>
-      <p:sp>
-        <p:nvSpPr>
-          <p:cNvPr id="6" name="Shape 4"/>
-          <p:cNvSpPr/>
-          <p:nvPr/>
-        </p:nvSpPr>
-        <p:spPr>
-          <a:xfrm>
-            <a:off x="1005840" y="2286000"/>
-            <a:ext cx="2194560" cy="548640"/>
-          </a:xfrm>
-          <a:prstGeom prst="roundRect">
-            <a:avLst>
-              <a:gd name="adj" fmla="val 50000"/>
-            </a:avLst>
-          </a:prstGeom>
-          <a:solidFill>
-            <a:srgbClr val="13A89E"/>
-          </a:solidFill>
-          <a:ln/>
-        </p:spPr>
-      </p:sp>
-      <p:sp>
-        <p:nvSpPr>
-          <p:cNvPr id="7" name="Text 5"/>
-          <p:cNvSpPr/>
-          <p:nvPr/>
-        </p:nvSpPr>
-        <p:spPr>
-          <a:xfrm>
-            <a:off x="1005840" y="2286000"/>
-            <a:ext cx="2194560" cy="548640"/>
-          </a:xfrm>
-          <a:prstGeom prst="rect">
-            <a:avLst/>
-          </a:prstGeom>
-          <a:noFill/>
-          <a:ln/>
-        </p:spPr>
-        <p:txBody>
-          <a:bodyPr wrap="square" rtlCol="0" anchor="ctr"/>
-          <a:lstStyle/>
-          <a:p>
-            <a:pPr algn="ctr" indent="0" marL="0">
-              <a:buNone/>
-            </a:pPr>
-            <a:r>
-              <a:rPr lang="en-US" sz="1400" b="1" dirty="0">
-                <a:solidFill>
-                  <a:srgbClr val="FFFFFF"/>
-                </a:solidFill>
-                <a:latin typeface="Calibri" pitchFamily="34" charset="0"/>
-                <a:ea typeface="Calibri" pitchFamily="34" charset="-122"/>
-                <a:cs typeface="Calibri" pitchFamily="34" charset="-120"/>
-              </a:rPr>
-              <a:t>SOUMISE</a:t>
-            </a:r>
-            <a:endParaRPr lang="en-US" sz="1400" dirty="0"/>
-          </a:p>
-        </p:txBody>
-      </p:sp>
-      <p:sp>
-        <p:nvSpPr>
-          <p:cNvPr id="8" name="Shape 6"/>
-          <p:cNvSpPr/>
-          <p:nvPr/>
-        </p:nvSpPr>
-        <p:spPr>
-          <a:xfrm>
-            <a:off x="1005840" y="3127248"/>
-            <a:ext cx="2194560" cy="548640"/>
-          </a:xfrm>
-          <a:prstGeom prst="roundRect">
-            <a:avLst>
-              <a:gd name="adj" fmla="val 50000"/>
-            </a:avLst>
-          </a:prstGeom>
-          <a:solidFill>
-            <a:srgbClr val="1E7E4F"/>
-          </a:solidFill>
-          <a:ln/>
-        </p:spPr>
-      </p:sp>
-      <p:sp>
-        <p:nvSpPr>
-          <p:cNvPr id="9" name="Text 7"/>
-          <p:cNvSpPr/>
-          <p:nvPr/>
-        </p:nvSpPr>
-        <p:spPr>
-          <a:xfrm>
-            <a:off x="1005840" y="3127248"/>
-            <a:ext cx="2194560" cy="548640"/>
-          </a:xfrm>
-          <a:prstGeom prst="rect">
-            <a:avLst/>
-          </a:prstGeom>
-          <a:noFill/>
-          <a:ln/>
-        </p:spPr>
-        <p:txBody>
-          <a:bodyPr wrap="square" rtlCol="0" anchor="ctr"/>
-          <a:lstStyle/>
-          <a:p>
-            <a:pPr algn="ctr" indent="0" marL="0">
-              <a:buNone/>
-            </a:pPr>
-            <a:r>
-              <a:rPr lang="en-US" sz="1400" b="1" dirty="0">
-                <a:solidFill>
-                  <a:srgbClr val="FFFFFF"/>
-                </a:solidFill>
-                <a:latin typeface="Calibri" pitchFamily="34" charset="0"/>
-                <a:ea typeface="Calibri" pitchFamily="34" charset="-122"/>
-                <a:cs typeface="Calibri" pitchFamily="34" charset="-120"/>
-              </a:rPr>
-              <a:t>VALIDÉE</a:t>
-            </a:r>
-            <a:endParaRPr lang="en-US" sz="1400" dirty="0"/>
-          </a:p>
-        </p:txBody>
-      </p:sp>
-      <p:sp>
-        <p:nvSpPr>
-          <p:cNvPr id="10" name="Shape 8"/>
-          <p:cNvSpPr/>
-          <p:nvPr/>
-        </p:nvSpPr>
-        <p:spPr>
-          <a:xfrm>
-            <a:off x="1005840" y="3968496"/>
-            <a:ext cx="2194560" cy="548640"/>
-          </a:xfrm>
-          <a:prstGeom prst="roundRect">
-            <a:avLst>
-              <a:gd name="adj" fmla="val 50000"/>
-            </a:avLst>
-          </a:prstGeom>
-          <a:solidFill>
-            <a:srgbClr val="B23A48"/>
-          </a:solidFill>
-          <a:ln/>
-        </p:spPr>
-      </p:sp>
-      <p:sp>
-        <p:nvSpPr>
-          <p:cNvPr id="11" name="Text 9"/>
-          <p:cNvSpPr/>
-          <p:nvPr/>
-        </p:nvSpPr>
-        <p:spPr>
-          <a:xfrm>
-            <a:off x="1005840" y="3968496"/>
-            <a:ext cx="2194560" cy="548640"/>
-          </a:xfrm>
-          <a:prstGeom prst="rect">
-            <a:avLst/>
-          </a:prstGeom>
-          <a:noFill/>
-          <a:ln/>
-        </p:spPr>
-        <p:txBody>
-          <a:bodyPr wrap="square" rtlCol="0" anchor="ctr"/>
-          <a:lstStyle/>
-          <a:p>
-            <a:pPr algn="ctr" indent="0" marL="0">
-              <a:buNone/>
-            </a:pPr>
-            <a:r>
-              <a:rPr lang="en-US" sz="1400" b="1" dirty="0">
-                <a:solidFill>
-                  <a:srgbClr val="FFFFFF"/>
-                </a:solidFill>
-                <a:latin typeface="Calibri" pitchFamily="34" charset="0"/>
-                <a:ea typeface="Calibri" pitchFamily="34" charset="-122"/>
-                <a:cs typeface="Calibri" pitchFamily="34" charset="-120"/>
-              </a:rPr>
-              <a:t>REFUSÉE</a:t>
-            </a:r>
-            <a:endParaRPr lang="en-US" sz="1400" dirty="0"/>
-          </a:p>
-        </p:txBody>
-      </p:sp>
-      <p:sp>
-        <p:nvSpPr>
-          <p:cNvPr id="12" name="Shape 10"/>
-          <p:cNvSpPr/>
-          <p:nvPr/>
-        </p:nvSpPr>
-        <p:spPr>
-          <a:xfrm>
-            <a:off x="1005840" y="4809744"/>
-            <a:ext cx="2194560" cy="548640"/>
-          </a:xfrm>
-          <a:prstGeom prst="roundRect">
-            <a:avLst>
-              <a:gd name="adj" fmla="val 50000"/>
-            </a:avLst>
-          </a:prstGeom>
-          <a:solidFill>
-            <a:srgbClr val="5B6B7B"/>
-          </a:solidFill>
-          <a:ln/>
-        </p:spPr>
-      </p:sp>
-      <p:sp>
-        <p:nvSpPr>
-          <p:cNvPr id="13" name="Text 11"/>
-          <p:cNvSpPr/>
-          <p:nvPr/>
-        </p:nvSpPr>
-        <p:spPr>
-          <a:xfrm>
-            <a:off x="1005840" y="4809744"/>
-            <a:ext cx="2194560" cy="548640"/>
-          </a:xfrm>
-          <a:prstGeom prst="rect">
-            <a:avLst/>
-          </a:prstGeom>
-          <a:noFill/>
-          <a:ln/>
-        </p:spPr>
-        <p:txBody>
-          <a:bodyPr wrap="square" rtlCol="0" anchor="ctr"/>
-          <a:lstStyle/>
-          <a:p>
-            <a:pPr algn="ctr" indent="0" marL="0">
-              <a:buNone/>
-            </a:pPr>
-            <a:r>
-              <a:rPr lang="en-US" sz="1400" b="1" dirty="0">
-                <a:solidFill>
-                  <a:srgbClr val="FFFFFF"/>
-                </a:solidFill>
-                <a:latin typeface="Calibri" pitchFamily="34" charset="0"/>
-                <a:ea typeface="Calibri" pitchFamily="34" charset="-122"/>
-                <a:cs typeface="Calibri" pitchFamily="34" charset="-120"/>
-              </a:rPr>
-              <a:t>ANNULÉE</a:t>
-            </a:r>
-            <a:endParaRPr lang="en-US" sz="1400" dirty="0"/>
-          </a:p>
-        </p:txBody>
-      </p:sp>
-      <p:sp>
-        <p:nvSpPr>
-          <p:cNvPr id="14" name="Text 12"/>
-          <p:cNvSpPr/>
-          <p:nvPr/>
-        </p:nvSpPr>
-        <p:spPr>
-          <a:xfrm>
-            <a:off x="3383280" y="2331720"/>
-            <a:ext cx="2468880" cy="3017520"/>
-          </a:xfrm>
-          <a:prstGeom prst="rect">
-            <a:avLst/>
-          </a:prstGeom>
-          <a:noFill/>
-          <a:ln/>
-        </p:spPr>
-        <p:txBody>
-          <a:bodyPr wrap="square" rtlCol="0" anchor="t"/>
-          <a:lstStyle/>
-          <a:p>
-            <a:pPr indent="0" marL="0">
-              <a:lnSpc>
-                <a:spcPct val="220000"/>
-              </a:lnSpc>
-              <a:buNone/>
-            </a:pPr>
-            <a:r>
-              <a:rPr lang="en-US" sz="1200" dirty="0">
-                <a:solidFill>
-                  <a:srgbClr val="1B2A3A"/>
-                </a:solidFill>
-                <a:latin typeface="Calibri" pitchFamily="34" charset="0"/>
-                <a:ea typeface="Calibri" pitchFamily="34" charset="-122"/>
-                <a:cs typeface="Calibri" pitchFamily="34" charset="-120"/>
-              </a:rPr>
-              <a:t>→ valide / −solde</a:t>
-            </a:r>
-            <a:endParaRPr lang="en-US" sz="1200" dirty="0"/>
-          </a:p>
-          <a:p>
-            <a:pPr indent="0" marL="0">
-              <a:lnSpc>
-                <a:spcPct val="220000"/>
-              </a:lnSpc>
-              <a:buNone/>
-            </a:pPr>
-            <a:r>
-              <a:rPr lang="en-US" sz="1200" dirty="0">
-                <a:solidFill>
-                  <a:srgbClr val="1B2A3A"/>
-                </a:solidFill>
-                <a:latin typeface="Calibri" pitchFamily="34" charset="0"/>
-                <a:ea typeface="Calibri" pitchFamily="34" charset="-122"/>
-                <a:cs typeface="Calibri" pitchFamily="34" charset="-120"/>
-              </a:rPr>
-              <a:t>→ refuse</a:t>
-            </a:r>
-            <a:endParaRPr lang="en-US" sz="1200" dirty="0"/>
-          </a:p>
-          <a:p>
-            <a:pPr indent="0" marL="0">
-              <a:lnSpc>
-                <a:spcPct val="220000"/>
-              </a:lnSpc>
-              <a:buNone/>
-            </a:pPr>
-            <a:r>
-              <a:rPr lang="en-US" sz="1200" dirty="0">
-                <a:solidFill>
-                  <a:srgbClr val="1B2A3A"/>
-                </a:solidFill>
-                <a:latin typeface="Calibri" pitchFamily="34" charset="0"/>
-                <a:ea typeface="Calibri" pitchFamily="34" charset="-122"/>
-                <a:cs typeface="Calibri" pitchFamily="34" charset="-120"/>
-              </a:rPr>
-              <a:t>→ annule / +solde</a:t>
-            </a:r>
-            <a:endParaRPr lang="en-US" sz="1200" dirty="0"/>
-          </a:p>
-        </p:txBody>
-      </p:sp>
-      <p:sp>
-        <p:nvSpPr>
-          <p:cNvPr id="15" name="Shape 13"/>
-          <p:cNvSpPr/>
-          <p:nvPr/>
-        </p:nvSpPr>
-        <p:spPr>
-          <a:xfrm>
-            <a:off x="6309360" y="1554480"/>
-            <a:ext cx="5212080" cy="4297680"/>
-          </a:xfrm>
-          <a:prstGeom prst="roundRect">
-            <a:avLst>
-              <a:gd name="adj" fmla="val 1702"/>
-            </a:avLst>
-          </a:prstGeom>
-          <a:solidFill>
-            <a:srgbClr val="EAF1F6"/>
-          </a:solidFill>
-          <a:ln w="12700">
-            <a:solidFill>
-              <a:srgbClr val="DCE6EE"/>
-            </a:solidFill>
-            <a:prstDash val="solid"/>
-          </a:ln>
-          <a:effectLst>
-            <a:outerShdw sx="100000" sy="100000" kx="0" ky="0" algn="bl" rotWithShape="0" blurRad="76200" dist="25400" dir="5400000">
-              <a:srgbClr val="B9C6D2">
-                <a:alpha val="30000"/>
-              </a:srgbClr>
-            </a:outerShdw>
-          </a:effectLst>
-        </p:spPr>
-      </p:sp>
-      <p:sp>
-        <p:nvSpPr>
-          <p:cNvPr id="16" name="Text 14"/>
-          <p:cNvSpPr/>
-          <p:nvPr/>
-        </p:nvSpPr>
-        <p:spPr>
-          <a:xfrm>
-            <a:off x="6583680" y="1783080"/>
-            <a:ext cx="4663440" cy="365760"/>
-          </a:xfrm>
-          <a:prstGeom prst="rect">
-            <a:avLst/>
-          </a:prstGeom>
-          <a:noFill/>
-          <a:ln/>
-        </p:spPr>
-        <p:txBody>
-          <a:bodyPr wrap="square" rtlCol="0" anchor="ctr"/>
-          <a:lstStyle/>
-          <a:p>
-            <a:pPr indent="0" marL="0">
-              <a:buNone/>
-            </a:pPr>
-            <a:r>
-              <a:rPr lang="en-US" sz="1600" b="1" dirty="0">
-                <a:solidFill>
-                  <a:srgbClr val="0B5394"/>
-                </a:solidFill>
-                <a:latin typeface="Cambria" pitchFamily="34" charset="0"/>
-                <a:ea typeface="Cambria" pitchFamily="34" charset="-122"/>
-                <a:cs typeface="Cambria" pitchFamily="34" charset="-120"/>
-              </a:rPr>
-              <a:t>Logique testable &amp; isolée</a:t>
-            </a:r>
-            <a:endParaRPr lang="en-US" sz="1600" dirty="0"/>
-          </a:p>
-        </p:txBody>
-      </p:sp>
-      <p:sp>
-        <p:nvSpPr>
-          <p:cNvPr id="17" name="Text 15"/>
-          <p:cNvSpPr/>
-          <p:nvPr/>
-        </p:nvSpPr>
-        <p:spPr>
-          <a:xfrm>
-            <a:off x="6583680" y="2286000"/>
-            <a:ext cx="4663440" cy="3383280"/>
-          </a:xfrm>
-          <a:prstGeom prst="rect">
-            <a:avLst/>
-          </a:prstGeom>
-          <a:noFill/>
-          <a:ln/>
-        </p:spPr>
-        <p:txBody>
-          <a:bodyPr wrap="square" rtlCol="0" anchor="t"/>
-          <a:lstStyle/>
-          <a:p>
-            <a:pPr indent="0" marL="0">
-              <a:lnSpc>
-                <a:spcPct val="110000"/>
-              </a:lnSpc>
-              <a:buNone/>
-            </a:pPr>
-            <a:r>
-              <a:rPr lang="en-US" sz="1400" b="1" dirty="0">
-                <a:solidFill>
-                  <a:srgbClr val="0A1A2F"/>
-                </a:solidFill>
-                <a:latin typeface="Courier New" pitchFamily="34" charset="0"/>
-                <a:ea typeface="Courier New" pitchFamily="34" charset="-122"/>
-                <a:cs typeface="Courier New" pitchFamily="34" charset="-120"/>
-              </a:rPr>
-              <a:t>compter_jours_ouvres()</a:t>
-            </a:r>
-            <a:pPr indent="0" marL="0">
-              <a:lnSpc>
-                <a:spcPct val="110000"/>
-              </a:lnSpc>
-              <a:buNone/>
-            </a:pPr>
-            <a:r>
-              <a:rPr lang="en-US" sz="1400" dirty="0">
-                <a:solidFill>
-                  <a:srgbClr val="1B2A3A"/>
-                </a:solidFill>
-                <a:latin typeface="Calibri" pitchFamily="34" charset="0"/>
-                <a:ea typeface="Calibri" pitchFamily="34" charset="-122"/>
-                <a:cs typeface="Calibri" pitchFamily="34" charset="-120"/>
-              </a:rPr>
-              <a:t>  exclut samedis et dimanches
-</a:t>
-            </a:r>
-            <a:pPr indent="0" marL="0">
-              <a:lnSpc>
-                <a:spcPct val="110000"/>
-              </a:lnSpc>
-              <a:buNone/>
-            </a:pPr>
-            <a:r>
-              <a:rPr lang="en-US" sz="1400" b="1" dirty="0">
-                <a:solidFill>
-                  <a:srgbClr val="0A1A2F"/>
-                </a:solidFill>
-                <a:latin typeface="Courier New" pitchFamily="34" charset="0"/>
-                <a:ea typeface="Courier New" pitchFamily="34" charset="-122"/>
-                <a:cs typeface="Courier New" pitchFamily="34" charset="-120"/>
-              </a:rPr>
-              <a:t>solde_suffisant()</a:t>
-            </a:r>
-            <a:pPr indent="0" marL="0">
-              <a:lnSpc>
-                <a:spcPct val="110000"/>
-              </a:lnSpc>
-              <a:buNone/>
-            </a:pPr>
-            <a:r>
-              <a:rPr lang="en-US" sz="1400" dirty="0">
-                <a:solidFill>
-                  <a:srgbClr val="1B2A3A"/>
-                </a:solidFill>
-                <a:latin typeface="Calibri" pitchFamily="34" charset="0"/>
-                <a:ea typeface="Calibri" pitchFamily="34" charset="-122"/>
-                <a:cs typeface="Calibri" pitchFamily="34" charset="-120"/>
-              </a:rPr>
-              <a:t>  refuse si dépassement
-</a:t>
-            </a:r>
-            <a:pPr indent="0" marL="0">
-              <a:lnSpc>
-                <a:spcPct val="110000"/>
-              </a:lnSpc>
-              <a:buNone/>
-            </a:pPr>
-            <a:r>
-              <a:rPr lang="en-US" sz="1400" b="1" dirty="0">
-                <a:solidFill>
-                  <a:srgbClr val="0A1A2F"/>
-                </a:solidFill>
-                <a:latin typeface="Courier New" pitchFamily="34" charset="0"/>
-                <a:ea typeface="Courier New" pitchFamily="34" charset="-122"/>
-                <a:cs typeface="Courier New" pitchFamily="34" charset="-120"/>
-              </a:rPr>
-              <a:t>transition_possible()</a:t>
-            </a:r>
-            <a:pPr indent="0" marL="0">
-              <a:lnSpc>
-                <a:spcPct val="110000"/>
-              </a:lnSpc>
-              <a:buNone/>
-            </a:pPr>
-            <a:r>
-              <a:rPr lang="en-US" sz="1400" dirty="0">
-                <a:solidFill>
-                  <a:srgbClr val="1B2A3A"/>
-                </a:solidFill>
-                <a:latin typeface="Calibri" pitchFamily="34" charset="0"/>
-                <a:ea typeface="Calibri" pitchFamily="34" charset="-122"/>
-                <a:cs typeface="Calibri" pitchFamily="34" charset="-120"/>
-              </a:rPr>
-              <a:t>  bloque les transitions incohérentes
-</a:t>
-            </a:r>
-            <a:pPr indent="0" marL="0">
-              <a:lnSpc>
-                <a:spcPct val="110000"/>
-              </a:lnSpc>
-              <a:buNone/>
-            </a:pPr>
-            <a:r>
-              <a:rPr lang="en-US" sz="1400" i="1" dirty="0">
-                <a:solidFill>
-                  <a:srgbClr val="1C7293"/>
-                </a:solidFill>
-                <a:latin typeface="Calibri" pitchFamily="34" charset="0"/>
-                <a:ea typeface="Calibri" pitchFamily="34" charset="-122"/>
-                <a:cs typeface="Calibri" pitchFamily="34" charset="-120"/>
-              </a:rPr>
-              <a:t>Fonctions pures → couvertes par des tests unitaires.</a:t>
-            </a:r>
-            <a:endParaRPr lang="en-US" sz="1400" dirty="0"/>
-          </a:p>
-        </p:txBody>
-      </p:sp>
+      <p:pic>
+        <p:nvPicPr>
+          <p:cNvPr id="4" name="Image 0" descr="/Users/boungoumbimigloirebryan/Desktop/ProjetCda/docs/diagrammes/images/02-cas-utilisation.png">    </p:cNvPr>
+          <p:cNvPicPr>
+            <a:picLocks noChangeAspect="1"/>
+          </p:cNvPicPr>
+          <p:nvPr/>
+        </p:nvPicPr>
+        <p:blipFill>
+          <a:blip r:embed="rId1"/>
+          <a:stretch>
+            <a:fillRect/>
+          </a:stretch>
+        </p:blipFill>
+        <p:spPr>
+          <a:xfrm>
+            <a:off x="3145454" y="1463040"/>
+            <a:ext cx="5870611" cy="5029200"/>
+          </a:xfrm>
+          <a:prstGeom prst="rect">
+            <a:avLst/>
+          </a:prstGeom>
+        </p:spPr>
+      </p:pic>
     </p:spTree>
   </p:cSld>
   <p:clrMapOvr>
@@ -10936,7 +13150,7 @@
                 <a:ea typeface="Calibri" pitchFamily="34" charset="-122"/>
                 <a:cs typeface="Calibri" pitchFamily="34" charset="-120"/>
               </a:rPr>
-              <a:t>07 · SÉCURITÉ</a:t>
+              <a:t>05 · CONCEPTION</a:t>
             </a:r>
             <a:endParaRPr lang="en-US" sz="1200" dirty="0"/>
           </a:p>
@@ -10975,1038 +13189,36 @@
                 <a:ea typeface="Cambria" pitchFamily="34" charset="-122"/>
                 <a:cs typeface="Cambria" pitchFamily="34" charset="-120"/>
               </a:rPr>
-              <a:t>Une application sécurisée (Bloc 2)</a:t>
+              <a:t>Modèle conceptuel de données (MCD)</a:t>
             </a:r>
             <a:endParaRPr lang="en-US" sz="3000" dirty="0"/>
           </a:p>
         </p:txBody>
       </p:sp>
-      <p:sp>
-        <p:nvSpPr>
-          <p:cNvPr id="4" name="Shape 2"/>
-          <p:cNvSpPr/>
-          <p:nvPr/>
-        </p:nvSpPr>
-        <p:spPr>
-          <a:xfrm>
-            <a:off x="640080" y="1600200"/>
-            <a:ext cx="5303520" cy="1234440"/>
-          </a:xfrm>
-          <a:prstGeom prst="roundRect">
-            <a:avLst>
-              <a:gd name="adj" fmla="val 5926"/>
-            </a:avLst>
-          </a:prstGeom>
-          <a:solidFill>
-            <a:srgbClr val="EAF1F6"/>
-          </a:solidFill>
-          <a:ln w="12700">
-            <a:solidFill>
-              <a:srgbClr val="DCE6EE"/>
-            </a:solidFill>
-            <a:prstDash val="solid"/>
-          </a:ln>
-          <a:effectLst>
-            <a:outerShdw sx="100000" sy="100000" kx="0" ky="0" algn="bl" rotWithShape="0" blurRad="76200" dist="25400" dir="5400000">
-              <a:srgbClr val="B9C6D2">
-                <a:alpha val="30000"/>
-              </a:srgbClr>
-            </a:outerShdw>
-          </a:effectLst>
-        </p:spPr>
-      </p:sp>
-      <p:sp>
-        <p:nvSpPr>
-          <p:cNvPr id="5" name="Shape 3"/>
-          <p:cNvSpPr/>
-          <p:nvPr/>
-        </p:nvSpPr>
-        <p:spPr>
-          <a:xfrm>
-            <a:off x="914400" y="1984248"/>
-            <a:ext cx="457200" cy="457200"/>
-          </a:xfrm>
-          <a:prstGeom prst="ellipse">
-            <a:avLst/>
-          </a:prstGeom>
-          <a:solidFill>
-            <a:srgbClr val="0B5394"/>
-          </a:solidFill>
-          <a:ln/>
-        </p:spPr>
-      </p:sp>
-      <p:sp>
-        <p:nvSpPr>
-          <p:cNvPr id="6" name="Text 4"/>
-          <p:cNvSpPr/>
-          <p:nvPr/>
-        </p:nvSpPr>
-        <p:spPr>
-          <a:xfrm>
-            <a:off x="914400" y="1984248"/>
-            <a:ext cx="457200" cy="457200"/>
-          </a:xfrm>
-          <a:prstGeom prst="rect">
-            <a:avLst/>
-          </a:prstGeom>
-          <a:noFill/>
-          <a:ln/>
-        </p:spPr>
-        <p:txBody>
-          <a:bodyPr wrap="square" rtlCol="0" anchor="ctr"/>
-          <a:lstStyle/>
-          <a:p>
-            <a:pPr algn="ctr" indent="0" marL="0">
-              <a:buNone/>
-            </a:pPr>
-            <a:r>
-              <a:rPr lang="en-US" sz="1600" b="1" dirty="0">
-                <a:solidFill>
-                  <a:srgbClr val="FFFFFF"/>
-                </a:solidFill>
-                <a:latin typeface="Calibri" pitchFamily="34" charset="0"/>
-                <a:ea typeface="Calibri" pitchFamily="34" charset="-122"/>
-                <a:cs typeface="Calibri" pitchFamily="34" charset="-120"/>
-              </a:rPr>
-              <a:t>🔒</a:t>
-            </a:r>
-            <a:endParaRPr lang="en-US" sz="1600" dirty="0"/>
-          </a:p>
-        </p:txBody>
-      </p:sp>
-      <p:sp>
-        <p:nvSpPr>
-          <p:cNvPr id="7" name="Text 5"/>
-          <p:cNvSpPr/>
-          <p:nvPr/>
-        </p:nvSpPr>
-        <p:spPr>
-          <a:xfrm>
-            <a:off x="1554480" y="1737360"/>
-            <a:ext cx="4206240" cy="365760"/>
-          </a:xfrm>
-          <a:prstGeom prst="rect">
-            <a:avLst/>
-          </a:prstGeom>
-          <a:noFill/>
-          <a:ln/>
-        </p:spPr>
-        <p:txBody>
-          <a:bodyPr wrap="square" rtlCol="0" anchor="ctr"/>
-          <a:lstStyle/>
-          <a:p>
-            <a:pPr indent="0" marL="0">
-              <a:buNone/>
-            </a:pPr>
-            <a:r>
-              <a:rPr lang="en-US" sz="1500" b="1" dirty="0">
-                <a:solidFill>
-                  <a:srgbClr val="0A1A2F"/>
-                </a:solidFill>
-                <a:latin typeface="Calibri" pitchFamily="34" charset="0"/>
-                <a:ea typeface="Calibri" pitchFamily="34" charset="-122"/>
-                <a:cs typeface="Calibri" pitchFamily="34" charset="-120"/>
-              </a:rPr>
-              <a:t>JWT</a:t>
-            </a:r>
-            <a:endParaRPr lang="en-US" sz="1500" dirty="0"/>
-          </a:p>
-        </p:txBody>
-      </p:sp>
-      <p:sp>
-        <p:nvSpPr>
-          <p:cNvPr id="8" name="Text 6"/>
-          <p:cNvSpPr/>
-          <p:nvPr/>
-        </p:nvSpPr>
-        <p:spPr>
-          <a:xfrm>
-            <a:off x="1554480" y="2130552"/>
-            <a:ext cx="4206240" cy="548640"/>
-          </a:xfrm>
-          <a:prstGeom prst="rect">
-            <a:avLst/>
-          </a:prstGeom>
-          <a:noFill/>
-          <a:ln/>
-        </p:spPr>
-        <p:txBody>
-          <a:bodyPr wrap="square" rtlCol="0" anchor="ctr"/>
-          <a:lstStyle/>
-          <a:p>
-            <a:pPr indent="0" marL="0">
-              <a:buNone/>
-            </a:pPr>
-            <a:r>
-              <a:rPr lang="en-US" sz="1200" dirty="0">
-                <a:solidFill>
-                  <a:srgbClr val="5B6B7B"/>
-                </a:solidFill>
-                <a:latin typeface="Calibri" pitchFamily="34" charset="0"/>
-                <a:ea typeface="Calibri" pitchFamily="34" charset="-122"/>
-                <a:cs typeface="Calibri" pitchFamily="34" charset="-120"/>
-              </a:rPr>
-              <a:t>Authentification par jeton signé, serveur sans état</a:t>
-            </a:r>
-            <a:endParaRPr lang="en-US" sz="1200" dirty="0"/>
-          </a:p>
-        </p:txBody>
-      </p:sp>
-      <p:sp>
-        <p:nvSpPr>
-          <p:cNvPr id="9" name="Shape 7"/>
-          <p:cNvSpPr/>
-          <p:nvPr/>
-        </p:nvSpPr>
-        <p:spPr>
-          <a:xfrm>
-            <a:off x="6217920" y="1600200"/>
-            <a:ext cx="5303520" cy="1234440"/>
-          </a:xfrm>
-          <a:prstGeom prst="roundRect">
-            <a:avLst>
-              <a:gd name="adj" fmla="val 5926"/>
-            </a:avLst>
-          </a:prstGeom>
-          <a:solidFill>
-            <a:srgbClr val="EAF1F6"/>
-          </a:solidFill>
-          <a:ln w="12700">
-            <a:solidFill>
-              <a:srgbClr val="DCE6EE"/>
-            </a:solidFill>
-            <a:prstDash val="solid"/>
-          </a:ln>
-          <a:effectLst>
-            <a:outerShdw sx="100000" sy="100000" kx="0" ky="0" algn="bl" rotWithShape="0" blurRad="76200" dist="25400" dir="5400000">
-              <a:srgbClr val="B9C6D2">
-                <a:alpha val="30000"/>
-              </a:srgbClr>
-            </a:outerShdw>
-          </a:effectLst>
-        </p:spPr>
-      </p:sp>
-      <p:sp>
-        <p:nvSpPr>
-          <p:cNvPr id="10" name="Shape 8"/>
-          <p:cNvSpPr/>
-          <p:nvPr/>
-        </p:nvSpPr>
-        <p:spPr>
-          <a:xfrm>
-            <a:off x="6492240" y="1984248"/>
-            <a:ext cx="457200" cy="457200"/>
-          </a:xfrm>
-          <a:prstGeom prst="ellipse">
-            <a:avLst/>
-          </a:prstGeom>
-          <a:solidFill>
-            <a:srgbClr val="0B5394"/>
-          </a:solidFill>
-          <a:ln/>
-        </p:spPr>
-      </p:sp>
-      <p:sp>
-        <p:nvSpPr>
-          <p:cNvPr id="11" name="Text 9"/>
-          <p:cNvSpPr/>
-          <p:nvPr/>
-        </p:nvSpPr>
-        <p:spPr>
-          <a:xfrm>
-            <a:off x="6492240" y="1984248"/>
-            <a:ext cx="457200" cy="457200"/>
-          </a:xfrm>
-          <a:prstGeom prst="rect">
-            <a:avLst/>
-          </a:prstGeom>
-          <a:noFill/>
-          <a:ln/>
-        </p:spPr>
-        <p:txBody>
-          <a:bodyPr wrap="square" rtlCol="0" anchor="ctr"/>
-          <a:lstStyle/>
-          <a:p>
-            <a:pPr algn="ctr" indent="0" marL="0">
-              <a:buNone/>
-            </a:pPr>
-            <a:r>
-              <a:rPr lang="en-US" sz="1600" b="1" dirty="0">
-                <a:solidFill>
-                  <a:srgbClr val="FFFFFF"/>
-                </a:solidFill>
-                <a:latin typeface="Calibri" pitchFamily="34" charset="0"/>
-                <a:ea typeface="Calibri" pitchFamily="34" charset="-122"/>
-                <a:cs typeface="Calibri" pitchFamily="34" charset="-120"/>
-              </a:rPr>
-              <a:t>🔒</a:t>
-            </a:r>
-            <a:endParaRPr lang="en-US" sz="1600" dirty="0"/>
-          </a:p>
-        </p:txBody>
-      </p:sp>
-      <p:sp>
-        <p:nvSpPr>
-          <p:cNvPr id="12" name="Text 10"/>
-          <p:cNvSpPr/>
-          <p:nvPr/>
-        </p:nvSpPr>
-        <p:spPr>
-          <a:xfrm>
-            <a:off x="7132320" y="1737360"/>
-            <a:ext cx="4206240" cy="365760"/>
-          </a:xfrm>
-          <a:prstGeom prst="rect">
-            <a:avLst/>
-          </a:prstGeom>
-          <a:noFill/>
-          <a:ln/>
-        </p:spPr>
-        <p:txBody>
-          <a:bodyPr wrap="square" rtlCol="0" anchor="ctr"/>
-          <a:lstStyle/>
-          <a:p>
-            <a:pPr indent="0" marL="0">
-              <a:buNone/>
-            </a:pPr>
-            <a:r>
-              <a:rPr lang="en-US" sz="1500" b="1" dirty="0">
-                <a:solidFill>
-                  <a:srgbClr val="0A1A2F"/>
-                </a:solidFill>
-                <a:latin typeface="Calibri" pitchFamily="34" charset="0"/>
-                <a:ea typeface="Calibri" pitchFamily="34" charset="-122"/>
-                <a:cs typeface="Calibri" pitchFamily="34" charset="-120"/>
-              </a:rPr>
-              <a:t>bcrypt</a:t>
-            </a:r>
-            <a:endParaRPr lang="en-US" sz="1500" dirty="0"/>
-          </a:p>
-        </p:txBody>
-      </p:sp>
-      <p:sp>
-        <p:nvSpPr>
-          <p:cNvPr id="13" name="Text 11"/>
-          <p:cNvSpPr/>
-          <p:nvPr/>
-        </p:nvSpPr>
-        <p:spPr>
-          <a:xfrm>
-            <a:off x="7132320" y="2130552"/>
-            <a:ext cx="4206240" cy="548640"/>
-          </a:xfrm>
-          <a:prstGeom prst="rect">
-            <a:avLst/>
-          </a:prstGeom>
-          <a:noFill/>
-          <a:ln/>
-        </p:spPr>
-        <p:txBody>
-          <a:bodyPr wrap="square" rtlCol="0" anchor="ctr"/>
-          <a:lstStyle/>
-          <a:p>
-            <a:pPr indent="0" marL="0">
-              <a:buNone/>
-            </a:pPr>
-            <a:r>
-              <a:rPr lang="en-US" sz="1200" dirty="0">
-                <a:solidFill>
-                  <a:srgbClr val="5B6B7B"/>
-                </a:solidFill>
-                <a:latin typeface="Calibri" pitchFamily="34" charset="0"/>
-                <a:ea typeface="Calibri" pitchFamily="34" charset="-122"/>
-                <a:cs typeface="Calibri" pitchFamily="34" charset="-120"/>
-              </a:rPr>
-              <a:t>Mots de passe hachés, jamais stockés en clair</a:t>
-            </a:r>
-            <a:endParaRPr lang="en-US" sz="1200" dirty="0"/>
-          </a:p>
-        </p:txBody>
-      </p:sp>
-      <p:sp>
-        <p:nvSpPr>
-          <p:cNvPr id="14" name="Shape 12"/>
-          <p:cNvSpPr/>
-          <p:nvPr/>
-        </p:nvSpPr>
-        <p:spPr>
-          <a:xfrm>
-            <a:off x="640080" y="3017520"/>
-            <a:ext cx="5303520" cy="1234440"/>
-          </a:xfrm>
-          <a:prstGeom prst="roundRect">
-            <a:avLst>
-              <a:gd name="adj" fmla="val 5926"/>
-            </a:avLst>
-          </a:prstGeom>
-          <a:solidFill>
-            <a:srgbClr val="EAF1F6"/>
-          </a:solidFill>
-          <a:ln w="12700">
-            <a:solidFill>
-              <a:srgbClr val="DCE6EE"/>
-            </a:solidFill>
-            <a:prstDash val="solid"/>
-          </a:ln>
-          <a:effectLst>
-            <a:outerShdw sx="100000" sy="100000" kx="0" ky="0" algn="bl" rotWithShape="0" blurRad="76200" dist="25400" dir="5400000">
-              <a:srgbClr val="B9C6D2">
-                <a:alpha val="30000"/>
-              </a:srgbClr>
-            </a:outerShdw>
-          </a:effectLst>
-        </p:spPr>
-      </p:sp>
-      <p:sp>
-        <p:nvSpPr>
-          <p:cNvPr id="15" name="Shape 13"/>
-          <p:cNvSpPr/>
-          <p:nvPr/>
-        </p:nvSpPr>
-        <p:spPr>
-          <a:xfrm>
-            <a:off x="914400" y="3401568"/>
-            <a:ext cx="457200" cy="457200"/>
-          </a:xfrm>
-          <a:prstGeom prst="ellipse">
-            <a:avLst/>
-          </a:prstGeom>
-          <a:solidFill>
-            <a:srgbClr val="0B5394"/>
-          </a:solidFill>
-          <a:ln/>
-        </p:spPr>
-      </p:sp>
-      <p:sp>
-        <p:nvSpPr>
-          <p:cNvPr id="16" name="Text 14"/>
-          <p:cNvSpPr/>
-          <p:nvPr/>
-        </p:nvSpPr>
-        <p:spPr>
-          <a:xfrm>
-            <a:off x="914400" y="3401568"/>
-            <a:ext cx="457200" cy="457200"/>
-          </a:xfrm>
-          <a:prstGeom prst="rect">
-            <a:avLst/>
-          </a:prstGeom>
-          <a:noFill/>
-          <a:ln/>
-        </p:spPr>
-        <p:txBody>
-          <a:bodyPr wrap="square" rtlCol="0" anchor="ctr"/>
-          <a:lstStyle/>
-          <a:p>
-            <a:pPr algn="ctr" indent="0" marL="0">
-              <a:buNone/>
-            </a:pPr>
-            <a:r>
-              <a:rPr lang="en-US" sz="1600" b="1" dirty="0">
-                <a:solidFill>
-                  <a:srgbClr val="FFFFFF"/>
-                </a:solidFill>
-                <a:latin typeface="Calibri" pitchFamily="34" charset="0"/>
-                <a:ea typeface="Calibri" pitchFamily="34" charset="-122"/>
-                <a:cs typeface="Calibri" pitchFamily="34" charset="-120"/>
-              </a:rPr>
-              <a:t>🔒</a:t>
-            </a:r>
-            <a:endParaRPr lang="en-US" sz="1600" dirty="0"/>
-          </a:p>
-        </p:txBody>
-      </p:sp>
-      <p:sp>
-        <p:nvSpPr>
-          <p:cNvPr id="17" name="Text 15"/>
-          <p:cNvSpPr/>
-          <p:nvPr/>
-        </p:nvSpPr>
-        <p:spPr>
-          <a:xfrm>
-            <a:off x="1554480" y="3154680"/>
-            <a:ext cx="4206240" cy="365760"/>
-          </a:xfrm>
-          <a:prstGeom prst="rect">
-            <a:avLst/>
-          </a:prstGeom>
-          <a:noFill/>
-          <a:ln/>
-        </p:spPr>
-        <p:txBody>
-          <a:bodyPr wrap="square" rtlCol="0" anchor="ctr"/>
-          <a:lstStyle/>
-          <a:p>
-            <a:pPr indent="0" marL="0">
-              <a:buNone/>
-            </a:pPr>
-            <a:r>
-              <a:rPr lang="en-US" sz="1500" b="1" dirty="0">
-                <a:solidFill>
-                  <a:srgbClr val="0A1A2F"/>
-                </a:solidFill>
-                <a:latin typeface="Calibri" pitchFamily="34" charset="0"/>
-                <a:ea typeface="Calibri" pitchFamily="34" charset="-122"/>
-                <a:cs typeface="Calibri" pitchFamily="34" charset="-120"/>
-              </a:rPr>
-              <a:t>RBAC</a:t>
-            </a:r>
-            <a:endParaRPr lang="en-US" sz="1500" dirty="0"/>
-          </a:p>
-        </p:txBody>
-      </p:sp>
-      <p:sp>
-        <p:nvSpPr>
-          <p:cNvPr id="18" name="Text 16"/>
-          <p:cNvSpPr/>
-          <p:nvPr/>
-        </p:nvSpPr>
-        <p:spPr>
-          <a:xfrm>
-            <a:off x="1554480" y="3547872"/>
-            <a:ext cx="4206240" cy="548640"/>
-          </a:xfrm>
-          <a:prstGeom prst="rect">
-            <a:avLst/>
-          </a:prstGeom>
-          <a:noFill/>
-          <a:ln/>
-        </p:spPr>
-        <p:txBody>
-          <a:bodyPr wrap="square" rtlCol="0" anchor="ctr"/>
-          <a:lstStyle/>
-          <a:p>
-            <a:pPr indent="0" marL="0">
-              <a:buNone/>
-            </a:pPr>
-            <a:r>
-              <a:rPr lang="en-US" sz="1200" dirty="0">
-                <a:solidFill>
-                  <a:srgbClr val="5B6B7B"/>
-                </a:solidFill>
-                <a:latin typeface="Calibri" pitchFamily="34" charset="0"/>
-                <a:ea typeface="Calibri" pitchFamily="34" charset="-122"/>
-                <a:cs typeface="Calibri" pitchFamily="34" charset="-120"/>
-              </a:rPr>
-              <a:t>3 rôles, autorisations vérifiées côté serveur</a:t>
-            </a:r>
-            <a:endParaRPr lang="en-US" sz="1200" dirty="0"/>
-          </a:p>
-        </p:txBody>
-      </p:sp>
-      <p:sp>
-        <p:nvSpPr>
-          <p:cNvPr id="19" name="Shape 17"/>
-          <p:cNvSpPr/>
-          <p:nvPr/>
-        </p:nvSpPr>
-        <p:spPr>
-          <a:xfrm>
-            <a:off x="6217920" y="3017520"/>
-            <a:ext cx="5303520" cy="1234440"/>
-          </a:xfrm>
-          <a:prstGeom prst="roundRect">
-            <a:avLst>
-              <a:gd name="adj" fmla="val 5926"/>
-            </a:avLst>
-          </a:prstGeom>
-          <a:solidFill>
-            <a:srgbClr val="EAF1F6"/>
-          </a:solidFill>
-          <a:ln w="12700">
-            <a:solidFill>
-              <a:srgbClr val="DCE6EE"/>
-            </a:solidFill>
-            <a:prstDash val="solid"/>
-          </a:ln>
-          <a:effectLst>
-            <a:outerShdw sx="100000" sy="100000" kx="0" ky="0" algn="bl" rotWithShape="0" blurRad="76200" dist="25400" dir="5400000">
-              <a:srgbClr val="B9C6D2">
-                <a:alpha val="30000"/>
-              </a:srgbClr>
-            </a:outerShdw>
-          </a:effectLst>
-        </p:spPr>
-      </p:sp>
-      <p:sp>
-        <p:nvSpPr>
-          <p:cNvPr id="20" name="Shape 18"/>
-          <p:cNvSpPr/>
-          <p:nvPr/>
-        </p:nvSpPr>
-        <p:spPr>
-          <a:xfrm>
-            <a:off x="6492240" y="3401568"/>
-            <a:ext cx="457200" cy="457200"/>
-          </a:xfrm>
-          <a:prstGeom prst="ellipse">
-            <a:avLst/>
-          </a:prstGeom>
-          <a:solidFill>
-            <a:srgbClr val="0B5394"/>
-          </a:solidFill>
-          <a:ln/>
-        </p:spPr>
-      </p:sp>
-      <p:sp>
-        <p:nvSpPr>
-          <p:cNvPr id="21" name="Text 19"/>
-          <p:cNvSpPr/>
-          <p:nvPr/>
-        </p:nvSpPr>
-        <p:spPr>
-          <a:xfrm>
-            <a:off x="6492240" y="3401568"/>
-            <a:ext cx="457200" cy="457200"/>
-          </a:xfrm>
-          <a:prstGeom prst="rect">
-            <a:avLst/>
-          </a:prstGeom>
-          <a:noFill/>
-          <a:ln/>
-        </p:spPr>
-        <p:txBody>
-          <a:bodyPr wrap="square" rtlCol="0" anchor="ctr"/>
-          <a:lstStyle/>
-          <a:p>
-            <a:pPr algn="ctr" indent="0" marL="0">
-              <a:buNone/>
-            </a:pPr>
-            <a:r>
-              <a:rPr lang="en-US" sz="1600" b="1" dirty="0">
-                <a:solidFill>
-                  <a:srgbClr val="FFFFFF"/>
-                </a:solidFill>
-                <a:latin typeface="Calibri" pitchFamily="34" charset="0"/>
-                <a:ea typeface="Calibri" pitchFamily="34" charset="-122"/>
-                <a:cs typeface="Calibri" pitchFamily="34" charset="-120"/>
-              </a:rPr>
-              <a:t>🔒</a:t>
-            </a:r>
-            <a:endParaRPr lang="en-US" sz="1600" dirty="0"/>
-          </a:p>
-        </p:txBody>
-      </p:sp>
-      <p:sp>
-        <p:nvSpPr>
-          <p:cNvPr id="22" name="Text 20"/>
-          <p:cNvSpPr/>
-          <p:nvPr/>
-        </p:nvSpPr>
-        <p:spPr>
-          <a:xfrm>
-            <a:off x="7132320" y="3154680"/>
-            <a:ext cx="4206240" cy="365760"/>
-          </a:xfrm>
-          <a:prstGeom prst="rect">
-            <a:avLst/>
-          </a:prstGeom>
-          <a:noFill/>
-          <a:ln/>
-        </p:spPr>
-        <p:txBody>
-          <a:bodyPr wrap="square" rtlCol="0" anchor="ctr"/>
-          <a:lstStyle/>
-          <a:p>
-            <a:pPr indent="0" marL="0">
-              <a:buNone/>
-            </a:pPr>
-            <a:r>
-              <a:rPr lang="en-US" sz="1500" b="1" dirty="0">
-                <a:solidFill>
-                  <a:srgbClr val="0A1A2F"/>
-                </a:solidFill>
-                <a:latin typeface="Calibri" pitchFamily="34" charset="0"/>
-                <a:ea typeface="Calibri" pitchFamily="34" charset="-122"/>
-                <a:cs typeface="Calibri" pitchFamily="34" charset="-120"/>
-              </a:rPr>
-              <a:t>ORM</a:t>
-            </a:r>
-            <a:endParaRPr lang="en-US" sz="1500" dirty="0"/>
-          </a:p>
-        </p:txBody>
-      </p:sp>
-      <p:sp>
-        <p:nvSpPr>
-          <p:cNvPr id="23" name="Text 21"/>
-          <p:cNvSpPr/>
-          <p:nvPr/>
-        </p:nvSpPr>
-        <p:spPr>
-          <a:xfrm>
-            <a:off x="7132320" y="3547872"/>
-            <a:ext cx="4206240" cy="548640"/>
-          </a:xfrm>
-          <a:prstGeom prst="rect">
-            <a:avLst/>
-          </a:prstGeom>
-          <a:noFill/>
-          <a:ln/>
-        </p:spPr>
-        <p:txBody>
-          <a:bodyPr wrap="square" rtlCol="0" anchor="ctr"/>
-          <a:lstStyle/>
-          <a:p>
-            <a:pPr indent="0" marL="0">
-              <a:buNone/>
-            </a:pPr>
-            <a:r>
-              <a:rPr lang="en-US" sz="1200" dirty="0">
-                <a:solidFill>
-                  <a:srgbClr val="5B6B7B"/>
-                </a:solidFill>
-                <a:latin typeface="Calibri" pitchFamily="34" charset="0"/>
-                <a:ea typeface="Calibri" pitchFamily="34" charset="-122"/>
-                <a:cs typeface="Calibri" pitchFamily="34" charset="-120"/>
-              </a:rPr>
-              <a:t>Requêtes préparées → anti-injection SQL</a:t>
-            </a:r>
-            <a:endParaRPr lang="en-US" sz="1200" dirty="0"/>
-          </a:p>
-        </p:txBody>
-      </p:sp>
-      <p:sp>
-        <p:nvSpPr>
-          <p:cNvPr id="24" name="Shape 22"/>
-          <p:cNvSpPr/>
-          <p:nvPr/>
-        </p:nvSpPr>
-        <p:spPr>
-          <a:xfrm>
-            <a:off x="640080" y="4434840"/>
-            <a:ext cx="5303520" cy="1234440"/>
-          </a:xfrm>
-          <a:prstGeom prst="roundRect">
-            <a:avLst>
-              <a:gd name="adj" fmla="val 5926"/>
-            </a:avLst>
-          </a:prstGeom>
-          <a:solidFill>
-            <a:srgbClr val="EAF1F6"/>
-          </a:solidFill>
-          <a:ln w="12700">
-            <a:solidFill>
-              <a:srgbClr val="DCE6EE"/>
-            </a:solidFill>
-            <a:prstDash val="solid"/>
-          </a:ln>
-          <a:effectLst>
-            <a:outerShdw sx="100000" sy="100000" kx="0" ky="0" algn="bl" rotWithShape="0" blurRad="76200" dist="25400" dir="5400000">
-              <a:srgbClr val="B9C6D2">
-                <a:alpha val="30000"/>
-              </a:srgbClr>
-            </a:outerShdw>
-          </a:effectLst>
-        </p:spPr>
-      </p:sp>
-      <p:sp>
-        <p:nvSpPr>
-          <p:cNvPr id="25" name="Shape 23"/>
-          <p:cNvSpPr/>
-          <p:nvPr/>
-        </p:nvSpPr>
-        <p:spPr>
-          <a:xfrm>
-            <a:off x="914400" y="4818888"/>
-            <a:ext cx="457200" cy="457200"/>
-          </a:xfrm>
-          <a:prstGeom prst="ellipse">
-            <a:avLst/>
-          </a:prstGeom>
-          <a:solidFill>
-            <a:srgbClr val="0B5394"/>
-          </a:solidFill>
-          <a:ln/>
-        </p:spPr>
-      </p:sp>
-      <p:sp>
-        <p:nvSpPr>
-          <p:cNvPr id="26" name="Text 24"/>
-          <p:cNvSpPr/>
-          <p:nvPr/>
-        </p:nvSpPr>
-        <p:spPr>
-          <a:xfrm>
-            <a:off x="914400" y="4818888"/>
-            <a:ext cx="457200" cy="457200"/>
-          </a:xfrm>
-          <a:prstGeom prst="rect">
-            <a:avLst/>
-          </a:prstGeom>
-          <a:noFill/>
-          <a:ln/>
-        </p:spPr>
-        <p:txBody>
-          <a:bodyPr wrap="square" rtlCol="0" anchor="ctr"/>
-          <a:lstStyle/>
-          <a:p>
-            <a:pPr algn="ctr" indent="0" marL="0">
-              <a:buNone/>
-            </a:pPr>
-            <a:r>
-              <a:rPr lang="en-US" sz="1600" b="1" dirty="0">
-                <a:solidFill>
-                  <a:srgbClr val="FFFFFF"/>
-                </a:solidFill>
-                <a:latin typeface="Calibri" pitchFamily="34" charset="0"/>
-                <a:ea typeface="Calibri" pitchFamily="34" charset="-122"/>
-                <a:cs typeface="Calibri" pitchFamily="34" charset="-120"/>
-              </a:rPr>
-              <a:t>🔒</a:t>
-            </a:r>
-            <a:endParaRPr lang="en-US" sz="1600" dirty="0"/>
-          </a:p>
-        </p:txBody>
-      </p:sp>
-      <p:sp>
-        <p:nvSpPr>
-          <p:cNvPr id="27" name="Text 25"/>
-          <p:cNvSpPr/>
-          <p:nvPr/>
-        </p:nvSpPr>
-        <p:spPr>
-          <a:xfrm>
-            <a:off x="1554480" y="4572000"/>
-            <a:ext cx="4206240" cy="365760"/>
-          </a:xfrm>
-          <a:prstGeom prst="rect">
-            <a:avLst/>
-          </a:prstGeom>
-          <a:noFill/>
-          <a:ln/>
-        </p:spPr>
-        <p:txBody>
-          <a:bodyPr wrap="square" rtlCol="0" anchor="ctr"/>
-          <a:lstStyle/>
-          <a:p>
-            <a:pPr indent="0" marL="0">
-              <a:buNone/>
-            </a:pPr>
-            <a:r>
-              <a:rPr lang="en-US" sz="1500" b="1" dirty="0">
-                <a:solidFill>
-                  <a:srgbClr val="0A1A2F"/>
-                </a:solidFill>
-                <a:latin typeface="Calibri" pitchFamily="34" charset="0"/>
-                <a:ea typeface="Calibri" pitchFamily="34" charset="-122"/>
-                <a:cs typeface="Calibri" pitchFamily="34" charset="-120"/>
-              </a:rPr>
-              <a:t>CORS</a:t>
-            </a:r>
-            <a:endParaRPr lang="en-US" sz="1500" dirty="0"/>
-          </a:p>
-        </p:txBody>
-      </p:sp>
-      <p:sp>
-        <p:nvSpPr>
-          <p:cNvPr id="28" name="Text 26"/>
-          <p:cNvSpPr/>
-          <p:nvPr/>
-        </p:nvSpPr>
-        <p:spPr>
-          <a:xfrm>
-            <a:off x="1554480" y="4965192"/>
-            <a:ext cx="4206240" cy="548640"/>
-          </a:xfrm>
-          <a:prstGeom prst="rect">
-            <a:avLst/>
-          </a:prstGeom>
-          <a:noFill/>
-          <a:ln/>
-        </p:spPr>
-        <p:txBody>
-          <a:bodyPr wrap="square" rtlCol="0" anchor="ctr"/>
-          <a:lstStyle/>
-          <a:p>
-            <a:pPr indent="0" marL="0">
-              <a:buNone/>
-            </a:pPr>
-            <a:r>
-              <a:rPr lang="en-US" sz="1200" dirty="0">
-                <a:solidFill>
-                  <a:srgbClr val="5B6B7B"/>
-                </a:solidFill>
-                <a:latin typeface="Calibri" pitchFamily="34" charset="0"/>
-                <a:ea typeface="Calibri" pitchFamily="34" charset="-122"/>
-                <a:cs typeface="Calibri" pitchFamily="34" charset="-120"/>
-              </a:rPr>
-              <a:t>Origines restreintes au front autorisé</a:t>
-            </a:r>
-            <a:endParaRPr lang="en-US" sz="1200" dirty="0"/>
-          </a:p>
-        </p:txBody>
-      </p:sp>
-      <p:sp>
-        <p:nvSpPr>
-          <p:cNvPr id="29" name="Shape 27"/>
-          <p:cNvSpPr/>
-          <p:nvPr/>
-        </p:nvSpPr>
-        <p:spPr>
-          <a:xfrm>
-            <a:off x="6217920" y="4434840"/>
-            <a:ext cx="5303520" cy="1234440"/>
-          </a:xfrm>
-          <a:prstGeom prst="roundRect">
-            <a:avLst>
-              <a:gd name="adj" fmla="val 5926"/>
-            </a:avLst>
-          </a:prstGeom>
-          <a:solidFill>
-            <a:srgbClr val="EAF1F6"/>
-          </a:solidFill>
-          <a:ln w="12700">
-            <a:solidFill>
-              <a:srgbClr val="DCE6EE"/>
-            </a:solidFill>
-            <a:prstDash val="solid"/>
-          </a:ln>
-          <a:effectLst>
-            <a:outerShdw sx="100000" sy="100000" kx="0" ky="0" algn="bl" rotWithShape="0" blurRad="76200" dist="25400" dir="5400000">
-              <a:srgbClr val="B9C6D2">
-                <a:alpha val="30000"/>
-              </a:srgbClr>
-            </a:outerShdw>
-          </a:effectLst>
-        </p:spPr>
-      </p:sp>
-      <p:sp>
-        <p:nvSpPr>
-          <p:cNvPr id="30" name="Shape 28"/>
-          <p:cNvSpPr/>
-          <p:nvPr/>
-        </p:nvSpPr>
-        <p:spPr>
-          <a:xfrm>
-            <a:off x="6492240" y="4818888"/>
-            <a:ext cx="457200" cy="457200"/>
-          </a:xfrm>
-          <a:prstGeom prst="ellipse">
-            <a:avLst/>
-          </a:prstGeom>
-          <a:solidFill>
-            <a:srgbClr val="0B5394"/>
-          </a:solidFill>
-          <a:ln/>
-        </p:spPr>
-      </p:sp>
-      <p:sp>
-        <p:nvSpPr>
-          <p:cNvPr id="31" name="Text 29"/>
-          <p:cNvSpPr/>
-          <p:nvPr/>
-        </p:nvSpPr>
-        <p:spPr>
-          <a:xfrm>
-            <a:off x="6492240" y="4818888"/>
-            <a:ext cx="457200" cy="457200"/>
-          </a:xfrm>
-          <a:prstGeom prst="rect">
-            <a:avLst/>
-          </a:prstGeom>
-          <a:noFill/>
-          <a:ln/>
-        </p:spPr>
-        <p:txBody>
-          <a:bodyPr wrap="square" rtlCol="0" anchor="ctr"/>
-          <a:lstStyle/>
-          <a:p>
-            <a:pPr algn="ctr" indent="0" marL="0">
-              <a:buNone/>
-            </a:pPr>
-            <a:r>
-              <a:rPr lang="en-US" sz="1600" b="1" dirty="0">
-                <a:solidFill>
-                  <a:srgbClr val="FFFFFF"/>
-                </a:solidFill>
-                <a:latin typeface="Calibri" pitchFamily="34" charset="0"/>
-                <a:ea typeface="Calibri" pitchFamily="34" charset="-122"/>
-                <a:cs typeface="Calibri" pitchFamily="34" charset="-120"/>
-              </a:rPr>
-              <a:t>🔒</a:t>
-            </a:r>
-            <a:endParaRPr lang="en-US" sz="1600" dirty="0"/>
-          </a:p>
-        </p:txBody>
-      </p:sp>
-      <p:sp>
-        <p:nvSpPr>
-          <p:cNvPr id="32" name="Text 30"/>
-          <p:cNvSpPr/>
-          <p:nvPr/>
-        </p:nvSpPr>
-        <p:spPr>
-          <a:xfrm>
-            <a:off x="7132320" y="4572000"/>
-            <a:ext cx="4206240" cy="365760"/>
-          </a:xfrm>
-          <a:prstGeom prst="rect">
-            <a:avLst/>
-          </a:prstGeom>
-          <a:noFill/>
-          <a:ln/>
-        </p:spPr>
-        <p:txBody>
-          <a:bodyPr wrap="square" rtlCol="0" anchor="ctr"/>
-          <a:lstStyle/>
-          <a:p>
-            <a:pPr indent="0" marL="0">
-              <a:buNone/>
-            </a:pPr>
-            <a:r>
-              <a:rPr lang="en-US" sz="1500" b="1" dirty="0">
-                <a:solidFill>
-                  <a:srgbClr val="0A1A2F"/>
-                </a:solidFill>
-                <a:latin typeface="Calibri" pitchFamily="34" charset="0"/>
-                <a:ea typeface="Calibri" pitchFamily="34" charset="-122"/>
-                <a:cs typeface="Calibri" pitchFamily="34" charset="-120"/>
-              </a:rPr>
-              <a:t>Validation</a:t>
-            </a:r>
-            <a:endParaRPr lang="en-US" sz="1500" dirty="0"/>
-          </a:p>
-        </p:txBody>
-      </p:sp>
-      <p:sp>
-        <p:nvSpPr>
-          <p:cNvPr id="33" name="Text 31"/>
-          <p:cNvSpPr/>
-          <p:nvPr/>
-        </p:nvSpPr>
-        <p:spPr>
-          <a:xfrm>
-            <a:off x="7132320" y="4965192"/>
-            <a:ext cx="4206240" cy="548640"/>
-          </a:xfrm>
-          <a:prstGeom prst="rect">
-            <a:avLst/>
-          </a:prstGeom>
-          <a:noFill/>
-          <a:ln/>
-        </p:spPr>
-        <p:txBody>
-          <a:bodyPr wrap="square" rtlCol="0" anchor="ctr"/>
-          <a:lstStyle/>
-          <a:p>
-            <a:pPr indent="0" marL="0">
-              <a:buNone/>
-            </a:pPr>
-            <a:r>
-              <a:rPr lang="en-US" sz="1200" dirty="0">
-                <a:solidFill>
-                  <a:srgbClr val="5B6B7B"/>
-                </a:solidFill>
-                <a:latin typeface="Calibri" pitchFamily="34" charset="0"/>
-                <a:ea typeface="Calibri" pitchFamily="34" charset="-122"/>
-                <a:cs typeface="Calibri" pitchFamily="34" charset="-120"/>
-              </a:rPr>
-              <a:t>Schémas Pydantic sur toutes les entrées</a:t>
-            </a:r>
-            <a:endParaRPr lang="en-US" sz="1200" dirty="0"/>
-          </a:p>
-        </p:txBody>
-      </p:sp>
+      <p:pic>
+        <p:nvPicPr>
+          <p:cNvPr id="4" name="Image 0" descr="/Users/boungoumbimigloirebryan/Desktop/ProjetCda/docs/diagrammes/images/07-mcd.png">    </p:cNvPr>
+          <p:cNvPicPr>
+            <a:picLocks noChangeAspect="1"/>
+          </p:cNvPicPr>
+          <p:nvPr/>
+        </p:nvPicPr>
+        <p:blipFill>
+          <a:blip r:embed="rId1"/>
+          <a:stretch>
+            <a:fillRect/>
+          </a:stretch>
+        </p:blipFill>
+        <p:spPr>
+          <a:xfrm>
+            <a:off x="4404964" y="1463040"/>
+            <a:ext cx="3351592" cy="5029200"/>
+          </a:xfrm>
+          <a:prstGeom prst="rect">
+            <a:avLst/>
+          </a:prstGeom>
+        </p:spPr>
+      </p:pic>
     </p:spTree>
   </p:cSld>
   <p:clrMapOvr>

--- a/livrables/Presentation_Soutenance_CongesFlow.pptx
+++ b/livrables/Presentation_Soutenance_CongesFlow.pptx
@@ -5062,7 +5062,7 @@
                 <a:ea typeface="Cambria" pitchFamily="34" charset="-122"/>
                 <a:cs typeface="Cambria" pitchFamily="34" charset="-120"/>
               </a:rPr>
-              <a:t>L'application en fonctionnement</a:t>
+              <a:t>L'application en ligne — congesflow-web.onrender.com</a:t>
             </a:r>
             <a:endParaRPr lang="en-US" sz="3000" dirty="0"/>
           </a:p>
@@ -5076,35 +5076,66 @@
         </p:nvSpPr>
         <p:spPr>
           <a:xfrm>
-            <a:off x="640080" y="1600200"/>
-            <a:ext cx="5394960" cy="2103120"/>
+            <a:off x="640080" y="1554480"/>
+            <a:ext cx="5394960" cy="2194560"/>
           </a:xfrm>
           <a:prstGeom prst="roundRect">
             <a:avLst>
-              <a:gd name="adj" fmla="val 2609"/>
+              <a:gd name="adj" fmla="val 3333"/>
             </a:avLst>
           </a:prstGeom>
           <a:solidFill>
-            <a:srgbClr val="F4F8FB"/>
+            <a:srgbClr val="EAF1F6"/>
           </a:solidFill>
-          <a:ln w="19050">
+          <a:ln w="12700">
             <a:solidFill>
-              <a:srgbClr val="0B5394"/>
+              <a:srgbClr val="DCE6EE"/>
             </a:solidFill>
-            <a:prstDash val="dash"/>
+            <a:prstDash val="solid"/>
           </a:ln>
-        </p:spPr>
-      </p:sp>
-      <p:sp>
-        <p:nvSpPr>
-          <p:cNvPr id="5" name="Text 3"/>
-          <p:cNvSpPr/>
-          <p:nvPr/>
-        </p:nvSpPr>
-        <p:spPr>
-          <a:xfrm>
-            <a:off x="822960" y="1600200"/>
-            <a:ext cx="5029200" cy="2103120"/>
+          <a:effectLst>
+            <a:outerShdw sx="100000" sy="100000" kx="0" ky="0" algn="bl" rotWithShape="0" blurRad="76200" dist="25400" dir="5400000">
+              <a:srgbClr val="B9C6D2">
+                <a:alpha val="30000"/>
+              </a:srgbClr>
+            </a:outerShdw>
+          </a:effectLst>
+        </p:spPr>
+      </p:sp>
+      <p:pic>
+        <p:nvPicPr>
+          <p:cNvPr id="5" name="Image 0" descr="/Users/boungoumbimigloirebryan/Desktop/ProjetCda/docs/screenshots/fig13-login.png">    </p:cNvPr>
+          <p:cNvPicPr>
+            <a:picLocks noChangeAspect="1"/>
+          </p:cNvPicPr>
+          <p:nvPr/>
+        </p:nvPicPr>
+        <p:blipFill>
+          <a:blip r:embed="rId1"/>
+          <a:stretch>
+            <a:fillRect/>
+          </a:stretch>
+        </p:blipFill>
+        <p:spPr>
+          <a:xfrm>
+            <a:off x="1947672" y="1664208"/>
+            <a:ext cx="2779776" cy="1737360"/>
+          </a:xfrm>
+          <a:prstGeom prst="rect">
+            <a:avLst/>
+          </a:prstGeom>
+        </p:spPr>
+      </p:pic>
+      <p:sp>
+        <p:nvSpPr>
+          <p:cNvPr id="6" name="Text 3"/>
+          <p:cNvSpPr/>
+          <p:nvPr/>
+        </p:nvSpPr>
+        <p:spPr>
+          <a:xfrm>
+            <a:off x="640080" y="3383280"/>
+            <a:ext cx="5394960" cy="274320"/>
           </a:xfrm>
           <a:prstGeom prst="rect">
             <a:avLst/>
@@ -5120,72 +5151,88 @@
               <a:buNone/>
             </a:pPr>
             <a:r>
-              <a:rPr lang="en-US" sz="1400" b="1" dirty="0">
-                <a:solidFill>
-                  <a:srgbClr val="0B5394"/>
-                </a:solidFill>
-                <a:latin typeface="Calibri" pitchFamily="34" charset="0"/>
-                <a:ea typeface="Calibri" pitchFamily="34" charset="-122"/>
-                <a:cs typeface="Calibri" pitchFamily="34" charset="-120"/>
-              </a:rPr>
-              <a:t>📷 CAPTURE D'ÉCRAN À INSÉRER
-</a:t>
-            </a:r>
-            <a:pPr algn="ctr" indent="0" marL="0">
-              <a:buNone/>
-            </a:pPr>
-            <a:r>
-              <a:rPr lang="en-US" sz="1100" i="1" dirty="0">
-                <a:solidFill>
-                  <a:srgbClr val="5B6B7B"/>
-                </a:solidFill>
-                <a:latin typeface="Calibri" pitchFamily="34" charset="0"/>
-                <a:ea typeface="Calibri" pitchFamily="34" charset="-122"/>
-                <a:cs typeface="Calibri" pitchFamily="34" charset="-120"/>
-              </a:rPr>
-              <a:t>Écran de connexion</a:t>
-            </a:r>
-            <a:endParaRPr lang="en-US" sz="1400" dirty="0"/>
-          </a:p>
-        </p:txBody>
-      </p:sp>
-      <p:sp>
-        <p:nvSpPr>
-          <p:cNvPr id="6" name="Shape 4"/>
-          <p:cNvSpPr/>
-          <p:nvPr/>
-        </p:nvSpPr>
-        <p:spPr>
-          <a:xfrm>
-            <a:off x="6126480" y="1600200"/>
-            <a:ext cx="5394960" cy="2103120"/>
+              <a:rPr lang="en-US" sz="1200" b="1" dirty="0">
+                <a:solidFill>
+                  <a:srgbClr val="1B2A3A"/>
+                </a:solidFill>
+                <a:latin typeface="Calibri" pitchFamily="34" charset="0"/>
+                <a:ea typeface="Calibri" pitchFamily="34" charset="-122"/>
+                <a:cs typeface="Calibri" pitchFamily="34" charset="-120"/>
+              </a:rPr>
+              <a:t>Connexion</a:t>
+            </a:r>
+            <a:endParaRPr lang="en-US" sz="1200" dirty="0"/>
+          </a:p>
+        </p:txBody>
+      </p:sp>
+      <p:sp>
+        <p:nvSpPr>
+          <p:cNvPr id="7" name="Shape 4"/>
+          <p:cNvSpPr/>
+          <p:nvPr/>
+        </p:nvSpPr>
+        <p:spPr>
+          <a:xfrm>
+            <a:off x="6126480" y="1554480"/>
+            <a:ext cx="5394960" cy="2194560"/>
           </a:xfrm>
           <a:prstGeom prst="roundRect">
             <a:avLst>
-              <a:gd name="adj" fmla="val 2609"/>
+              <a:gd name="adj" fmla="val 3333"/>
             </a:avLst>
           </a:prstGeom>
           <a:solidFill>
-            <a:srgbClr val="F4F8FB"/>
+            <a:srgbClr val="EAF1F6"/>
           </a:solidFill>
-          <a:ln w="19050">
+          <a:ln w="12700">
             <a:solidFill>
-              <a:srgbClr val="0B5394"/>
+              <a:srgbClr val="DCE6EE"/>
             </a:solidFill>
-            <a:prstDash val="dash"/>
+            <a:prstDash val="solid"/>
           </a:ln>
-        </p:spPr>
-      </p:sp>
-      <p:sp>
-        <p:nvSpPr>
-          <p:cNvPr id="7" name="Text 5"/>
-          <p:cNvSpPr/>
-          <p:nvPr/>
-        </p:nvSpPr>
-        <p:spPr>
-          <a:xfrm>
-            <a:off x="6309360" y="1600200"/>
-            <a:ext cx="5029200" cy="2103120"/>
+          <a:effectLst>
+            <a:outerShdw sx="100000" sy="100000" kx="0" ky="0" algn="bl" rotWithShape="0" blurRad="76200" dist="25400" dir="5400000">
+              <a:srgbClr val="B9C6D2">
+                <a:alpha val="30000"/>
+              </a:srgbClr>
+            </a:outerShdw>
+          </a:effectLst>
+        </p:spPr>
+      </p:sp>
+      <p:pic>
+        <p:nvPicPr>
+          <p:cNvPr id="8" name="Image 1" descr="/Users/boungoumbimigloirebryan/Desktop/ProjetCda/docs/screenshots/fig14-mes-demandes.png">    </p:cNvPr>
+          <p:cNvPicPr>
+            <a:picLocks noChangeAspect="1"/>
+          </p:cNvPicPr>
+          <p:nvPr/>
+        </p:nvPicPr>
+        <p:blipFill>
+          <a:blip r:embed="rId2"/>
+          <a:stretch>
+            <a:fillRect/>
+          </a:stretch>
+        </p:blipFill>
+        <p:spPr>
+          <a:xfrm>
+            <a:off x="7555300" y="1664208"/>
+            <a:ext cx="2537321" cy="1737360"/>
+          </a:xfrm>
+          <a:prstGeom prst="rect">
+            <a:avLst/>
+          </a:prstGeom>
+        </p:spPr>
+      </p:pic>
+      <p:sp>
+        <p:nvSpPr>
+          <p:cNvPr id="9" name="Text 5"/>
+          <p:cNvSpPr/>
+          <p:nvPr/>
+        </p:nvSpPr>
+        <p:spPr>
+          <a:xfrm>
+            <a:off x="6126480" y="3383280"/>
+            <a:ext cx="5394960" cy="274320"/>
           </a:xfrm>
           <a:prstGeom prst="rect">
             <a:avLst/>
@@ -5201,72 +5248,88 @@
               <a:buNone/>
             </a:pPr>
             <a:r>
-              <a:rPr lang="en-US" sz="1400" b="1" dirty="0">
-                <a:solidFill>
-                  <a:srgbClr val="0B5394"/>
-                </a:solidFill>
-                <a:latin typeface="Calibri" pitchFamily="34" charset="0"/>
-                <a:ea typeface="Calibri" pitchFamily="34" charset="-122"/>
-                <a:cs typeface="Calibri" pitchFamily="34" charset="-120"/>
-              </a:rPr>
-              <a:t>📷 CAPTURE D'ÉCRAN À INSÉRER
-</a:t>
-            </a:r>
-            <a:pPr algn="ctr" indent="0" marL="0">
-              <a:buNone/>
-            </a:pPr>
-            <a:r>
-              <a:rPr lang="en-US" sz="1100" i="1" dirty="0">
-                <a:solidFill>
-                  <a:srgbClr val="5B6B7B"/>
-                </a:solidFill>
-                <a:latin typeface="Calibri" pitchFamily="34" charset="0"/>
-                <a:ea typeface="Calibri" pitchFamily="34" charset="-122"/>
-                <a:cs typeface="Calibri" pitchFamily="34" charset="-120"/>
-              </a:rPr>
-              <a:t>Tableau de bord salarié (soldes + demande)</a:t>
-            </a:r>
-            <a:endParaRPr lang="en-US" sz="1400" dirty="0"/>
-          </a:p>
-        </p:txBody>
-      </p:sp>
-      <p:sp>
-        <p:nvSpPr>
-          <p:cNvPr id="8" name="Shape 6"/>
-          <p:cNvSpPr/>
-          <p:nvPr/>
-        </p:nvSpPr>
-        <p:spPr>
-          <a:xfrm>
-            <a:off x="640080" y="3886200"/>
-            <a:ext cx="5394960" cy="2103120"/>
+              <a:rPr lang="en-US" sz="1200" b="1" dirty="0">
+                <a:solidFill>
+                  <a:srgbClr val="1B2A3A"/>
+                </a:solidFill>
+                <a:latin typeface="Calibri" pitchFamily="34" charset="0"/>
+                <a:ea typeface="Calibri" pitchFamily="34" charset="-122"/>
+                <a:cs typeface="Calibri" pitchFamily="34" charset="-120"/>
+              </a:rPr>
+              <a:t>Espace salarié</a:t>
+            </a:r>
+            <a:endParaRPr lang="en-US" sz="1200" dirty="0"/>
+          </a:p>
+        </p:txBody>
+      </p:sp>
+      <p:sp>
+        <p:nvSpPr>
+          <p:cNvPr id="10" name="Shape 6"/>
+          <p:cNvSpPr/>
+          <p:nvPr/>
+        </p:nvSpPr>
+        <p:spPr>
+          <a:xfrm>
+            <a:off x="640080" y="3840480"/>
+            <a:ext cx="5394960" cy="2194560"/>
           </a:xfrm>
           <a:prstGeom prst="roundRect">
             <a:avLst>
-              <a:gd name="adj" fmla="val 2609"/>
+              <a:gd name="adj" fmla="val 3333"/>
             </a:avLst>
           </a:prstGeom>
           <a:solidFill>
-            <a:srgbClr val="F4F8FB"/>
+            <a:srgbClr val="EAF1F6"/>
           </a:solidFill>
-          <a:ln w="19050">
+          <a:ln w="12700">
             <a:solidFill>
-              <a:srgbClr val="0B5394"/>
+              <a:srgbClr val="DCE6EE"/>
             </a:solidFill>
-            <a:prstDash val="dash"/>
+            <a:prstDash val="solid"/>
           </a:ln>
-        </p:spPr>
-      </p:sp>
-      <p:sp>
-        <p:nvSpPr>
-          <p:cNvPr id="9" name="Text 7"/>
-          <p:cNvSpPr/>
-          <p:nvPr/>
-        </p:nvSpPr>
-        <p:spPr>
-          <a:xfrm>
-            <a:off x="822960" y="3886200"/>
-            <a:ext cx="5029200" cy="2103120"/>
+          <a:effectLst>
+            <a:outerShdw sx="100000" sy="100000" kx="0" ky="0" algn="bl" rotWithShape="0" blurRad="76200" dist="25400" dir="5400000">
+              <a:srgbClr val="B9C6D2">
+                <a:alpha val="30000"/>
+              </a:srgbClr>
+            </a:outerShdw>
+          </a:effectLst>
+        </p:spPr>
+      </p:sp>
+      <p:pic>
+        <p:nvPicPr>
+          <p:cNvPr id="11" name="Image 2" descr="/Users/boungoumbimigloirebryan/Desktop/ProjetCda/docs/screenshots/fig15-validation.png">    </p:cNvPr>
+          <p:cNvPicPr>
+            <a:picLocks noChangeAspect="1"/>
+          </p:cNvPicPr>
+          <p:nvPr/>
+        </p:nvPicPr>
+        <p:blipFill>
+          <a:blip r:embed="rId3"/>
+          <a:stretch>
+            <a:fillRect/>
+          </a:stretch>
+        </p:blipFill>
+        <p:spPr>
+          <a:xfrm>
+            <a:off x="1947672" y="3950208"/>
+            <a:ext cx="2779776" cy="1737360"/>
+          </a:xfrm>
+          <a:prstGeom prst="rect">
+            <a:avLst/>
+          </a:prstGeom>
+        </p:spPr>
+      </p:pic>
+      <p:sp>
+        <p:nvSpPr>
+          <p:cNvPr id="12" name="Text 7"/>
+          <p:cNvSpPr/>
+          <p:nvPr/>
+        </p:nvSpPr>
+        <p:spPr>
+          <a:xfrm>
+            <a:off x="640080" y="5669280"/>
+            <a:ext cx="5394960" cy="274320"/>
           </a:xfrm>
           <a:prstGeom prst="rect">
             <a:avLst/>
@@ -5282,72 +5345,88 @@
               <a:buNone/>
             </a:pPr>
             <a:r>
-              <a:rPr lang="en-US" sz="1400" b="1" dirty="0">
-                <a:solidFill>
-                  <a:srgbClr val="0B5394"/>
-                </a:solidFill>
-                <a:latin typeface="Calibri" pitchFamily="34" charset="0"/>
-                <a:ea typeface="Calibri" pitchFamily="34" charset="-122"/>
-                <a:cs typeface="Calibri" pitchFamily="34" charset="-120"/>
-              </a:rPr>
-              <a:t>📷 CAPTURE D'ÉCRAN À INSÉRER
-</a:t>
-            </a:r>
-            <a:pPr algn="ctr" indent="0" marL="0">
-              <a:buNone/>
-            </a:pPr>
-            <a:r>
-              <a:rPr lang="en-US" sz="1100" i="1" dirty="0">
-                <a:solidFill>
-                  <a:srgbClr val="5B6B7B"/>
-                </a:solidFill>
-                <a:latin typeface="Calibri" pitchFamily="34" charset="0"/>
-                <a:ea typeface="Calibri" pitchFamily="34" charset="-122"/>
-                <a:cs typeface="Calibri" pitchFamily="34" charset="-120"/>
-              </a:rPr>
-              <a:t>Espace de validation manager</a:t>
-            </a:r>
-            <a:endParaRPr lang="en-US" sz="1400" dirty="0"/>
-          </a:p>
-        </p:txBody>
-      </p:sp>
-      <p:sp>
-        <p:nvSpPr>
-          <p:cNvPr id="10" name="Shape 8"/>
-          <p:cNvSpPr/>
-          <p:nvPr/>
-        </p:nvSpPr>
-        <p:spPr>
-          <a:xfrm>
-            <a:off x="6126480" y="3886200"/>
-            <a:ext cx="5394960" cy="2103120"/>
+              <a:rPr lang="en-US" sz="1200" b="1" dirty="0">
+                <a:solidFill>
+                  <a:srgbClr val="1B2A3A"/>
+                </a:solidFill>
+                <a:latin typeface="Calibri" pitchFamily="34" charset="0"/>
+                <a:ea typeface="Calibri" pitchFamily="34" charset="-122"/>
+                <a:cs typeface="Calibri" pitchFamily="34" charset="-120"/>
+              </a:rPr>
+              <a:t>Validation manager</a:t>
+            </a:r>
+            <a:endParaRPr lang="en-US" sz="1200" dirty="0"/>
+          </a:p>
+        </p:txBody>
+      </p:sp>
+      <p:sp>
+        <p:nvSpPr>
+          <p:cNvPr id="13" name="Shape 8"/>
+          <p:cNvSpPr/>
+          <p:nvPr/>
+        </p:nvSpPr>
+        <p:spPr>
+          <a:xfrm>
+            <a:off x="6126480" y="3840480"/>
+            <a:ext cx="5394960" cy="2194560"/>
           </a:xfrm>
           <a:prstGeom prst="roundRect">
             <a:avLst>
-              <a:gd name="adj" fmla="val 2609"/>
+              <a:gd name="adj" fmla="val 3333"/>
             </a:avLst>
           </a:prstGeom>
           <a:solidFill>
-            <a:srgbClr val="F4F8FB"/>
+            <a:srgbClr val="EAF1F6"/>
           </a:solidFill>
-          <a:ln w="19050">
+          <a:ln w="12700">
             <a:solidFill>
-              <a:srgbClr val="0B5394"/>
+              <a:srgbClr val="DCE6EE"/>
             </a:solidFill>
-            <a:prstDash val="dash"/>
+            <a:prstDash val="solid"/>
           </a:ln>
-        </p:spPr>
-      </p:sp>
-      <p:sp>
-        <p:nvSpPr>
-          <p:cNvPr id="11" name="Text 9"/>
-          <p:cNvSpPr/>
-          <p:nvPr/>
-        </p:nvSpPr>
-        <p:spPr>
-          <a:xfrm>
-            <a:off x="6309360" y="3886200"/>
-            <a:ext cx="5029200" cy="2103120"/>
+          <a:effectLst>
+            <a:outerShdw sx="100000" sy="100000" kx="0" ky="0" algn="bl" rotWithShape="0" blurRad="76200" dist="25400" dir="5400000">
+              <a:srgbClr val="B9C6D2">
+                <a:alpha val="30000"/>
+              </a:srgbClr>
+            </a:outerShdw>
+          </a:effectLst>
+        </p:spPr>
+      </p:sp>
+      <p:pic>
+        <p:nvPicPr>
+          <p:cNvPr id="14" name="Image 3" descr="/Users/boungoumbimigloirebryan/Desktop/ProjetCda/docs/screenshots/fig16-dashboard.png">    </p:cNvPr>
+          <p:cNvPicPr>
+            <a:picLocks noChangeAspect="1"/>
+          </p:cNvPicPr>
+          <p:nvPr/>
+        </p:nvPicPr>
+        <p:blipFill>
+          <a:blip r:embed="rId4"/>
+          <a:stretch>
+            <a:fillRect/>
+          </a:stretch>
+        </p:blipFill>
+        <p:spPr>
+          <a:xfrm>
+            <a:off x="7434072" y="3950208"/>
+            <a:ext cx="2779776" cy="1737360"/>
+          </a:xfrm>
+          <a:prstGeom prst="rect">
+            <a:avLst/>
+          </a:prstGeom>
+        </p:spPr>
+      </p:pic>
+      <p:sp>
+        <p:nvSpPr>
+          <p:cNvPr id="15" name="Text 9"/>
+          <p:cNvSpPr/>
+          <p:nvPr/>
+        </p:nvSpPr>
+        <p:spPr>
+          <a:xfrm>
+            <a:off x="6126480" y="5669280"/>
+            <a:ext cx="5394960" cy="274320"/>
           </a:xfrm>
           <a:prstGeom prst="rect">
             <a:avLst/>
@@ -5363,32 +5442,17 @@
               <a:buNone/>
             </a:pPr>
             <a:r>
-              <a:rPr lang="en-US" sz="1400" b="1" dirty="0">
-                <a:solidFill>
-                  <a:srgbClr val="0B5394"/>
-                </a:solidFill>
-                <a:latin typeface="Calibri" pitchFamily="34" charset="0"/>
-                <a:ea typeface="Calibri" pitchFamily="34" charset="-122"/>
-                <a:cs typeface="Calibri" pitchFamily="34" charset="-120"/>
-              </a:rPr>
-              <a:t>📷 CAPTURE D'ÉCRAN À INSÉRER
-</a:t>
-            </a:r>
-            <a:pPr algn="ctr" indent="0" marL="0">
-              <a:buNone/>
-            </a:pPr>
-            <a:r>
-              <a:rPr lang="en-US" sz="1100" i="1" dirty="0">
-                <a:solidFill>
-                  <a:srgbClr val="5B6B7B"/>
-                </a:solidFill>
-                <a:latin typeface="Calibri" pitchFamily="34" charset="0"/>
-                <a:ea typeface="Calibri" pitchFamily="34" charset="-122"/>
-                <a:cs typeface="Calibri" pitchFamily="34" charset="-120"/>
-              </a:rPr>
-              <a:t>Documentation Swagger de l'API</a:t>
-            </a:r>
-            <a:endParaRPr lang="en-US" sz="1400" dirty="0"/>
+              <a:rPr lang="en-US" sz="1200" b="1" dirty="0">
+                <a:solidFill>
+                  <a:srgbClr val="1B2A3A"/>
+                </a:solidFill>
+                <a:latin typeface="Calibri" pitchFamily="34" charset="0"/>
+                <a:ea typeface="Calibri" pitchFamily="34" charset="-122"/>
+                <a:cs typeface="Calibri" pitchFamily="34" charset="-120"/>
+              </a:rPr>
+              <a:t>Tableau de bord</a:t>
+            </a:r>
+            <a:endParaRPr lang="en-US" sz="1200" dirty="0"/>
           </a:p>
         </p:txBody>
       </p:sp>
@@ -7479,7 +7543,7 @@
                 <a:ea typeface="Calibri" pitchFamily="34" charset="-122"/>
                 <a:cs typeface="Calibri" pitchFamily="34" charset="-120"/>
               </a:rPr>
-              <a:t>CongésFlow · Démo : http://localhost:5173 · Dépôt : [lien GitHub]</a:t>
+              <a:t>App : congesflow-web.onrender.com   ·   Code : github.com/glo007/congesflow</a:t>
             </a:r>
             <a:endParaRPr lang="en-US" sz="1300" dirty="0"/>
           </a:p>

--- a/livrables/Presentation_Soutenance_CongesFlow.pptx
+++ b/livrables/Presentation_Soutenance_CongesFlow.pptx
@@ -2685,7 +2685,7 @@
                 <a:ea typeface="Calibri" pitchFamily="34" charset="-122"/>
                 <a:cs typeface="Calibri" pitchFamily="34" charset="-120"/>
               </a:rPr>
-              <a:t>[Votre Nom Prénom]  ·  Encadrant : M'hand BOUFALA</a:t>
+              <a:t>BOUNGOU MBIMI Gloire Bryan  ·  Encadrant : M'hand BOUFALA</a:t>
             </a:r>
             <a:endParaRPr lang="en-US" sz="1300" dirty="0"/>
           </a:p>
@@ -5215,8 +5215,8 @@
         </p:blipFill>
         <p:spPr>
           <a:xfrm>
-            <a:off x="7555300" y="1664208"/>
-            <a:ext cx="2537321" cy="1737360"/>
+            <a:off x="7610673" y="1664208"/>
+            <a:ext cx="2426575" cy="1737360"/>
           </a:xfrm>
           <a:prstGeom prst="rect">
             <a:avLst/>
